--- a/in_class_slides/geog4300_L05-readingdata.pptx
+++ b/in_class_slides/geog4300_L05-readingdata.pptx
@@ -5,14 +5,23 @@
     <p:sldMasterId id="2147483732" r:id="rId1"/>
   </p:sldMasterIdLst>
   <p:notesMasterIdLst>
-    <p:notesMasterId r:id="rId7"/>
+    <p:notesMasterId r:id="rId16"/>
   </p:notesMasterIdLst>
   <p:sldIdLst>
     <p:sldId id="256" r:id="rId2"/>
     <p:sldId id="262" r:id="rId3"/>
-    <p:sldId id="270" r:id="rId4"/>
-    <p:sldId id="271" r:id="rId5"/>
-    <p:sldId id="272" r:id="rId6"/>
+    <p:sldId id="274" r:id="rId4"/>
+    <p:sldId id="275" r:id="rId5"/>
+    <p:sldId id="276" r:id="rId6"/>
+    <p:sldId id="272" r:id="rId7"/>
+    <p:sldId id="273" r:id="rId8"/>
+    <p:sldId id="280" r:id="rId9"/>
+    <p:sldId id="281" r:id="rId10"/>
+    <p:sldId id="270" r:id="rId11"/>
+    <p:sldId id="271" r:id="rId12"/>
+    <p:sldId id="277" r:id="rId13"/>
+    <p:sldId id="278" r:id="rId14"/>
+    <p:sldId id="279" r:id="rId15"/>
   </p:sldIdLst>
   <p:sldSz cx="12192000" cy="6858000"/>
   <p:notesSz cx="6858000" cy="9144000"/>
@@ -1149,234 +1158,6 @@
           <a:bodyPr/>
           <a:lstStyle/>
           <a:p>
-            <a:pPr rtl="0" fontAlgn="base"/>
-            <a:r>
-              <a:rPr lang="en-US" sz="1200" b="0" i="0" kern="1200" dirty="0">
-                <a:solidFill>
-                  <a:schemeClr val="tx1"/>
-                </a:solidFill>
-                <a:effectLst/>
-                <a:latin typeface="+mn-lt"/>
-                <a:ea typeface="+mn-ea"/>
-                <a:cs typeface="+mn-cs"/>
-              </a:rPr>
-              <a:t>Think of it as a </a:t>
-            </a:r>
-            <a:r>
-              <a:rPr lang="en-US" sz="1200" b="1" i="0" kern="1200" dirty="0">
-                <a:solidFill>
-                  <a:schemeClr val="tx1"/>
-                </a:solidFill>
-                <a:effectLst/>
-                <a:latin typeface="+mn-lt"/>
-                <a:ea typeface="+mn-ea"/>
-                <a:cs typeface="+mn-cs"/>
-              </a:rPr>
-              <a:t>bridge</a:t>
-            </a:r>
-            <a:r>
-              <a:rPr lang="en-US" sz="1200" b="0" i="0" kern="1200" dirty="0">
-                <a:solidFill>
-                  <a:schemeClr val="tx1"/>
-                </a:solidFill>
-                <a:effectLst/>
-                <a:latin typeface="+mn-lt"/>
-                <a:ea typeface="+mn-ea"/>
-                <a:cs typeface="+mn-cs"/>
-              </a:rPr>
-              <a:t> that connects two systems—such as a client and a server—and enables them to work together seamlessly.</a:t>
-            </a:r>
-          </a:p>
-          <a:p>
-            <a:pPr rtl="0" fontAlgn="base"/>
-            <a:r>
-              <a:rPr lang="en-US" sz="1200" b="0" i="0" kern="1200" dirty="0">
-                <a:solidFill>
-                  <a:schemeClr val="tx1"/>
-                </a:solidFill>
-                <a:effectLst/>
-                <a:latin typeface="+mn-lt"/>
-                <a:ea typeface="+mn-ea"/>
-                <a:cs typeface="+mn-cs"/>
-              </a:rPr>
-              <a:t>To understand it better, imagine you're at a restaurant: the </a:t>
-            </a:r>
-            <a:r>
-              <a:rPr lang="en-US" sz="1200" b="1" i="0" kern="1200" dirty="0">
-                <a:solidFill>
-                  <a:schemeClr val="tx1"/>
-                </a:solidFill>
-                <a:effectLst/>
-                <a:latin typeface="+mn-lt"/>
-                <a:ea typeface="+mn-ea"/>
-                <a:cs typeface="+mn-cs"/>
-              </a:rPr>
-              <a:t>waiter</a:t>
-            </a:r>
-            <a:r>
-              <a:rPr lang="en-US" sz="1200" b="0" i="0" kern="1200" dirty="0">
-                <a:solidFill>
-                  <a:schemeClr val="tx1"/>
-                </a:solidFill>
-                <a:effectLst/>
-                <a:latin typeface="+mn-lt"/>
-                <a:ea typeface="+mn-ea"/>
-                <a:cs typeface="+mn-cs"/>
-              </a:rPr>
-              <a:t> (API) takes your order (request), gives it to the </a:t>
-            </a:r>
-            <a:r>
-              <a:rPr lang="en-US" sz="1200" b="1" i="0" kern="1200" dirty="0">
-                <a:solidFill>
-                  <a:schemeClr val="tx1"/>
-                </a:solidFill>
-                <a:effectLst/>
-                <a:latin typeface="+mn-lt"/>
-                <a:ea typeface="+mn-ea"/>
-                <a:cs typeface="+mn-cs"/>
-              </a:rPr>
-              <a:t>chef</a:t>
-            </a:r>
-            <a:r>
-              <a:rPr lang="en-US" sz="1200" b="0" i="0" kern="1200" dirty="0">
-                <a:solidFill>
-                  <a:schemeClr val="tx1"/>
-                </a:solidFill>
-                <a:effectLst/>
-                <a:latin typeface="+mn-lt"/>
-                <a:ea typeface="+mn-ea"/>
-                <a:cs typeface="+mn-cs"/>
-              </a:rPr>
-              <a:t> (server), and then brings the prepared food (response) back to your table. Similarly, when you search for a course on a website, your request goes through an API, which then fetches the data from the database and sends it back as a response.</a:t>
-            </a:r>
-          </a:p>
-          <a:p>
-            <a:endParaRPr lang="en-US" dirty="0"/>
-          </a:p>
-          <a:p>
-            <a:pPr rtl="0" fontAlgn="base"/>
-            <a:r>
-              <a:rPr lang="en-US" sz="1200" b="0" i="0" kern="1200" dirty="0">
-                <a:solidFill>
-                  <a:schemeClr val="tx1"/>
-                </a:solidFill>
-                <a:effectLst/>
-                <a:latin typeface="+mn-lt"/>
-                <a:ea typeface="+mn-ea"/>
-                <a:cs typeface="+mn-cs"/>
-              </a:rPr>
-              <a:t>APIs work in a simple step-by-step process:</a:t>
-            </a:r>
-          </a:p>
-          <a:p>
-            <a:pPr fontAlgn="base"/>
-            <a:r>
-              <a:rPr lang="en-US" sz="1200" b="1" i="0" kern="1200" dirty="0">
-                <a:solidFill>
-                  <a:schemeClr val="tx1"/>
-                </a:solidFill>
-                <a:effectLst/>
-                <a:latin typeface="+mn-lt"/>
-                <a:ea typeface="+mn-ea"/>
-                <a:cs typeface="+mn-cs"/>
-              </a:rPr>
-              <a:t>Request:</a:t>
-            </a:r>
-            <a:r>
-              <a:rPr lang="en-US" sz="1200" b="0" i="0" kern="1200" dirty="0">
-                <a:solidFill>
-                  <a:schemeClr val="tx1"/>
-                </a:solidFill>
-                <a:effectLst/>
-                <a:latin typeface="+mn-lt"/>
-                <a:ea typeface="+mn-ea"/>
-                <a:cs typeface="+mn-cs"/>
-              </a:rPr>
-              <a:t> A client (user) sends a request through the API's URI (Uniform Resource Identifier).</a:t>
-            </a:r>
-          </a:p>
-          <a:p>
-            <a:pPr fontAlgn="base"/>
-            <a:r>
-              <a:rPr lang="en-US" sz="1200" b="1" i="0" kern="1200" dirty="0">
-                <a:solidFill>
-                  <a:schemeClr val="tx1"/>
-                </a:solidFill>
-                <a:effectLst/>
-                <a:latin typeface="+mn-lt"/>
-                <a:ea typeface="+mn-ea"/>
-                <a:cs typeface="+mn-cs"/>
-              </a:rPr>
-              <a:t>Processing:</a:t>
-            </a:r>
-            <a:r>
-              <a:rPr lang="en-US" sz="1200" b="0" i="0" kern="1200" dirty="0">
-                <a:solidFill>
-                  <a:schemeClr val="tx1"/>
-                </a:solidFill>
-                <a:effectLst/>
-                <a:latin typeface="+mn-lt"/>
-                <a:ea typeface="+mn-ea"/>
-                <a:cs typeface="+mn-cs"/>
-              </a:rPr>
-              <a:t> The API forwards the request to the server.</a:t>
-            </a:r>
-          </a:p>
-          <a:p>
-            <a:pPr fontAlgn="base"/>
-            <a:r>
-              <a:rPr lang="en-US" sz="1200" b="1" i="0" kern="1200" dirty="0">
-                <a:solidFill>
-                  <a:schemeClr val="tx1"/>
-                </a:solidFill>
-                <a:effectLst/>
-                <a:latin typeface="+mn-lt"/>
-                <a:ea typeface="+mn-ea"/>
-                <a:cs typeface="+mn-cs"/>
-              </a:rPr>
-              <a:t>Response:</a:t>
-            </a:r>
-            <a:r>
-              <a:rPr lang="en-US" sz="1200" b="0" i="0" kern="1200" dirty="0">
-                <a:solidFill>
-                  <a:schemeClr val="tx1"/>
-                </a:solidFill>
-                <a:effectLst/>
-                <a:latin typeface="+mn-lt"/>
-                <a:ea typeface="+mn-ea"/>
-                <a:cs typeface="+mn-cs"/>
-              </a:rPr>
-              <a:t> The server processes the request and sends the response back to the API.</a:t>
-            </a:r>
-          </a:p>
-          <a:p>
-            <a:pPr fontAlgn="base"/>
-            <a:r>
-              <a:rPr lang="en-US" sz="1200" b="1" i="0" kern="1200" dirty="0">
-                <a:solidFill>
-                  <a:schemeClr val="tx1"/>
-                </a:solidFill>
-                <a:effectLst/>
-                <a:latin typeface="+mn-lt"/>
-                <a:ea typeface="+mn-ea"/>
-                <a:cs typeface="+mn-cs"/>
-              </a:rPr>
-              <a:t>Delivery:</a:t>
-            </a:r>
-            <a:r>
-              <a:rPr lang="en-US" sz="1200" b="0" i="0" kern="1200" dirty="0">
-                <a:solidFill>
-                  <a:schemeClr val="tx1"/>
-                </a:solidFill>
-                <a:effectLst/>
-                <a:latin typeface="+mn-lt"/>
-                <a:ea typeface="+mn-ea"/>
-                <a:cs typeface="+mn-cs"/>
-              </a:rPr>
-              <a:t> The API returns the server's response to the client.</a:t>
-            </a:r>
-          </a:p>
-          <a:p>
             <a:endParaRPr lang="en-US" dirty="0"/>
           </a:p>
         </p:txBody>
@@ -1399,6 +1180,486 @@
             <a:fld id="{1EB84F3F-161C-D647-9920-F983A7A8B541}" type="slidenum">
               <a:rPr lang="en-US" smtClean="0"/>
               <a:t>3</a:t>
+            </a:fld>
+            <a:endParaRPr lang="en-US"/>
+          </a:p>
+        </p:txBody>
+      </p:sp>
+    </p:spTree>
+    <p:extLst>
+      <p:ext uri="{BB962C8B-B14F-4D97-AF65-F5344CB8AC3E}">
+        <p14:creationId xmlns:p14="http://schemas.microsoft.com/office/powerpoint/2010/main" val="952481799"/>
+      </p:ext>
+    </p:extLst>
+  </p:cSld>
+  <p:clrMapOvr>
+    <a:masterClrMapping/>
+  </p:clrMapOvr>
+</p:notes>
+</file>
+
+<file path=ppt/notesSlides/notesSlide3.xml><?xml version="1.0" encoding="utf-8"?>
+<p:notes xmlns:a="http://schemas.openxmlformats.org/drawingml/2006/main" xmlns:r="http://schemas.openxmlformats.org/officeDocument/2006/relationships" xmlns:p="http://schemas.openxmlformats.org/presentationml/2006/main">
+  <p:cSld>
+    <p:spTree>
+      <p:nvGrpSpPr>
+        <p:cNvPr id="1" name=""/>
+        <p:cNvGrpSpPr/>
+        <p:nvPr/>
+      </p:nvGrpSpPr>
+      <p:grpSpPr>
+        <a:xfrm>
+          <a:off x="0" y="0"/>
+          <a:ext cx="0" cy="0"/>
+          <a:chOff x="0" y="0"/>
+          <a:chExt cx="0" cy="0"/>
+        </a:xfrm>
+      </p:grpSpPr>
+      <p:sp>
+        <p:nvSpPr>
+          <p:cNvPr id="2" name="Slide Image Placeholder 1"/>
+          <p:cNvSpPr>
+            <a:spLocks noGrp="1" noRot="1" noChangeAspect="1"/>
+          </p:cNvSpPr>
+          <p:nvPr>
+            <p:ph type="sldImg"/>
+          </p:nvPr>
+        </p:nvSpPr>
+        <p:spPr/>
+      </p:sp>
+      <p:sp>
+        <p:nvSpPr>
+          <p:cNvPr id="3" name="Notes Placeholder 2"/>
+          <p:cNvSpPr>
+            <a:spLocks noGrp="1"/>
+          </p:cNvSpPr>
+          <p:nvPr>
+            <p:ph type="body" idx="1"/>
+          </p:nvPr>
+        </p:nvSpPr>
+        <p:spPr/>
+        <p:txBody>
+          <a:bodyPr/>
+          <a:lstStyle/>
+          <a:p>
+            <a:endParaRPr lang="en-US" dirty="0"/>
+          </a:p>
+        </p:txBody>
+      </p:sp>
+      <p:sp>
+        <p:nvSpPr>
+          <p:cNvPr id="4" name="Slide Number Placeholder 3"/>
+          <p:cNvSpPr>
+            <a:spLocks noGrp="1"/>
+          </p:cNvSpPr>
+          <p:nvPr>
+            <p:ph type="sldNum" sz="quarter" idx="5"/>
+          </p:nvPr>
+        </p:nvSpPr>
+        <p:spPr/>
+        <p:txBody>
+          <a:bodyPr/>
+          <a:lstStyle/>
+          <a:p>
+            <a:fld id="{1EB84F3F-161C-D647-9920-F983A7A8B541}" type="slidenum">
+              <a:rPr lang="en-US" smtClean="0"/>
+              <a:t>4</a:t>
+            </a:fld>
+            <a:endParaRPr lang="en-US"/>
+          </a:p>
+        </p:txBody>
+      </p:sp>
+    </p:spTree>
+    <p:extLst>
+      <p:ext uri="{BB962C8B-B14F-4D97-AF65-F5344CB8AC3E}">
+        <p14:creationId xmlns:p14="http://schemas.microsoft.com/office/powerpoint/2010/main" val="2553052726"/>
+      </p:ext>
+    </p:extLst>
+  </p:cSld>
+  <p:clrMapOvr>
+    <a:masterClrMapping/>
+  </p:clrMapOvr>
+</p:notes>
+</file>
+
+<file path=ppt/notesSlides/notesSlide4.xml><?xml version="1.0" encoding="utf-8"?>
+<p:notes xmlns:a="http://schemas.openxmlformats.org/drawingml/2006/main" xmlns:r="http://schemas.openxmlformats.org/officeDocument/2006/relationships" xmlns:p="http://schemas.openxmlformats.org/presentationml/2006/main">
+  <p:cSld>
+    <p:spTree>
+      <p:nvGrpSpPr>
+        <p:cNvPr id="1" name=""/>
+        <p:cNvGrpSpPr/>
+        <p:nvPr/>
+      </p:nvGrpSpPr>
+      <p:grpSpPr>
+        <a:xfrm>
+          <a:off x="0" y="0"/>
+          <a:ext cx="0" cy="0"/>
+          <a:chOff x="0" y="0"/>
+          <a:chExt cx="0" cy="0"/>
+        </a:xfrm>
+      </p:grpSpPr>
+      <p:sp>
+        <p:nvSpPr>
+          <p:cNvPr id="2" name="Slide Image Placeholder 1"/>
+          <p:cNvSpPr>
+            <a:spLocks noGrp="1" noRot="1" noChangeAspect="1"/>
+          </p:cNvSpPr>
+          <p:nvPr>
+            <p:ph type="sldImg"/>
+          </p:nvPr>
+        </p:nvSpPr>
+        <p:spPr/>
+      </p:sp>
+      <p:sp>
+        <p:nvSpPr>
+          <p:cNvPr id="3" name="Notes Placeholder 2"/>
+          <p:cNvSpPr>
+            <a:spLocks noGrp="1"/>
+          </p:cNvSpPr>
+          <p:nvPr>
+            <p:ph type="body" idx="1"/>
+          </p:nvPr>
+        </p:nvSpPr>
+        <p:spPr/>
+        <p:txBody>
+          <a:bodyPr/>
+          <a:lstStyle/>
+          <a:p>
+            <a:endParaRPr lang="en-US" dirty="0"/>
+          </a:p>
+        </p:txBody>
+      </p:sp>
+      <p:sp>
+        <p:nvSpPr>
+          <p:cNvPr id="4" name="Slide Number Placeholder 3"/>
+          <p:cNvSpPr>
+            <a:spLocks noGrp="1"/>
+          </p:cNvSpPr>
+          <p:nvPr>
+            <p:ph type="sldNum" sz="quarter" idx="5"/>
+          </p:nvPr>
+        </p:nvSpPr>
+        <p:spPr/>
+        <p:txBody>
+          <a:bodyPr/>
+          <a:lstStyle/>
+          <a:p>
+            <a:fld id="{1EB84F3F-161C-D647-9920-F983A7A8B541}" type="slidenum">
+              <a:rPr lang="en-US" smtClean="0"/>
+              <a:t>5</a:t>
+            </a:fld>
+            <a:endParaRPr lang="en-US"/>
+          </a:p>
+        </p:txBody>
+      </p:sp>
+    </p:spTree>
+    <p:extLst>
+      <p:ext uri="{BB962C8B-B14F-4D97-AF65-F5344CB8AC3E}">
+        <p14:creationId xmlns:p14="http://schemas.microsoft.com/office/powerpoint/2010/main" val="3360824532"/>
+      </p:ext>
+    </p:extLst>
+  </p:cSld>
+  <p:clrMapOvr>
+    <a:masterClrMapping/>
+  </p:clrMapOvr>
+</p:notes>
+</file>
+
+<file path=ppt/notesSlides/notesSlide5.xml><?xml version="1.0" encoding="utf-8"?>
+<p:notes xmlns:a="http://schemas.openxmlformats.org/drawingml/2006/main" xmlns:r="http://schemas.openxmlformats.org/officeDocument/2006/relationships" xmlns:p="http://schemas.openxmlformats.org/presentationml/2006/main">
+  <p:cSld>
+    <p:spTree>
+      <p:nvGrpSpPr>
+        <p:cNvPr id="1" name=""/>
+        <p:cNvGrpSpPr/>
+        <p:nvPr/>
+      </p:nvGrpSpPr>
+      <p:grpSpPr>
+        <a:xfrm>
+          <a:off x="0" y="0"/>
+          <a:ext cx="0" cy="0"/>
+          <a:chOff x="0" y="0"/>
+          <a:chExt cx="0" cy="0"/>
+        </a:xfrm>
+      </p:grpSpPr>
+      <p:sp>
+        <p:nvSpPr>
+          <p:cNvPr id="2" name="Slide Image Placeholder 1"/>
+          <p:cNvSpPr>
+            <a:spLocks noGrp="1" noRot="1" noChangeAspect="1"/>
+          </p:cNvSpPr>
+          <p:nvPr>
+            <p:ph type="sldImg"/>
+          </p:nvPr>
+        </p:nvSpPr>
+        <p:spPr/>
+      </p:sp>
+      <p:sp>
+        <p:nvSpPr>
+          <p:cNvPr id="3" name="Notes Placeholder 2"/>
+          <p:cNvSpPr>
+            <a:spLocks noGrp="1"/>
+          </p:cNvSpPr>
+          <p:nvPr>
+            <p:ph type="body" idx="1"/>
+          </p:nvPr>
+        </p:nvSpPr>
+        <p:spPr/>
+        <p:txBody>
+          <a:bodyPr/>
+          <a:lstStyle/>
+          <a:p>
+            <a:pPr rtl="0" fontAlgn="base"/>
+            <a:r>
+              <a:rPr lang="en-US" sz="1200" b="0" i="0" kern="1200" dirty="0">
+                <a:solidFill>
+                  <a:schemeClr val="tx1"/>
+                </a:solidFill>
+                <a:effectLst/>
+                <a:latin typeface="+mn-lt"/>
+                <a:ea typeface="+mn-ea"/>
+                <a:cs typeface="+mn-cs"/>
+              </a:rPr>
+              <a:t>Think of it as a </a:t>
+            </a:r>
+            <a:r>
+              <a:rPr lang="en-US" sz="1200" b="1" i="0" kern="1200" dirty="0">
+                <a:solidFill>
+                  <a:schemeClr val="tx1"/>
+                </a:solidFill>
+                <a:effectLst/>
+                <a:latin typeface="+mn-lt"/>
+                <a:ea typeface="+mn-ea"/>
+                <a:cs typeface="+mn-cs"/>
+              </a:rPr>
+              <a:t>bridge</a:t>
+            </a:r>
+            <a:r>
+              <a:rPr lang="en-US" sz="1200" b="0" i="0" kern="1200" dirty="0">
+                <a:solidFill>
+                  <a:schemeClr val="tx1"/>
+                </a:solidFill>
+                <a:effectLst/>
+                <a:latin typeface="+mn-lt"/>
+                <a:ea typeface="+mn-ea"/>
+                <a:cs typeface="+mn-cs"/>
+              </a:rPr>
+              <a:t> that connects two systems—such as a client and a server—and enables them to work together seamlessly.</a:t>
+            </a:r>
+          </a:p>
+          <a:p>
+            <a:pPr rtl="0" fontAlgn="base"/>
+            <a:r>
+              <a:rPr lang="en-US" sz="1200" b="0" i="0" kern="1200" dirty="0">
+                <a:solidFill>
+                  <a:schemeClr val="tx1"/>
+                </a:solidFill>
+                <a:effectLst/>
+                <a:latin typeface="+mn-lt"/>
+                <a:ea typeface="+mn-ea"/>
+                <a:cs typeface="+mn-cs"/>
+              </a:rPr>
+              <a:t>To understand it better, imagine you're at a restaurant: the </a:t>
+            </a:r>
+            <a:r>
+              <a:rPr lang="en-US" sz="1200" b="1" i="0" kern="1200" dirty="0">
+                <a:solidFill>
+                  <a:schemeClr val="tx1"/>
+                </a:solidFill>
+                <a:effectLst/>
+                <a:latin typeface="+mn-lt"/>
+                <a:ea typeface="+mn-ea"/>
+                <a:cs typeface="+mn-cs"/>
+              </a:rPr>
+              <a:t>waiter</a:t>
+            </a:r>
+            <a:r>
+              <a:rPr lang="en-US" sz="1200" b="0" i="0" kern="1200" dirty="0">
+                <a:solidFill>
+                  <a:schemeClr val="tx1"/>
+                </a:solidFill>
+                <a:effectLst/>
+                <a:latin typeface="+mn-lt"/>
+                <a:ea typeface="+mn-ea"/>
+                <a:cs typeface="+mn-cs"/>
+              </a:rPr>
+              <a:t> (API) takes your order (request), gives it to the </a:t>
+            </a:r>
+            <a:r>
+              <a:rPr lang="en-US" sz="1200" b="1" i="0" kern="1200" dirty="0">
+                <a:solidFill>
+                  <a:schemeClr val="tx1"/>
+                </a:solidFill>
+                <a:effectLst/>
+                <a:latin typeface="+mn-lt"/>
+                <a:ea typeface="+mn-ea"/>
+                <a:cs typeface="+mn-cs"/>
+              </a:rPr>
+              <a:t>chef</a:t>
+            </a:r>
+            <a:r>
+              <a:rPr lang="en-US" sz="1200" b="0" i="0" kern="1200" dirty="0">
+                <a:solidFill>
+                  <a:schemeClr val="tx1"/>
+                </a:solidFill>
+                <a:effectLst/>
+                <a:latin typeface="+mn-lt"/>
+                <a:ea typeface="+mn-ea"/>
+                <a:cs typeface="+mn-cs"/>
+              </a:rPr>
+              <a:t> (server), and then brings the prepared food (response) back to your table. Similarly, when you search for a course on a website, your request goes through an API, which then fetches the data from the database and sends it back as a response.</a:t>
+            </a:r>
+          </a:p>
+          <a:p>
+            <a:endParaRPr lang="en-US" dirty="0"/>
+          </a:p>
+          <a:p>
+            <a:pPr rtl="0" fontAlgn="base"/>
+            <a:r>
+              <a:rPr lang="en-US" sz="1200" b="0" i="0" kern="1200" dirty="0">
+                <a:solidFill>
+                  <a:schemeClr val="tx1"/>
+                </a:solidFill>
+                <a:effectLst/>
+                <a:latin typeface="+mn-lt"/>
+                <a:ea typeface="+mn-ea"/>
+                <a:cs typeface="+mn-cs"/>
+              </a:rPr>
+              <a:t>APIs work in a simple step-by-step process:</a:t>
+            </a:r>
+          </a:p>
+          <a:p>
+            <a:pPr fontAlgn="base"/>
+            <a:r>
+              <a:rPr lang="en-US" sz="1200" b="1" i="0" kern="1200" dirty="0">
+                <a:solidFill>
+                  <a:schemeClr val="tx1"/>
+                </a:solidFill>
+                <a:effectLst/>
+                <a:latin typeface="+mn-lt"/>
+                <a:ea typeface="+mn-ea"/>
+                <a:cs typeface="+mn-cs"/>
+              </a:rPr>
+              <a:t>Request:</a:t>
+            </a:r>
+            <a:r>
+              <a:rPr lang="en-US" sz="1200" b="0" i="0" kern="1200" dirty="0">
+                <a:solidFill>
+                  <a:schemeClr val="tx1"/>
+                </a:solidFill>
+                <a:effectLst/>
+                <a:latin typeface="+mn-lt"/>
+                <a:ea typeface="+mn-ea"/>
+                <a:cs typeface="+mn-cs"/>
+              </a:rPr>
+              <a:t> A client (user) sends a request through the API's URI (Uniform Resource Identifier).</a:t>
+            </a:r>
+          </a:p>
+          <a:p>
+            <a:pPr fontAlgn="base"/>
+            <a:r>
+              <a:rPr lang="en-US" sz="1200" b="1" i="0" kern="1200" dirty="0">
+                <a:solidFill>
+                  <a:schemeClr val="tx1"/>
+                </a:solidFill>
+                <a:effectLst/>
+                <a:latin typeface="+mn-lt"/>
+                <a:ea typeface="+mn-ea"/>
+                <a:cs typeface="+mn-cs"/>
+              </a:rPr>
+              <a:t>Processing:</a:t>
+            </a:r>
+            <a:r>
+              <a:rPr lang="en-US" sz="1200" b="0" i="0" kern="1200" dirty="0">
+                <a:solidFill>
+                  <a:schemeClr val="tx1"/>
+                </a:solidFill>
+                <a:effectLst/>
+                <a:latin typeface="+mn-lt"/>
+                <a:ea typeface="+mn-ea"/>
+                <a:cs typeface="+mn-cs"/>
+              </a:rPr>
+              <a:t> The API forwards the request to the server.</a:t>
+            </a:r>
+          </a:p>
+          <a:p>
+            <a:pPr fontAlgn="base"/>
+            <a:r>
+              <a:rPr lang="en-US" sz="1200" b="1" i="0" kern="1200" dirty="0">
+                <a:solidFill>
+                  <a:schemeClr val="tx1"/>
+                </a:solidFill>
+                <a:effectLst/>
+                <a:latin typeface="+mn-lt"/>
+                <a:ea typeface="+mn-ea"/>
+                <a:cs typeface="+mn-cs"/>
+              </a:rPr>
+              <a:t>Response:</a:t>
+            </a:r>
+            <a:r>
+              <a:rPr lang="en-US" sz="1200" b="0" i="0" kern="1200" dirty="0">
+                <a:solidFill>
+                  <a:schemeClr val="tx1"/>
+                </a:solidFill>
+                <a:effectLst/>
+                <a:latin typeface="+mn-lt"/>
+                <a:ea typeface="+mn-ea"/>
+                <a:cs typeface="+mn-cs"/>
+              </a:rPr>
+              <a:t> The server processes the request and sends the response back to the API.</a:t>
+            </a:r>
+          </a:p>
+          <a:p>
+            <a:pPr fontAlgn="base"/>
+            <a:r>
+              <a:rPr lang="en-US" sz="1200" b="1" i="0" kern="1200" dirty="0">
+                <a:solidFill>
+                  <a:schemeClr val="tx1"/>
+                </a:solidFill>
+                <a:effectLst/>
+                <a:latin typeface="+mn-lt"/>
+                <a:ea typeface="+mn-ea"/>
+                <a:cs typeface="+mn-cs"/>
+              </a:rPr>
+              <a:t>Delivery:</a:t>
+            </a:r>
+            <a:r>
+              <a:rPr lang="en-US" sz="1200" b="0" i="0" kern="1200" dirty="0">
+                <a:solidFill>
+                  <a:schemeClr val="tx1"/>
+                </a:solidFill>
+                <a:effectLst/>
+                <a:latin typeface="+mn-lt"/>
+                <a:ea typeface="+mn-ea"/>
+                <a:cs typeface="+mn-cs"/>
+              </a:rPr>
+              <a:t> The API returns the server's response to the client.</a:t>
+            </a:r>
+          </a:p>
+          <a:p>
+            <a:endParaRPr lang="en-US" dirty="0"/>
+          </a:p>
+        </p:txBody>
+      </p:sp>
+      <p:sp>
+        <p:nvSpPr>
+          <p:cNvPr id="4" name="Slide Number Placeholder 3"/>
+          <p:cNvSpPr>
+            <a:spLocks noGrp="1"/>
+          </p:cNvSpPr>
+          <p:nvPr>
+            <p:ph type="sldNum" sz="quarter" idx="5"/>
+          </p:nvPr>
+        </p:nvSpPr>
+        <p:spPr/>
+        <p:txBody>
+          <a:bodyPr/>
+          <a:lstStyle/>
+          <a:p>
+            <a:fld id="{1EB84F3F-161C-D647-9920-F983A7A8B541}" type="slidenum">
+              <a:rPr lang="en-US" smtClean="0"/>
+              <a:t>10</a:t>
             </a:fld>
             <a:endParaRPr lang="en-US"/>
           </a:p>
@@ -5422,7 +5683,7 @@
           <a:p>
             <a:r>
               <a:rPr lang="en-US" sz="6000" dirty="0"/>
-              <a:t>Working with data</a:t>
+              <a:t>Reading data in R</a:t>
             </a:r>
           </a:p>
         </p:txBody>
@@ -5481,105 +5742,7 @@
 </p:sld>
 </file>
 
-<file path=ppt/slides/slide2.xml><?xml version="1.0" encoding="utf-8"?>
-<p:sld xmlns:a="http://schemas.openxmlformats.org/drawingml/2006/main" xmlns:r="http://schemas.openxmlformats.org/officeDocument/2006/relationships" xmlns:p="http://schemas.openxmlformats.org/presentationml/2006/main">
-  <p:cSld>
-    <p:spTree>
-      <p:nvGrpSpPr>
-        <p:cNvPr id="1" name=""/>
-        <p:cNvGrpSpPr/>
-        <p:nvPr/>
-      </p:nvGrpSpPr>
-      <p:grpSpPr>
-        <a:xfrm>
-          <a:off x="0" y="0"/>
-          <a:ext cx="0" cy="0"/>
-          <a:chOff x="0" y="0"/>
-          <a:chExt cx="0" cy="0"/>
-        </a:xfrm>
-      </p:grpSpPr>
-      <p:sp>
-        <p:nvSpPr>
-          <p:cNvPr id="2" name="Title 1">
-            <a:extLst>
-              <a:ext uri="{FF2B5EF4-FFF2-40B4-BE49-F238E27FC236}">
-                <a16:creationId xmlns:a16="http://schemas.microsoft.com/office/drawing/2014/main" id="{33032254-4A0C-5998-C72F-381AF98A5312}"/>
-              </a:ext>
-            </a:extLst>
-          </p:cNvPr>
-          <p:cNvSpPr>
-            <a:spLocks noGrp="1"/>
-          </p:cNvSpPr>
-          <p:nvPr>
-            <p:ph type="title"/>
-          </p:nvPr>
-        </p:nvSpPr>
-        <p:spPr/>
-        <p:txBody>
-          <a:bodyPr/>
-          <a:lstStyle/>
-          <a:p>
-            <a:r>
-              <a:rPr lang="en-US" dirty="0"/>
-              <a:t>Things to be aware of</a:t>
-            </a:r>
-          </a:p>
-        </p:txBody>
-      </p:sp>
-      <p:sp>
-        <p:nvSpPr>
-          <p:cNvPr id="3" name="Content Placeholder 2">
-            <a:extLst>
-              <a:ext uri="{FF2B5EF4-FFF2-40B4-BE49-F238E27FC236}">
-                <a16:creationId xmlns:a16="http://schemas.microsoft.com/office/drawing/2014/main" id="{50120EED-E368-D3A5-6DC2-EECF90CC1E9A}"/>
-              </a:ext>
-            </a:extLst>
-          </p:cNvPr>
-          <p:cNvSpPr>
-            <a:spLocks noGrp="1"/>
-          </p:cNvSpPr>
-          <p:nvPr>
-            <p:ph idx="1"/>
-          </p:nvPr>
-        </p:nvSpPr>
-        <p:spPr/>
-        <p:txBody>
-          <a:bodyPr>
-            <a:normAutofit/>
-          </a:bodyPr>
-          <a:lstStyle/>
-          <a:p>
-            <a:r>
-              <a:rPr lang="en-US" sz="3200" dirty="0"/>
-              <a:t>Lab 0 is due Friday September 4</a:t>
-            </a:r>
-          </a:p>
-          <a:p>
-            <a:pPr lvl="1"/>
-            <a:r>
-              <a:rPr lang="en-US" sz="2800" dirty="0"/>
-              <a:t>We’ll start on this on Friday. </a:t>
-            </a:r>
-          </a:p>
-          <a:p>
-            <a:endParaRPr lang="en-US" sz="3200" dirty="0"/>
-          </a:p>
-        </p:txBody>
-      </p:sp>
-    </p:spTree>
-    <p:extLst>
-      <p:ext uri="{BB962C8B-B14F-4D97-AF65-F5344CB8AC3E}">
-        <p14:creationId xmlns:p14="http://schemas.microsoft.com/office/powerpoint/2010/main" val="3562903912"/>
-      </p:ext>
-    </p:extLst>
-  </p:cSld>
-  <p:clrMapOvr>
-    <a:masterClrMapping/>
-  </p:clrMapOvr>
-</p:sld>
-</file>
-
-<file path=ppt/slides/slide3.xml><?xml version="1.0" encoding="utf-8"?>
+<file path=ppt/slides/slide10.xml><?xml version="1.0" encoding="utf-8"?>
 <p:sld xmlns:a="http://schemas.openxmlformats.org/drawingml/2006/main" xmlns:r="http://schemas.openxmlformats.org/officeDocument/2006/relationships" xmlns:p="http://schemas.openxmlformats.org/presentationml/2006/main">
   <p:cSld>
     <p:spTree>
@@ -5625,7 +5788,7 @@
           <a:p>
             <a:r>
               <a:rPr lang="en-US" dirty="0"/>
-              <a:t>What is an API”?</a:t>
+              <a:t>What is an “API”?</a:t>
             </a:r>
           </a:p>
         </p:txBody>
@@ -5644,7 +5807,7 @@
         </p:nvSpPr>
         <p:spPr>
           <a:xfrm>
-            <a:off x="5607424" y="1344706"/>
+            <a:off x="6206864" y="1265595"/>
             <a:ext cx="4732871" cy="369332"/>
           </a:xfrm>
           <a:prstGeom prst="rect">
@@ -5848,6 +6011,1904 @@
 </p:sld>
 </file>
 
+<file path=ppt/slides/slide11.xml><?xml version="1.0" encoding="utf-8"?>
+<p:sld xmlns:a="http://schemas.openxmlformats.org/drawingml/2006/main" xmlns:r="http://schemas.openxmlformats.org/officeDocument/2006/relationships" xmlns:p="http://schemas.openxmlformats.org/presentationml/2006/main">
+  <p:cSld>
+    <p:spTree>
+      <p:nvGrpSpPr>
+        <p:cNvPr id="1" name=""/>
+        <p:cNvGrpSpPr/>
+        <p:nvPr/>
+      </p:nvGrpSpPr>
+      <p:grpSpPr>
+        <a:xfrm>
+          <a:off x="0" y="0"/>
+          <a:ext cx="0" cy="0"/>
+          <a:chOff x="0" y="0"/>
+          <a:chExt cx="0" cy="0"/>
+        </a:xfrm>
+      </p:grpSpPr>
+      <p:sp>
+        <p:nvSpPr>
+          <p:cNvPr id="5" name="Title 4">
+            <a:extLst>
+              <a:ext uri="{FF2B5EF4-FFF2-40B4-BE49-F238E27FC236}">
+                <a16:creationId xmlns:a16="http://schemas.microsoft.com/office/drawing/2014/main" id="{ECCD8796-2D09-4694-86CC-8E6D13491717}"/>
+              </a:ext>
+            </a:extLst>
+          </p:cNvPr>
+          <p:cNvSpPr>
+            <a:spLocks noGrp="1"/>
+          </p:cNvSpPr>
+          <p:nvPr>
+            <p:ph type="title"/>
+          </p:nvPr>
+        </p:nvSpPr>
+        <p:spPr/>
+        <p:txBody>
+          <a:bodyPr>
+            <a:normAutofit/>
+          </a:bodyPr>
+          <a:lstStyle/>
+          <a:p>
+            <a:r>
+              <a:rPr lang="en-US" sz="4000" dirty="0"/>
+              <a:t>APIs work in a step-by-step process</a:t>
+            </a:r>
+          </a:p>
+        </p:txBody>
+      </p:sp>
+      <p:sp>
+        <p:nvSpPr>
+          <p:cNvPr id="3" name="Content Placeholder 2">
+            <a:extLst>
+              <a:ext uri="{FF2B5EF4-FFF2-40B4-BE49-F238E27FC236}">
+                <a16:creationId xmlns:a16="http://schemas.microsoft.com/office/drawing/2014/main" id="{3D2CD8FC-E007-2392-5465-A4C08813C892}"/>
+              </a:ext>
+            </a:extLst>
+          </p:cNvPr>
+          <p:cNvSpPr>
+            <a:spLocks noGrp="1"/>
+          </p:cNvSpPr>
+          <p:nvPr>
+            <p:ph idx="1"/>
+          </p:nvPr>
+        </p:nvSpPr>
+        <p:spPr>
+          <a:xfrm>
+            <a:off x="1097280" y="2032000"/>
+            <a:ext cx="10058400" cy="3837094"/>
+          </a:xfrm>
+        </p:spPr>
+        <p:txBody>
+          <a:bodyPr>
+            <a:normAutofit/>
+          </a:bodyPr>
+          <a:lstStyle/>
+          <a:p>
+            <a:pPr lvl="1" fontAlgn="base"/>
+            <a:r>
+              <a:rPr lang="en-US" sz="2800" b="1" dirty="0"/>
+              <a:t>Request:</a:t>
+            </a:r>
+            <a:r>
+              <a:rPr lang="en-US" sz="2800" dirty="0"/>
+              <a:t> A client (user) sends a request through the API's URI (Uniform Resource Identifier).</a:t>
+            </a:r>
+          </a:p>
+          <a:p>
+            <a:pPr lvl="1" fontAlgn="base"/>
+            <a:r>
+              <a:rPr lang="en-US" sz="2800" b="1" dirty="0"/>
+              <a:t>Processing:</a:t>
+            </a:r>
+            <a:r>
+              <a:rPr lang="en-US" sz="2800" dirty="0"/>
+              <a:t> The API forwards the request to the server.</a:t>
+            </a:r>
+          </a:p>
+          <a:p>
+            <a:pPr lvl="1" fontAlgn="base"/>
+            <a:r>
+              <a:rPr lang="en-US" sz="2800" b="1" dirty="0"/>
+              <a:t>Response:</a:t>
+            </a:r>
+            <a:r>
+              <a:rPr lang="en-US" sz="2800" dirty="0"/>
+              <a:t> The server processes the request and sends the response back to the API.</a:t>
+            </a:r>
+          </a:p>
+          <a:p>
+            <a:pPr lvl="1" fontAlgn="base"/>
+            <a:r>
+              <a:rPr lang="en-US" sz="2800" b="1" dirty="0"/>
+              <a:t>Delivery:</a:t>
+            </a:r>
+            <a:r>
+              <a:rPr lang="en-US" sz="2800" dirty="0"/>
+              <a:t> The API returns the server's response to the client.</a:t>
+            </a:r>
+          </a:p>
+        </p:txBody>
+      </p:sp>
+      <p:sp>
+        <p:nvSpPr>
+          <p:cNvPr id="7" name="TextBox 6">
+            <a:extLst>
+              <a:ext uri="{FF2B5EF4-FFF2-40B4-BE49-F238E27FC236}">
+                <a16:creationId xmlns:a16="http://schemas.microsoft.com/office/drawing/2014/main" id="{FCAA375F-FF6A-45C0-B0F9-F8090DF0E719}"/>
+              </a:ext>
+            </a:extLst>
+          </p:cNvPr>
+          <p:cNvSpPr txBox="1"/>
+          <p:nvPr/>
+        </p:nvSpPr>
+        <p:spPr>
+          <a:xfrm>
+            <a:off x="1193800" y="5054845"/>
+            <a:ext cx="9865360" cy="1015663"/>
+          </a:xfrm>
+          <a:prstGeom prst="rect">
+            <a:avLst/>
+          </a:prstGeom>
+          <a:solidFill>
+            <a:schemeClr val="accent2"/>
+          </a:solidFill>
+        </p:spPr>
+        <p:txBody>
+          <a:bodyPr wrap="square">
+            <a:spAutoFit/>
+          </a:bodyPr>
+          <a:lstStyle/>
+          <a:p>
+            <a:r>
+              <a:rPr lang="en-US" sz="2000" dirty="0">
+                <a:solidFill>
+                  <a:schemeClr val="bg1"/>
+                </a:solidFill>
+              </a:rPr>
+              <a:t>Sometimes you need to access data from a website, rather than storing it directly on your computer. An API communicates with a server’s backend system, rather than you having to go into that computer yourself.</a:t>
+            </a:r>
+          </a:p>
+        </p:txBody>
+      </p:sp>
+    </p:spTree>
+    <p:extLst>
+      <p:ext uri="{BB962C8B-B14F-4D97-AF65-F5344CB8AC3E}">
+        <p14:creationId xmlns:p14="http://schemas.microsoft.com/office/powerpoint/2010/main" val="4214687492"/>
+      </p:ext>
+    </p:extLst>
+  </p:cSld>
+  <p:clrMapOvr>
+    <a:masterClrMapping/>
+  </p:clrMapOvr>
+</p:sld>
+</file>
+
+<file path=ppt/slides/slide12.xml><?xml version="1.0" encoding="utf-8"?>
+<p:sld xmlns:a="http://schemas.openxmlformats.org/drawingml/2006/main" xmlns:r="http://schemas.openxmlformats.org/officeDocument/2006/relationships" xmlns:p="http://schemas.openxmlformats.org/presentationml/2006/main">
+  <p:cSld>
+    <p:spTree>
+      <p:nvGrpSpPr>
+        <p:cNvPr id="1" name=""/>
+        <p:cNvGrpSpPr/>
+        <p:nvPr/>
+      </p:nvGrpSpPr>
+      <p:grpSpPr>
+        <a:xfrm>
+          <a:off x="0" y="0"/>
+          <a:ext cx="0" cy="0"/>
+          <a:chOff x="0" y="0"/>
+          <a:chExt cx="0" cy="0"/>
+        </a:xfrm>
+      </p:grpSpPr>
+      <p:sp>
+        <p:nvSpPr>
+          <p:cNvPr id="5" name="Title 4">
+            <a:extLst>
+              <a:ext uri="{FF2B5EF4-FFF2-40B4-BE49-F238E27FC236}">
+                <a16:creationId xmlns:a16="http://schemas.microsoft.com/office/drawing/2014/main" id="{ECCD8796-2D09-4694-86CC-8E6D13491717}"/>
+              </a:ext>
+            </a:extLst>
+          </p:cNvPr>
+          <p:cNvSpPr>
+            <a:spLocks noGrp="1"/>
+          </p:cNvSpPr>
+          <p:nvPr>
+            <p:ph type="title"/>
+          </p:nvPr>
+        </p:nvSpPr>
+        <p:spPr>
+          <a:xfrm>
+            <a:off x="1097280" y="286603"/>
+            <a:ext cx="10058400" cy="1196757"/>
+          </a:xfrm>
+        </p:spPr>
+        <p:txBody>
+          <a:bodyPr>
+            <a:normAutofit/>
+          </a:bodyPr>
+          <a:lstStyle/>
+          <a:p>
+            <a:r>
+              <a:rPr lang="en-US" sz="4000" dirty="0"/>
+              <a:t>Example: </a:t>
+            </a:r>
+            <a:r>
+              <a:rPr lang="en-US" sz="4000" dirty="0" err="1"/>
+              <a:t>Daymet</a:t>
+            </a:r>
+            <a:endParaRPr lang="en-US" sz="4000" dirty="0"/>
+          </a:p>
+        </p:txBody>
+      </p:sp>
+      <p:sp>
+        <p:nvSpPr>
+          <p:cNvPr id="4" name="Content Placeholder 3">
+            <a:extLst>
+              <a:ext uri="{FF2B5EF4-FFF2-40B4-BE49-F238E27FC236}">
+                <a16:creationId xmlns:a16="http://schemas.microsoft.com/office/drawing/2014/main" id="{C7A51A4F-0A14-47F1-B545-1FF0130F268D}"/>
+              </a:ext>
+            </a:extLst>
+          </p:cNvPr>
+          <p:cNvSpPr>
+            <a:spLocks noGrp="1"/>
+          </p:cNvSpPr>
+          <p:nvPr>
+            <p:ph idx="1"/>
+          </p:nvPr>
+        </p:nvSpPr>
+        <p:spPr>
+          <a:xfrm>
+            <a:off x="1259840" y="1845734"/>
+            <a:ext cx="4947920" cy="4023360"/>
+          </a:xfrm>
+        </p:spPr>
+        <p:txBody>
+          <a:bodyPr>
+            <a:normAutofit/>
+          </a:bodyPr>
+          <a:lstStyle/>
+          <a:p>
+            <a:pPr marL="0" indent="0">
+              <a:buNone/>
+            </a:pPr>
+            <a:r>
+              <a:rPr lang="en-US" dirty="0"/>
+              <a:t>Gridded climate data from 1980-present</a:t>
+            </a:r>
+          </a:p>
+          <a:p>
+            <a:pPr marL="0" indent="0">
+              <a:buNone/>
+            </a:pPr>
+            <a:r>
+              <a:rPr lang="en-US" dirty="0"/>
+              <a:t>Uses a “REST” API:</a:t>
+            </a:r>
+          </a:p>
+          <a:p>
+            <a:r>
+              <a:rPr kumimoji="0" lang="en-US" altLang="en-US" sz="2400" b="0" i="0" u="none" strike="noStrike" cap="none" normalizeH="0" baseline="0" dirty="0">
+                <a:ln>
+                  <a:noFill/>
+                </a:ln>
+                <a:solidFill>
+                  <a:schemeClr val="tx1"/>
+                </a:solidFill>
+                <a:effectLst/>
+                <a:latin typeface="Arial Unicode MS"/>
+              </a:rPr>
+              <a:t>https://daymet.ornl.gov/single-pixel/api/data?lat=</a:t>
+            </a:r>
+            <a:r>
+              <a:rPr kumimoji="0" lang="en-US" altLang="en-US" sz="2400" b="1" i="0" u="none" strike="noStrike" cap="none" normalizeH="0" baseline="0" dirty="0">
+                <a:ln>
+                  <a:noFill/>
+                </a:ln>
+                <a:solidFill>
+                  <a:schemeClr val="tx1"/>
+                </a:solidFill>
+                <a:effectLst/>
+                <a:latin typeface="Arial Unicode MS"/>
+              </a:rPr>
+              <a:t>Latitude</a:t>
+            </a:r>
+            <a:r>
+              <a:rPr kumimoji="0" lang="en-US" altLang="en-US" sz="2400" b="0" i="0" u="none" strike="noStrike" cap="none" normalizeH="0" baseline="0" dirty="0">
+                <a:ln>
+                  <a:noFill/>
+                </a:ln>
+                <a:solidFill>
+                  <a:schemeClr val="tx1"/>
+                </a:solidFill>
+                <a:effectLst/>
+                <a:latin typeface="Arial Unicode MS"/>
+              </a:rPr>
+              <a:t>&amp;lon=</a:t>
+            </a:r>
+            <a:r>
+              <a:rPr kumimoji="0" lang="en-US" altLang="en-US" sz="2400" b="1" i="0" u="none" strike="noStrike" cap="none" normalizeH="0" baseline="0" dirty="0">
+                <a:ln>
+                  <a:noFill/>
+                </a:ln>
+                <a:solidFill>
+                  <a:schemeClr val="tx1"/>
+                </a:solidFill>
+                <a:effectLst/>
+                <a:latin typeface="Arial Unicode MS"/>
+              </a:rPr>
+              <a:t>Longitude</a:t>
+            </a:r>
+            <a:r>
+              <a:rPr kumimoji="0" lang="en-US" altLang="en-US" sz="2400" b="0" i="0" u="none" strike="noStrike" cap="none" normalizeH="0" baseline="0" dirty="0">
+                <a:ln>
+                  <a:noFill/>
+                </a:ln>
+                <a:solidFill>
+                  <a:schemeClr val="tx1"/>
+                </a:solidFill>
+                <a:effectLst/>
+                <a:latin typeface="Arial Unicode MS"/>
+              </a:rPr>
+              <a:t>&amp;vars=</a:t>
+            </a:r>
+            <a:r>
+              <a:rPr kumimoji="0" lang="en-US" altLang="en-US" sz="2400" b="1" i="0" u="none" strike="noStrike" cap="none" normalizeH="0" baseline="0" dirty="0">
+                <a:ln>
+                  <a:noFill/>
+                </a:ln>
+                <a:solidFill>
+                  <a:schemeClr val="tx1"/>
+                </a:solidFill>
+                <a:effectLst/>
+                <a:latin typeface="Arial Unicode MS"/>
+              </a:rPr>
+              <a:t>CommaSeparatedVariables</a:t>
+            </a:r>
+            <a:r>
+              <a:rPr kumimoji="0" lang="en-US" altLang="en-US" sz="2400" b="0" i="0" u="none" strike="noStrike" cap="none" normalizeH="0" baseline="0" dirty="0">
+                <a:ln>
+                  <a:noFill/>
+                </a:ln>
+                <a:solidFill>
+                  <a:schemeClr val="tx1"/>
+                </a:solidFill>
+                <a:effectLst/>
+                <a:latin typeface="Arial Unicode MS"/>
+              </a:rPr>
+              <a:t>&amp;years=</a:t>
+            </a:r>
+            <a:r>
+              <a:rPr kumimoji="0" lang="en-US" altLang="en-US" sz="2400" b="1" i="0" u="none" strike="noStrike" cap="none" normalizeH="0" baseline="0" dirty="0">
+                <a:ln>
+                  <a:noFill/>
+                </a:ln>
+                <a:solidFill>
+                  <a:schemeClr val="tx1"/>
+                </a:solidFill>
+                <a:effectLst/>
+                <a:latin typeface="Arial Unicode MS"/>
+              </a:rPr>
+              <a:t>CommaSeparatedYears</a:t>
+            </a:r>
+            <a:r>
+              <a:rPr kumimoji="0" lang="en-US" altLang="en-US" sz="1800" b="0" i="0" u="none" strike="noStrike" cap="none" normalizeH="0" baseline="0" dirty="0">
+                <a:ln>
+                  <a:noFill/>
+                </a:ln>
+                <a:solidFill>
+                  <a:schemeClr val="tx1"/>
+                </a:solidFill>
+                <a:effectLst/>
+              </a:rPr>
+              <a:t> </a:t>
+            </a:r>
+            <a:endParaRPr kumimoji="0" lang="en-US" altLang="en-US" sz="4800" b="0" i="0" u="none" strike="noStrike" cap="none" normalizeH="0" baseline="0" dirty="0">
+              <a:ln>
+                <a:noFill/>
+              </a:ln>
+              <a:solidFill>
+                <a:schemeClr val="tx1"/>
+              </a:solidFill>
+              <a:effectLst/>
+              <a:latin typeface="Arial" panose="020B0604020202020204" pitchFamily="34" charset="0"/>
+            </a:endParaRPr>
+          </a:p>
+          <a:p>
+            <a:pPr marL="0" indent="0">
+              <a:buNone/>
+            </a:pPr>
+            <a:endParaRPr lang="en-US" dirty="0"/>
+          </a:p>
+        </p:txBody>
+      </p:sp>
+      <p:pic>
+        <p:nvPicPr>
+          <p:cNvPr id="8" name="Picture 7">
+            <a:extLst>
+              <a:ext uri="{FF2B5EF4-FFF2-40B4-BE49-F238E27FC236}">
+                <a16:creationId xmlns:a16="http://schemas.microsoft.com/office/drawing/2014/main" id="{CCEBE4CB-6040-4D5C-A647-A9D3F82241A3}"/>
+              </a:ext>
+            </a:extLst>
+          </p:cNvPr>
+          <p:cNvPicPr>
+            <a:picLocks noChangeAspect="1"/>
+          </p:cNvPicPr>
+          <p:nvPr/>
+        </p:nvPicPr>
+        <p:blipFill>
+          <a:blip r:embed="rId2"/>
+          <a:stretch>
+            <a:fillRect/>
+          </a:stretch>
+        </p:blipFill>
+        <p:spPr>
+          <a:xfrm>
+            <a:off x="7894320" y="81280"/>
+            <a:ext cx="4080466" cy="4771512"/>
+          </a:xfrm>
+          <a:prstGeom prst="rect">
+            <a:avLst/>
+          </a:prstGeom>
+          <a:ln w="12700" cap="sq" cmpd="thickThin">
+            <a:solidFill>
+              <a:srgbClr val="000000"/>
+            </a:solidFill>
+            <a:prstDash val="solid"/>
+            <a:miter lim="800000"/>
+          </a:ln>
+          <a:effectLst>
+            <a:innerShdw blurRad="76200">
+              <a:srgbClr val="000000"/>
+            </a:innerShdw>
+          </a:effectLst>
+        </p:spPr>
+      </p:pic>
+      <p:sp>
+        <p:nvSpPr>
+          <p:cNvPr id="11" name="TextBox 10">
+            <a:extLst>
+              <a:ext uri="{FF2B5EF4-FFF2-40B4-BE49-F238E27FC236}">
+                <a16:creationId xmlns:a16="http://schemas.microsoft.com/office/drawing/2014/main" id="{1B635139-67E5-412C-B309-D8C7A5CA5BA3}"/>
+              </a:ext>
+            </a:extLst>
+          </p:cNvPr>
+          <p:cNvSpPr txBox="1"/>
+          <p:nvPr/>
+        </p:nvSpPr>
+        <p:spPr>
+          <a:xfrm>
+            <a:off x="782320" y="5016812"/>
+            <a:ext cx="6797040" cy="1631216"/>
+          </a:xfrm>
+          <a:prstGeom prst="rect">
+            <a:avLst/>
+          </a:prstGeom>
+          <a:solidFill>
+            <a:schemeClr val="accent3">
+              <a:lumMod val="75000"/>
+            </a:schemeClr>
+          </a:solidFill>
+          <a:effectLst>
+            <a:outerShdw blurRad="50800" dist="38100" dir="2700000" algn="tl" rotWithShape="0">
+              <a:prstClr val="black">
+                <a:alpha val="40000"/>
+              </a:prstClr>
+            </a:outerShdw>
+          </a:effectLst>
+        </p:spPr>
+        <p:txBody>
+          <a:bodyPr wrap="square">
+            <a:spAutoFit/>
+          </a:bodyPr>
+          <a:lstStyle/>
+          <a:p>
+            <a:r>
+              <a:rPr lang="en-US" sz="2000" dirty="0">
+                <a:solidFill>
+                  <a:schemeClr val="bg1"/>
+                </a:solidFill>
+              </a:rPr>
+              <a:t>Try it for the Geography Building:</a:t>
+            </a:r>
+          </a:p>
+          <a:p>
+            <a:pPr marL="342900" indent="-342900">
+              <a:buFont typeface="Arial" panose="020B0604020202020204" pitchFamily="34" charset="0"/>
+              <a:buChar char="•"/>
+            </a:pPr>
+            <a:r>
+              <a:rPr lang="en-US" sz="2000" dirty="0">
+                <a:solidFill>
+                  <a:schemeClr val="bg1"/>
+                </a:solidFill>
+              </a:rPr>
+              <a:t>Lat: 33.948716, Long: -83.3754414</a:t>
+            </a:r>
+          </a:p>
+          <a:p>
+            <a:pPr marL="342900" indent="-342900">
+              <a:buFont typeface="Arial" panose="020B0604020202020204" pitchFamily="34" charset="0"/>
+              <a:buChar char="•"/>
+            </a:pPr>
+            <a:r>
+              <a:rPr lang="en-US" sz="2000" dirty="0">
+                <a:solidFill>
+                  <a:schemeClr val="bg1"/>
+                </a:solidFill>
+              </a:rPr>
+              <a:t>Variables: </a:t>
+            </a:r>
+            <a:r>
+              <a:rPr lang="en-US" sz="2000" dirty="0" err="1">
+                <a:solidFill>
+                  <a:schemeClr val="bg1"/>
+                </a:solidFill>
+              </a:rPr>
+              <a:t>tmax</a:t>
+            </a:r>
+            <a:r>
+              <a:rPr lang="en-US" sz="2000" dirty="0">
+                <a:solidFill>
+                  <a:schemeClr val="bg1"/>
+                </a:solidFill>
+              </a:rPr>
+              <a:t>, </a:t>
+            </a:r>
+            <a:r>
+              <a:rPr lang="en-US" sz="2000" dirty="0" err="1">
+                <a:solidFill>
+                  <a:schemeClr val="bg1"/>
+                </a:solidFill>
+              </a:rPr>
+              <a:t>tmin</a:t>
+            </a:r>
+            <a:r>
+              <a:rPr lang="en-US" sz="2000" dirty="0">
+                <a:solidFill>
+                  <a:schemeClr val="bg1"/>
+                </a:solidFill>
+              </a:rPr>
+              <a:t>, </a:t>
+            </a:r>
+            <a:r>
+              <a:rPr lang="en-US" sz="2000" dirty="0" err="1">
+                <a:solidFill>
+                  <a:schemeClr val="bg1"/>
+                </a:solidFill>
+              </a:rPr>
+              <a:t>prcp</a:t>
+            </a:r>
+            <a:r>
+              <a:rPr lang="en-US" sz="2000" dirty="0">
+                <a:solidFill>
+                  <a:schemeClr val="bg1"/>
+                </a:solidFill>
+              </a:rPr>
+              <a:t> (Max and min temperatures and precipitation in mm)</a:t>
+            </a:r>
+          </a:p>
+          <a:p>
+            <a:pPr marL="342900" indent="-342900">
+              <a:buFont typeface="Arial" panose="020B0604020202020204" pitchFamily="34" charset="0"/>
+              <a:buChar char="•"/>
+            </a:pPr>
+            <a:r>
+              <a:rPr lang="en-US" sz="2000" dirty="0">
+                <a:solidFill>
+                  <a:schemeClr val="bg1"/>
+                </a:solidFill>
+              </a:rPr>
+              <a:t>Years: 1990, 2000, 2010</a:t>
+            </a:r>
+          </a:p>
+        </p:txBody>
+      </p:sp>
+      <p:sp>
+        <p:nvSpPr>
+          <p:cNvPr id="13" name="TextBox 12">
+            <a:extLst>
+              <a:ext uri="{FF2B5EF4-FFF2-40B4-BE49-F238E27FC236}">
+                <a16:creationId xmlns:a16="http://schemas.microsoft.com/office/drawing/2014/main" id="{3BEE24C8-B2E4-4BFE-B04D-8657307FAA48}"/>
+              </a:ext>
+            </a:extLst>
+          </p:cNvPr>
+          <p:cNvSpPr txBox="1"/>
+          <p:nvPr/>
+        </p:nvSpPr>
+        <p:spPr>
+          <a:xfrm>
+            <a:off x="8111534" y="4868820"/>
+            <a:ext cx="4080466" cy="369332"/>
+          </a:xfrm>
+          <a:prstGeom prst="rect">
+            <a:avLst/>
+          </a:prstGeom>
+          <a:noFill/>
+        </p:spPr>
+        <p:txBody>
+          <a:bodyPr wrap="square">
+            <a:spAutoFit/>
+          </a:bodyPr>
+          <a:lstStyle/>
+          <a:p>
+            <a:r>
+              <a:rPr lang="en-US" dirty="0"/>
+              <a:t>https://daymet.ornl.gov/web_services</a:t>
+            </a:r>
+          </a:p>
+        </p:txBody>
+      </p:sp>
+    </p:spTree>
+    <p:extLst>
+      <p:ext uri="{BB962C8B-B14F-4D97-AF65-F5344CB8AC3E}">
+        <p14:creationId xmlns:p14="http://schemas.microsoft.com/office/powerpoint/2010/main" val="697878849"/>
+      </p:ext>
+    </p:extLst>
+  </p:cSld>
+  <p:clrMapOvr>
+    <a:masterClrMapping/>
+  </p:clrMapOvr>
+</p:sld>
+</file>
+
+<file path=ppt/slides/slide13.xml><?xml version="1.0" encoding="utf-8"?>
+<p:sld xmlns:a="http://schemas.openxmlformats.org/drawingml/2006/main" xmlns:r="http://schemas.openxmlformats.org/officeDocument/2006/relationships" xmlns:p="http://schemas.openxmlformats.org/presentationml/2006/main">
+  <p:cSld>
+    <p:spTree>
+      <p:nvGrpSpPr>
+        <p:cNvPr id="1" name=""/>
+        <p:cNvGrpSpPr/>
+        <p:nvPr/>
+      </p:nvGrpSpPr>
+      <p:grpSpPr>
+        <a:xfrm>
+          <a:off x="0" y="0"/>
+          <a:ext cx="0" cy="0"/>
+          <a:chOff x="0" y="0"/>
+          <a:chExt cx="0" cy="0"/>
+        </a:xfrm>
+      </p:grpSpPr>
+      <p:sp>
+        <p:nvSpPr>
+          <p:cNvPr id="5" name="Title 4">
+            <a:extLst>
+              <a:ext uri="{FF2B5EF4-FFF2-40B4-BE49-F238E27FC236}">
+                <a16:creationId xmlns:a16="http://schemas.microsoft.com/office/drawing/2014/main" id="{ECCD8796-2D09-4694-86CC-8E6D13491717}"/>
+              </a:ext>
+            </a:extLst>
+          </p:cNvPr>
+          <p:cNvSpPr>
+            <a:spLocks noGrp="1"/>
+          </p:cNvSpPr>
+          <p:nvPr>
+            <p:ph type="title"/>
+          </p:nvPr>
+        </p:nvSpPr>
+        <p:spPr>
+          <a:xfrm>
+            <a:off x="1097280" y="286603"/>
+            <a:ext cx="10058400" cy="1196757"/>
+          </a:xfrm>
+        </p:spPr>
+        <p:txBody>
+          <a:bodyPr>
+            <a:normAutofit/>
+          </a:bodyPr>
+          <a:lstStyle/>
+          <a:p>
+            <a:r>
+              <a:rPr lang="en-US" sz="4000" dirty="0"/>
+              <a:t>Practice!</a:t>
+            </a:r>
+          </a:p>
+        </p:txBody>
+      </p:sp>
+      <p:sp>
+        <p:nvSpPr>
+          <p:cNvPr id="4" name="Content Placeholder 3">
+            <a:extLst>
+              <a:ext uri="{FF2B5EF4-FFF2-40B4-BE49-F238E27FC236}">
+                <a16:creationId xmlns:a16="http://schemas.microsoft.com/office/drawing/2014/main" id="{C7A51A4F-0A14-47F1-B545-1FF0130F268D}"/>
+              </a:ext>
+            </a:extLst>
+          </p:cNvPr>
+          <p:cNvSpPr>
+            <a:spLocks noGrp="1"/>
+          </p:cNvSpPr>
+          <p:nvPr>
+            <p:ph idx="1"/>
+          </p:nvPr>
+        </p:nvSpPr>
+        <p:spPr>
+          <a:xfrm>
+            <a:off x="1259840" y="4470400"/>
+            <a:ext cx="9895840" cy="1398694"/>
+          </a:xfrm>
+        </p:spPr>
+        <p:txBody>
+          <a:bodyPr>
+            <a:normAutofit/>
+          </a:bodyPr>
+          <a:lstStyle/>
+          <a:p>
+            <a:pPr marL="0" indent="0">
+              <a:buNone/>
+            </a:pPr>
+            <a:r>
+              <a:rPr kumimoji="0" lang="en-US" altLang="en-US" sz="2400" b="0" i="0" u="none" strike="noStrike" cap="none" normalizeH="0" baseline="0" dirty="0">
+                <a:ln>
+                  <a:noFill/>
+                </a:ln>
+                <a:solidFill>
+                  <a:schemeClr val="tx1"/>
+                </a:solidFill>
+                <a:effectLst/>
+                <a:latin typeface="Arial Unicode MS"/>
+              </a:rPr>
+              <a:t>https://daymet.ornl.gov/single-pixel/api/data?lat=</a:t>
+            </a:r>
+            <a:r>
+              <a:rPr kumimoji="0" lang="en-US" altLang="en-US" sz="2400" b="1" i="0" u="none" strike="noStrike" cap="none" normalizeH="0" baseline="0" dirty="0">
+                <a:ln>
+                  <a:noFill/>
+                </a:ln>
+                <a:solidFill>
+                  <a:schemeClr val="tx1"/>
+                </a:solidFill>
+                <a:effectLst/>
+                <a:latin typeface="Arial Unicode MS"/>
+              </a:rPr>
+              <a:t>Latitude</a:t>
+            </a:r>
+            <a:r>
+              <a:rPr kumimoji="0" lang="en-US" altLang="en-US" sz="2400" b="0" i="0" u="none" strike="noStrike" cap="none" normalizeH="0" baseline="0" dirty="0">
+                <a:ln>
+                  <a:noFill/>
+                </a:ln>
+                <a:solidFill>
+                  <a:schemeClr val="tx1"/>
+                </a:solidFill>
+                <a:effectLst/>
+                <a:latin typeface="Arial Unicode MS"/>
+              </a:rPr>
+              <a:t>&amp;lon=</a:t>
+            </a:r>
+            <a:r>
+              <a:rPr kumimoji="0" lang="en-US" altLang="en-US" sz="2400" b="1" i="0" u="none" strike="noStrike" cap="none" normalizeH="0" baseline="0" dirty="0">
+                <a:ln>
+                  <a:noFill/>
+                </a:ln>
+                <a:solidFill>
+                  <a:schemeClr val="tx1"/>
+                </a:solidFill>
+                <a:effectLst/>
+                <a:latin typeface="Arial Unicode MS"/>
+              </a:rPr>
+              <a:t>Longitude</a:t>
+            </a:r>
+            <a:r>
+              <a:rPr kumimoji="0" lang="en-US" altLang="en-US" sz="2400" b="0" i="0" u="none" strike="noStrike" cap="none" normalizeH="0" baseline="0" dirty="0">
+                <a:ln>
+                  <a:noFill/>
+                </a:ln>
+                <a:solidFill>
+                  <a:schemeClr val="tx1"/>
+                </a:solidFill>
+                <a:effectLst/>
+                <a:latin typeface="Arial Unicode MS"/>
+              </a:rPr>
+              <a:t>&amp;vars=</a:t>
+            </a:r>
+            <a:r>
+              <a:rPr kumimoji="0" lang="en-US" altLang="en-US" sz="2400" b="1" i="0" u="none" strike="noStrike" cap="none" normalizeH="0" baseline="0" dirty="0">
+                <a:ln>
+                  <a:noFill/>
+                </a:ln>
+                <a:solidFill>
+                  <a:schemeClr val="tx1"/>
+                </a:solidFill>
+                <a:effectLst/>
+                <a:latin typeface="Arial Unicode MS"/>
+              </a:rPr>
+              <a:t>CommaSeparatedVariables</a:t>
+            </a:r>
+            <a:r>
+              <a:rPr kumimoji="0" lang="en-US" altLang="en-US" sz="2400" b="0" i="0" u="none" strike="noStrike" cap="none" normalizeH="0" baseline="0" dirty="0">
+                <a:ln>
+                  <a:noFill/>
+                </a:ln>
+                <a:solidFill>
+                  <a:schemeClr val="tx1"/>
+                </a:solidFill>
+                <a:effectLst/>
+                <a:latin typeface="Arial Unicode MS"/>
+              </a:rPr>
+              <a:t>&amp;years=</a:t>
+            </a:r>
+            <a:r>
+              <a:rPr kumimoji="0" lang="en-US" altLang="en-US" sz="2400" b="1" i="0" u="none" strike="noStrike" cap="none" normalizeH="0" baseline="0" dirty="0">
+                <a:ln>
+                  <a:noFill/>
+                </a:ln>
+                <a:solidFill>
+                  <a:schemeClr val="tx1"/>
+                </a:solidFill>
+                <a:effectLst/>
+                <a:latin typeface="Arial Unicode MS"/>
+              </a:rPr>
+              <a:t>CommaSeparatedYears</a:t>
+            </a:r>
+            <a:r>
+              <a:rPr kumimoji="0" lang="en-US" altLang="en-US" sz="1800" b="0" i="0" u="none" strike="noStrike" cap="none" normalizeH="0" baseline="0" dirty="0">
+                <a:ln>
+                  <a:noFill/>
+                </a:ln>
+                <a:solidFill>
+                  <a:schemeClr val="tx1"/>
+                </a:solidFill>
+                <a:effectLst/>
+              </a:rPr>
+              <a:t> </a:t>
+            </a:r>
+            <a:endParaRPr kumimoji="0" lang="en-US" altLang="en-US" sz="4800" b="0" i="0" u="none" strike="noStrike" cap="none" normalizeH="0" baseline="0" dirty="0">
+              <a:ln>
+                <a:noFill/>
+              </a:ln>
+              <a:solidFill>
+                <a:schemeClr val="tx1"/>
+              </a:solidFill>
+              <a:effectLst/>
+              <a:latin typeface="Arial" panose="020B0604020202020204" pitchFamily="34" charset="0"/>
+            </a:endParaRPr>
+          </a:p>
+          <a:p>
+            <a:pPr marL="0" indent="0">
+              <a:buNone/>
+            </a:pPr>
+            <a:endParaRPr lang="en-US" dirty="0"/>
+          </a:p>
+        </p:txBody>
+      </p:sp>
+      <p:sp>
+        <p:nvSpPr>
+          <p:cNvPr id="6" name="Content Placeholder 3">
+            <a:extLst>
+              <a:ext uri="{FF2B5EF4-FFF2-40B4-BE49-F238E27FC236}">
+                <a16:creationId xmlns:a16="http://schemas.microsoft.com/office/drawing/2014/main" id="{FD555BC6-F78A-4424-ACCC-98B9F50ECCA8}"/>
+              </a:ext>
+            </a:extLst>
+          </p:cNvPr>
+          <p:cNvSpPr txBox="1">
+            <a:spLocks/>
+          </p:cNvSpPr>
+          <p:nvPr/>
+        </p:nvSpPr>
+        <p:spPr>
+          <a:xfrm>
+            <a:off x="1259840" y="1940560"/>
+            <a:ext cx="9895840" cy="1398694"/>
+          </a:xfrm>
+          <a:prstGeom prst="rect">
+            <a:avLst/>
+          </a:prstGeom>
+        </p:spPr>
+        <p:txBody>
+          <a:bodyPr vert="horz" lIns="0" tIns="45720" rIns="0" bIns="45720" rtlCol="0">
+            <a:normAutofit/>
+          </a:bodyPr>
+          <a:lstStyle>
+            <a:lvl1pPr marL="233363" indent="-233363" algn="l" defTabSz="914400" rtl="0" eaLnBrk="1" latinLnBrk="0" hangingPunct="1">
+              <a:lnSpc>
+                <a:spcPct val="90000"/>
+              </a:lnSpc>
+              <a:spcBef>
+                <a:spcPts val="1200"/>
+              </a:spcBef>
+              <a:spcAft>
+                <a:spcPts val="200"/>
+              </a:spcAft>
+              <a:buClr>
+                <a:schemeClr val="tx1">
+                  <a:lumMod val="75000"/>
+                </a:schemeClr>
+              </a:buClr>
+              <a:buSzPct val="100000"/>
+              <a:buFont typeface="Arial" panose="020B0604020202020204" pitchFamily="34" charset="0"/>
+              <a:buChar char="•"/>
+              <a:defRPr sz="2400" kern="1200">
+                <a:solidFill>
+                  <a:schemeClr val="tx1">
+                    <a:lumMod val="75000"/>
+                  </a:schemeClr>
+                </a:solidFill>
+                <a:latin typeface="Segoe UI" panose="020B0502040204020203" pitchFamily="34" charset="0"/>
+                <a:ea typeface="Open Sans Medium" pitchFamily="2" charset="0"/>
+                <a:cs typeface="Segoe UI" panose="020B0502040204020203" pitchFamily="34" charset="0"/>
+              </a:defRPr>
+            </a:lvl1pPr>
+            <a:lvl2pPr marL="384048" indent="-182880" algn="l" defTabSz="914400" rtl="0" eaLnBrk="1" latinLnBrk="0" hangingPunct="1">
+              <a:lnSpc>
+                <a:spcPct val="90000"/>
+              </a:lnSpc>
+              <a:spcBef>
+                <a:spcPts val="200"/>
+              </a:spcBef>
+              <a:spcAft>
+                <a:spcPts val="400"/>
+              </a:spcAft>
+              <a:buClr>
+                <a:schemeClr val="tx1">
+                  <a:lumMod val="75000"/>
+                </a:schemeClr>
+              </a:buClr>
+              <a:buFont typeface="Arial" panose="020B0604020202020204" pitchFamily="34" charset="0"/>
+              <a:buChar char="•"/>
+              <a:defRPr sz="2000" kern="1200">
+                <a:solidFill>
+                  <a:schemeClr val="tx1">
+                    <a:lumMod val="75000"/>
+                  </a:schemeClr>
+                </a:solidFill>
+                <a:latin typeface="Segoe UI" panose="020B0502040204020203" pitchFamily="34" charset="0"/>
+                <a:ea typeface="Open Sans Medium" pitchFamily="2" charset="0"/>
+                <a:cs typeface="Segoe UI" panose="020B0502040204020203" pitchFamily="34" charset="0"/>
+              </a:defRPr>
+            </a:lvl2pPr>
+            <a:lvl3pPr marL="566928" indent="-182880" algn="l" defTabSz="914400" rtl="0" eaLnBrk="1" latinLnBrk="0" hangingPunct="1">
+              <a:lnSpc>
+                <a:spcPct val="90000"/>
+              </a:lnSpc>
+              <a:spcBef>
+                <a:spcPts val="200"/>
+              </a:spcBef>
+              <a:spcAft>
+                <a:spcPts val="400"/>
+              </a:spcAft>
+              <a:buClr>
+                <a:schemeClr val="tx1">
+                  <a:lumMod val="75000"/>
+                </a:schemeClr>
+              </a:buClr>
+              <a:buFont typeface="Arial" panose="020B0604020202020204" pitchFamily="34" charset="0"/>
+              <a:buChar char="•"/>
+              <a:defRPr sz="1600" kern="1200">
+                <a:solidFill>
+                  <a:schemeClr val="tx1">
+                    <a:lumMod val="75000"/>
+                  </a:schemeClr>
+                </a:solidFill>
+                <a:latin typeface="Segoe UI" panose="020B0502040204020203" pitchFamily="34" charset="0"/>
+                <a:ea typeface="Open Sans Medium" pitchFamily="2" charset="0"/>
+                <a:cs typeface="Segoe UI" panose="020B0502040204020203" pitchFamily="34" charset="0"/>
+              </a:defRPr>
+            </a:lvl3pPr>
+            <a:lvl4pPr marL="749808" indent="-182880" algn="l" defTabSz="914400" rtl="0" eaLnBrk="1" latinLnBrk="0" hangingPunct="1">
+              <a:lnSpc>
+                <a:spcPct val="90000"/>
+              </a:lnSpc>
+              <a:spcBef>
+                <a:spcPts val="200"/>
+              </a:spcBef>
+              <a:spcAft>
+                <a:spcPts val="400"/>
+              </a:spcAft>
+              <a:buClr>
+                <a:schemeClr val="tx1">
+                  <a:lumMod val="75000"/>
+                </a:schemeClr>
+              </a:buClr>
+              <a:buFont typeface="Arial" panose="020B0604020202020204" pitchFamily="34" charset="0"/>
+              <a:buChar char="•"/>
+              <a:defRPr sz="1600" kern="1200">
+                <a:solidFill>
+                  <a:schemeClr val="tx1">
+                    <a:lumMod val="75000"/>
+                  </a:schemeClr>
+                </a:solidFill>
+                <a:latin typeface="Segoe UI" panose="020B0502040204020203" pitchFamily="34" charset="0"/>
+                <a:ea typeface="Open Sans Medium" pitchFamily="2" charset="0"/>
+                <a:cs typeface="Segoe UI" panose="020B0502040204020203" pitchFamily="34" charset="0"/>
+              </a:defRPr>
+            </a:lvl4pPr>
+            <a:lvl5pPr marL="932688" indent="-182880" algn="l" defTabSz="914400" rtl="0" eaLnBrk="1" latinLnBrk="0" hangingPunct="1">
+              <a:lnSpc>
+                <a:spcPct val="90000"/>
+              </a:lnSpc>
+              <a:spcBef>
+                <a:spcPts val="200"/>
+              </a:spcBef>
+              <a:spcAft>
+                <a:spcPts val="400"/>
+              </a:spcAft>
+              <a:buClr>
+                <a:schemeClr val="tx1">
+                  <a:lumMod val="75000"/>
+                </a:schemeClr>
+              </a:buClr>
+              <a:buFont typeface="Arial" panose="020B0604020202020204" pitchFamily="34" charset="0"/>
+              <a:buChar char="•"/>
+              <a:defRPr sz="1600" kern="1200">
+                <a:solidFill>
+                  <a:schemeClr val="tx1">
+                    <a:lumMod val="75000"/>
+                  </a:schemeClr>
+                </a:solidFill>
+                <a:latin typeface="Segoe UI" panose="020B0502040204020203" pitchFamily="34" charset="0"/>
+                <a:ea typeface="Open Sans Medium" pitchFamily="2" charset="0"/>
+                <a:cs typeface="Segoe UI" panose="020B0502040204020203" pitchFamily="34" charset="0"/>
+              </a:defRPr>
+            </a:lvl5pPr>
+            <a:lvl6pPr marL="1100000" indent="-228600" algn="l" defTabSz="914400" rtl="0" eaLnBrk="1" latinLnBrk="0" hangingPunct="1">
+              <a:lnSpc>
+                <a:spcPct val="90000"/>
+              </a:lnSpc>
+              <a:spcBef>
+                <a:spcPts val="200"/>
+              </a:spcBef>
+              <a:spcAft>
+                <a:spcPts val="400"/>
+              </a:spcAft>
+              <a:buClr>
+                <a:schemeClr val="accent1"/>
+              </a:buClr>
+              <a:buFont typeface="Calibri" pitchFamily="34" charset="0"/>
+              <a:buChar char="◦"/>
+              <a:defRPr sz="1400" kern="1200">
+                <a:solidFill>
+                  <a:schemeClr val="tx1">
+                    <a:lumMod val="75000"/>
+                    <a:lumOff val="25000"/>
+                  </a:schemeClr>
+                </a:solidFill>
+                <a:latin typeface="+mn-lt"/>
+                <a:ea typeface="+mn-ea"/>
+                <a:cs typeface="+mn-cs"/>
+              </a:defRPr>
+            </a:lvl6pPr>
+            <a:lvl7pPr marL="1300000" indent="-228600" algn="l" defTabSz="914400" rtl="0" eaLnBrk="1" latinLnBrk="0" hangingPunct="1">
+              <a:lnSpc>
+                <a:spcPct val="90000"/>
+              </a:lnSpc>
+              <a:spcBef>
+                <a:spcPts val="200"/>
+              </a:spcBef>
+              <a:spcAft>
+                <a:spcPts val="400"/>
+              </a:spcAft>
+              <a:buClr>
+                <a:schemeClr val="accent1"/>
+              </a:buClr>
+              <a:buFont typeface="Calibri" pitchFamily="34" charset="0"/>
+              <a:buChar char="◦"/>
+              <a:defRPr sz="1400" kern="1200">
+                <a:solidFill>
+                  <a:schemeClr val="tx1">
+                    <a:lumMod val="75000"/>
+                    <a:lumOff val="25000"/>
+                  </a:schemeClr>
+                </a:solidFill>
+                <a:latin typeface="+mn-lt"/>
+                <a:ea typeface="+mn-ea"/>
+                <a:cs typeface="+mn-cs"/>
+              </a:defRPr>
+            </a:lvl7pPr>
+            <a:lvl8pPr marL="1500000" indent="-228600" algn="l" defTabSz="914400" rtl="0" eaLnBrk="1" latinLnBrk="0" hangingPunct="1">
+              <a:lnSpc>
+                <a:spcPct val="90000"/>
+              </a:lnSpc>
+              <a:spcBef>
+                <a:spcPts val="200"/>
+              </a:spcBef>
+              <a:spcAft>
+                <a:spcPts val="400"/>
+              </a:spcAft>
+              <a:buClr>
+                <a:schemeClr val="accent1"/>
+              </a:buClr>
+              <a:buFont typeface="Calibri" pitchFamily="34" charset="0"/>
+              <a:buChar char="◦"/>
+              <a:defRPr sz="1400" kern="1200">
+                <a:solidFill>
+                  <a:schemeClr val="tx1">
+                    <a:lumMod val="75000"/>
+                    <a:lumOff val="25000"/>
+                  </a:schemeClr>
+                </a:solidFill>
+                <a:latin typeface="+mn-lt"/>
+                <a:ea typeface="+mn-ea"/>
+                <a:cs typeface="+mn-cs"/>
+              </a:defRPr>
+            </a:lvl8pPr>
+            <a:lvl9pPr marL="1700000" indent="-228600" algn="l" defTabSz="914400" rtl="0" eaLnBrk="1" latinLnBrk="0" hangingPunct="1">
+              <a:lnSpc>
+                <a:spcPct val="90000"/>
+              </a:lnSpc>
+              <a:spcBef>
+                <a:spcPts val="200"/>
+              </a:spcBef>
+              <a:spcAft>
+                <a:spcPts val="400"/>
+              </a:spcAft>
+              <a:buClr>
+                <a:schemeClr val="accent1"/>
+              </a:buClr>
+              <a:buFont typeface="Calibri" pitchFamily="34" charset="0"/>
+              <a:buChar char="◦"/>
+              <a:defRPr sz="1400" kern="1200">
+                <a:solidFill>
+                  <a:schemeClr val="tx1">
+                    <a:lumMod val="75000"/>
+                    <a:lumOff val="25000"/>
+                  </a:schemeClr>
+                </a:solidFill>
+                <a:latin typeface="+mn-lt"/>
+                <a:ea typeface="+mn-ea"/>
+                <a:cs typeface="+mn-cs"/>
+              </a:defRPr>
+            </a:lvl9pPr>
+          </a:lstStyle>
+          <a:p>
+            <a:pPr marL="0" indent="0">
+              <a:buFont typeface="Arial" panose="020B0604020202020204" pitchFamily="34" charset="0"/>
+              <a:buNone/>
+            </a:pPr>
+            <a:r>
+              <a:rPr lang="en-US" dirty="0">
+                <a:solidFill>
+                  <a:schemeClr val="tx1"/>
+                </a:solidFill>
+                <a:latin typeface="Arial Unicode MS"/>
+              </a:rPr>
+              <a:t>Adapt this to the location, years, and variables of your choosing.</a:t>
+            </a:r>
+          </a:p>
+          <a:p>
+            <a:pPr marL="0" indent="0">
+              <a:buFont typeface="Arial" panose="020B0604020202020204" pitchFamily="34" charset="0"/>
+              <a:buNone/>
+            </a:pPr>
+            <a:r>
+              <a:rPr lang="en-US" dirty="0">
+                <a:solidFill>
+                  <a:schemeClr val="tx1"/>
+                </a:solidFill>
+                <a:latin typeface="Arial Unicode MS"/>
+              </a:rPr>
+              <a:t>Then load the csv you download into R.</a:t>
+            </a:r>
+            <a:endParaRPr lang="en-US" dirty="0"/>
+          </a:p>
+        </p:txBody>
+      </p:sp>
+    </p:spTree>
+    <p:extLst>
+      <p:ext uri="{BB962C8B-B14F-4D97-AF65-F5344CB8AC3E}">
+        <p14:creationId xmlns:p14="http://schemas.microsoft.com/office/powerpoint/2010/main" val="3742109759"/>
+      </p:ext>
+    </p:extLst>
+  </p:cSld>
+  <p:clrMapOvr>
+    <a:masterClrMapping/>
+  </p:clrMapOvr>
+</p:sld>
+</file>
+
+<file path=ppt/slides/slide14.xml><?xml version="1.0" encoding="utf-8"?>
+<p:sld xmlns:a="http://schemas.openxmlformats.org/drawingml/2006/main" xmlns:r="http://schemas.openxmlformats.org/officeDocument/2006/relationships" xmlns:p="http://schemas.openxmlformats.org/presentationml/2006/main">
+  <p:cSld>
+    <p:spTree>
+      <p:nvGrpSpPr>
+        <p:cNvPr id="1" name=""/>
+        <p:cNvGrpSpPr/>
+        <p:nvPr/>
+      </p:nvGrpSpPr>
+      <p:grpSpPr>
+        <a:xfrm>
+          <a:off x="0" y="0"/>
+          <a:ext cx="0" cy="0"/>
+          <a:chOff x="0" y="0"/>
+          <a:chExt cx="0" cy="0"/>
+        </a:xfrm>
+      </p:grpSpPr>
+      <p:sp>
+        <p:nvSpPr>
+          <p:cNvPr id="5" name="Title 4">
+            <a:extLst>
+              <a:ext uri="{FF2B5EF4-FFF2-40B4-BE49-F238E27FC236}">
+                <a16:creationId xmlns:a16="http://schemas.microsoft.com/office/drawing/2014/main" id="{ECCD8796-2D09-4694-86CC-8E6D13491717}"/>
+              </a:ext>
+            </a:extLst>
+          </p:cNvPr>
+          <p:cNvSpPr>
+            <a:spLocks noGrp="1"/>
+          </p:cNvSpPr>
+          <p:nvPr>
+            <p:ph type="title"/>
+          </p:nvPr>
+        </p:nvSpPr>
+        <p:spPr>
+          <a:xfrm>
+            <a:off x="1097280" y="286603"/>
+            <a:ext cx="10058400" cy="1196757"/>
+          </a:xfrm>
+        </p:spPr>
+        <p:txBody>
+          <a:bodyPr>
+            <a:normAutofit/>
+          </a:bodyPr>
+          <a:lstStyle/>
+          <a:p>
+            <a:r>
+              <a:rPr lang="en-US" sz="4000" dirty="0"/>
+              <a:t>You can also load csv directly from websites</a:t>
+            </a:r>
+          </a:p>
+        </p:txBody>
+      </p:sp>
+      <p:sp>
+        <p:nvSpPr>
+          <p:cNvPr id="6" name="Content Placeholder 3">
+            <a:extLst>
+              <a:ext uri="{FF2B5EF4-FFF2-40B4-BE49-F238E27FC236}">
+                <a16:creationId xmlns:a16="http://schemas.microsoft.com/office/drawing/2014/main" id="{FD555BC6-F78A-4424-ACCC-98B9F50ECCA8}"/>
+              </a:ext>
+            </a:extLst>
+          </p:cNvPr>
+          <p:cNvSpPr txBox="1">
+            <a:spLocks/>
+          </p:cNvSpPr>
+          <p:nvPr/>
+        </p:nvSpPr>
+        <p:spPr>
+          <a:xfrm>
+            <a:off x="1259840" y="1940560"/>
+            <a:ext cx="9895840" cy="1398694"/>
+          </a:xfrm>
+          <a:prstGeom prst="rect">
+            <a:avLst/>
+          </a:prstGeom>
+        </p:spPr>
+        <p:txBody>
+          <a:bodyPr vert="horz" lIns="0" tIns="45720" rIns="0" bIns="45720" rtlCol="0">
+            <a:normAutofit/>
+          </a:bodyPr>
+          <a:lstStyle>
+            <a:lvl1pPr marL="233363" indent="-233363" algn="l" defTabSz="914400" rtl="0" eaLnBrk="1" latinLnBrk="0" hangingPunct="1">
+              <a:lnSpc>
+                <a:spcPct val="90000"/>
+              </a:lnSpc>
+              <a:spcBef>
+                <a:spcPts val="1200"/>
+              </a:spcBef>
+              <a:spcAft>
+                <a:spcPts val="200"/>
+              </a:spcAft>
+              <a:buClr>
+                <a:schemeClr val="tx1">
+                  <a:lumMod val="75000"/>
+                </a:schemeClr>
+              </a:buClr>
+              <a:buSzPct val="100000"/>
+              <a:buFont typeface="Arial" panose="020B0604020202020204" pitchFamily="34" charset="0"/>
+              <a:buChar char="•"/>
+              <a:defRPr sz="2400" kern="1200">
+                <a:solidFill>
+                  <a:schemeClr val="tx1">
+                    <a:lumMod val="75000"/>
+                  </a:schemeClr>
+                </a:solidFill>
+                <a:latin typeface="Segoe UI" panose="020B0502040204020203" pitchFamily="34" charset="0"/>
+                <a:ea typeface="Open Sans Medium" pitchFamily="2" charset="0"/>
+                <a:cs typeface="Segoe UI" panose="020B0502040204020203" pitchFamily="34" charset="0"/>
+              </a:defRPr>
+            </a:lvl1pPr>
+            <a:lvl2pPr marL="384048" indent="-182880" algn="l" defTabSz="914400" rtl="0" eaLnBrk="1" latinLnBrk="0" hangingPunct="1">
+              <a:lnSpc>
+                <a:spcPct val="90000"/>
+              </a:lnSpc>
+              <a:spcBef>
+                <a:spcPts val="200"/>
+              </a:spcBef>
+              <a:spcAft>
+                <a:spcPts val="400"/>
+              </a:spcAft>
+              <a:buClr>
+                <a:schemeClr val="tx1">
+                  <a:lumMod val="75000"/>
+                </a:schemeClr>
+              </a:buClr>
+              <a:buFont typeface="Arial" panose="020B0604020202020204" pitchFamily="34" charset="0"/>
+              <a:buChar char="•"/>
+              <a:defRPr sz="2000" kern="1200">
+                <a:solidFill>
+                  <a:schemeClr val="tx1">
+                    <a:lumMod val="75000"/>
+                  </a:schemeClr>
+                </a:solidFill>
+                <a:latin typeface="Segoe UI" panose="020B0502040204020203" pitchFamily="34" charset="0"/>
+                <a:ea typeface="Open Sans Medium" pitchFamily="2" charset="0"/>
+                <a:cs typeface="Segoe UI" panose="020B0502040204020203" pitchFamily="34" charset="0"/>
+              </a:defRPr>
+            </a:lvl2pPr>
+            <a:lvl3pPr marL="566928" indent="-182880" algn="l" defTabSz="914400" rtl="0" eaLnBrk="1" latinLnBrk="0" hangingPunct="1">
+              <a:lnSpc>
+                <a:spcPct val="90000"/>
+              </a:lnSpc>
+              <a:spcBef>
+                <a:spcPts val="200"/>
+              </a:spcBef>
+              <a:spcAft>
+                <a:spcPts val="400"/>
+              </a:spcAft>
+              <a:buClr>
+                <a:schemeClr val="tx1">
+                  <a:lumMod val="75000"/>
+                </a:schemeClr>
+              </a:buClr>
+              <a:buFont typeface="Arial" panose="020B0604020202020204" pitchFamily="34" charset="0"/>
+              <a:buChar char="•"/>
+              <a:defRPr sz="1600" kern="1200">
+                <a:solidFill>
+                  <a:schemeClr val="tx1">
+                    <a:lumMod val="75000"/>
+                  </a:schemeClr>
+                </a:solidFill>
+                <a:latin typeface="Segoe UI" panose="020B0502040204020203" pitchFamily="34" charset="0"/>
+                <a:ea typeface="Open Sans Medium" pitchFamily="2" charset="0"/>
+                <a:cs typeface="Segoe UI" panose="020B0502040204020203" pitchFamily="34" charset="0"/>
+              </a:defRPr>
+            </a:lvl3pPr>
+            <a:lvl4pPr marL="749808" indent="-182880" algn="l" defTabSz="914400" rtl="0" eaLnBrk="1" latinLnBrk="0" hangingPunct="1">
+              <a:lnSpc>
+                <a:spcPct val="90000"/>
+              </a:lnSpc>
+              <a:spcBef>
+                <a:spcPts val="200"/>
+              </a:spcBef>
+              <a:spcAft>
+                <a:spcPts val="400"/>
+              </a:spcAft>
+              <a:buClr>
+                <a:schemeClr val="tx1">
+                  <a:lumMod val="75000"/>
+                </a:schemeClr>
+              </a:buClr>
+              <a:buFont typeface="Arial" panose="020B0604020202020204" pitchFamily="34" charset="0"/>
+              <a:buChar char="•"/>
+              <a:defRPr sz="1600" kern="1200">
+                <a:solidFill>
+                  <a:schemeClr val="tx1">
+                    <a:lumMod val="75000"/>
+                  </a:schemeClr>
+                </a:solidFill>
+                <a:latin typeface="Segoe UI" panose="020B0502040204020203" pitchFamily="34" charset="0"/>
+                <a:ea typeface="Open Sans Medium" pitchFamily="2" charset="0"/>
+                <a:cs typeface="Segoe UI" panose="020B0502040204020203" pitchFamily="34" charset="0"/>
+              </a:defRPr>
+            </a:lvl4pPr>
+            <a:lvl5pPr marL="932688" indent="-182880" algn="l" defTabSz="914400" rtl="0" eaLnBrk="1" latinLnBrk="0" hangingPunct="1">
+              <a:lnSpc>
+                <a:spcPct val="90000"/>
+              </a:lnSpc>
+              <a:spcBef>
+                <a:spcPts val="200"/>
+              </a:spcBef>
+              <a:spcAft>
+                <a:spcPts val="400"/>
+              </a:spcAft>
+              <a:buClr>
+                <a:schemeClr val="tx1">
+                  <a:lumMod val="75000"/>
+                </a:schemeClr>
+              </a:buClr>
+              <a:buFont typeface="Arial" panose="020B0604020202020204" pitchFamily="34" charset="0"/>
+              <a:buChar char="•"/>
+              <a:defRPr sz="1600" kern="1200">
+                <a:solidFill>
+                  <a:schemeClr val="tx1">
+                    <a:lumMod val="75000"/>
+                  </a:schemeClr>
+                </a:solidFill>
+                <a:latin typeface="Segoe UI" panose="020B0502040204020203" pitchFamily="34" charset="0"/>
+                <a:ea typeface="Open Sans Medium" pitchFamily="2" charset="0"/>
+                <a:cs typeface="Segoe UI" panose="020B0502040204020203" pitchFamily="34" charset="0"/>
+              </a:defRPr>
+            </a:lvl5pPr>
+            <a:lvl6pPr marL="1100000" indent="-228600" algn="l" defTabSz="914400" rtl="0" eaLnBrk="1" latinLnBrk="0" hangingPunct="1">
+              <a:lnSpc>
+                <a:spcPct val="90000"/>
+              </a:lnSpc>
+              <a:spcBef>
+                <a:spcPts val="200"/>
+              </a:spcBef>
+              <a:spcAft>
+                <a:spcPts val="400"/>
+              </a:spcAft>
+              <a:buClr>
+                <a:schemeClr val="accent1"/>
+              </a:buClr>
+              <a:buFont typeface="Calibri" pitchFamily="34" charset="0"/>
+              <a:buChar char="◦"/>
+              <a:defRPr sz="1400" kern="1200">
+                <a:solidFill>
+                  <a:schemeClr val="tx1">
+                    <a:lumMod val="75000"/>
+                    <a:lumOff val="25000"/>
+                  </a:schemeClr>
+                </a:solidFill>
+                <a:latin typeface="+mn-lt"/>
+                <a:ea typeface="+mn-ea"/>
+                <a:cs typeface="+mn-cs"/>
+              </a:defRPr>
+            </a:lvl6pPr>
+            <a:lvl7pPr marL="1300000" indent="-228600" algn="l" defTabSz="914400" rtl="0" eaLnBrk="1" latinLnBrk="0" hangingPunct="1">
+              <a:lnSpc>
+                <a:spcPct val="90000"/>
+              </a:lnSpc>
+              <a:spcBef>
+                <a:spcPts val="200"/>
+              </a:spcBef>
+              <a:spcAft>
+                <a:spcPts val="400"/>
+              </a:spcAft>
+              <a:buClr>
+                <a:schemeClr val="accent1"/>
+              </a:buClr>
+              <a:buFont typeface="Calibri" pitchFamily="34" charset="0"/>
+              <a:buChar char="◦"/>
+              <a:defRPr sz="1400" kern="1200">
+                <a:solidFill>
+                  <a:schemeClr val="tx1">
+                    <a:lumMod val="75000"/>
+                    <a:lumOff val="25000"/>
+                  </a:schemeClr>
+                </a:solidFill>
+                <a:latin typeface="+mn-lt"/>
+                <a:ea typeface="+mn-ea"/>
+                <a:cs typeface="+mn-cs"/>
+              </a:defRPr>
+            </a:lvl7pPr>
+            <a:lvl8pPr marL="1500000" indent="-228600" algn="l" defTabSz="914400" rtl="0" eaLnBrk="1" latinLnBrk="0" hangingPunct="1">
+              <a:lnSpc>
+                <a:spcPct val="90000"/>
+              </a:lnSpc>
+              <a:spcBef>
+                <a:spcPts val="200"/>
+              </a:spcBef>
+              <a:spcAft>
+                <a:spcPts val="400"/>
+              </a:spcAft>
+              <a:buClr>
+                <a:schemeClr val="accent1"/>
+              </a:buClr>
+              <a:buFont typeface="Calibri" pitchFamily="34" charset="0"/>
+              <a:buChar char="◦"/>
+              <a:defRPr sz="1400" kern="1200">
+                <a:solidFill>
+                  <a:schemeClr val="tx1">
+                    <a:lumMod val="75000"/>
+                    <a:lumOff val="25000"/>
+                  </a:schemeClr>
+                </a:solidFill>
+                <a:latin typeface="+mn-lt"/>
+                <a:ea typeface="+mn-ea"/>
+                <a:cs typeface="+mn-cs"/>
+              </a:defRPr>
+            </a:lvl8pPr>
+            <a:lvl9pPr marL="1700000" indent="-228600" algn="l" defTabSz="914400" rtl="0" eaLnBrk="1" latinLnBrk="0" hangingPunct="1">
+              <a:lnSpc>
+                <a:spcPct val="90000"/>
+              </a:lnSpc>
+              <a:spcBef>
+                <a:spcPts val="200"/>
+              </a:spcBef>
+              <a:spcAft>
+                <a:spcPts val="400"/>
+              </a:spcAft>
+              <a:buClr>
+                <a:schemeClr val="accent1"/>
+              </a:buClr>
+              <a:buFont typeface="Calibri" pitchFamily="34" charset="0"/>
+              <a:buChar char="◦"/>
+              <a:defRPr sz="1400" kern="1200">
+                <a:solidFill>
+                  <a:schemeClr val="tx1">
+                    <a:lumMod val="75000"/>
+                    <a:lumOff val="25000"/>
+                  </a:schemeClr>
+                </a:solidFill>
+                <a:latin typeface="+mn-lt"/>
+                <a:ea typeface="+mn-ea"/>
+                <a:cs typeface="+mn-cs"/>
+              </a:defRPr>
+            </a:lvl9pPr>
+          </a:lstStyle>
+          <a:p>
+            <a:pPr marL="0" indent="0">
+              <a:buFont typeface="Arial" panose="020B0604020202020204" pitchFamily="34" charset="0"/>
+              <a:buNone/>
+            </a:pPr>
+            <a:r>
+              <a:rPr lang="en-US" dirty="0">
+                <a:solidFill>
+                  <a:schemeClr val="tx1"/>
+                </a:solidFill>
+                <a:latin typeface="Arial Unicode MS"/>
+              </a:rPr>
+              <a:t>Example: Google Drive</a:t>
+            </a:r>
+            <a:endParaRPr lang="en-US" dirty="0"/>
+          </a:p>
+        </p:txBody>
+      </p:sp>
+      <p:pic>
+        <p:nvPicPr>
+          <p:cNvPr id="8" name="Picture 7">
+            <a:extLst>
+              <a:ext uri="{FF2B5EF4-FFF2-40B4-BE49-F238E27FC236}">
+                <a16:creationId xmlns:a16="http://schemas.microsoft.com/office/drawing/2014/main" id="{272A9B96-6BD0-4FBE-836C-B5532E621FC6}"/>
+              </a:ext>
+            </a:extLst>
+          </p:cNvPr>
+          <p:cNvPicPr>
+            <a:picLocks noChangeAspect="1"/>
+          </p:cNvPicPr>
+          <p:nvPr/>
+        </p:nvPicPr>
+        <p:blipFill>
+          <a:blip r:embed="rId2"/>
+          <a:stretch>
+            <a:fillRect/>
+          </a:stretch>
+        </p:blipFill>
+        <p:spPr>
+          <a:xfrm>
+            <a:off x="1259840" y="2495192"/>
+            <a:ext cx="5384800" cy="2602523"/>
+          </a:xfrm>
+          <a:prstGeom prst="rect">
+            <a:avLst/>
+          </a:prstGeom>
+          <a:ln>
+            <a:solidFill>
+              <a:schemeClr val="tx1">
+                <a:lumMod val="75000"/>
+              </a:schemeClr>
+            </a:solidFill>
+          </a:ln>
+          <a:effectLst>
+            <a:outerShdw blurRad="50800" dist="38100" dir="2700000" algn="tl" rotWithShape="0">
+              <a:prstClr val="black">
+                <a:alpha val="40000"/>
+              </a:prstClr>
+            </a:outerShdw>
+          </a:effectLst>
+        </p:spPr>
+      </p:pic>
+      <p:pic>
+        <p:nvPicPr>
+          <p:cNvPr id="10" name="Picture 9">
+            <a:extLst>
+              <a:ext uri="{FF2B5EF4-FFF2-40B4-BE49-F238E27FC236}">
+                <a16:creationId xmlns:a16="http://schemas.microsoft.com/office/drawing/2014/main" id="{76371867-DC02-412C-9C8D-F3BE4182E831}"/>
+              </a:ext>
+            </a:extLst>
+          </p:cNvPr>
+          <p:cNvPicPr>
+            <a:picLocks noChangeAspect="1"/>
+          </p:cNvPicPr>
+          <p:nvPr/>
+        </p:nvPicPr>
+        <p:blipFill>
+          <a:blip r:embed="rId3"/>
+          <a:stretch>
+            <a:fillRect/>
+          </a:stretch>
+        </p:blipFill>
+        <p:spPr>
+          <a:xfrm>
+            <a:off x="6875423" y="1852941"/>
+            <a:ext cx="5106113" cy="4391638"/>
+          </a:xfrm>
+          <a:prstGeom prst="rect">
+            <a:avLst/>
+          </a:prstGeom>
+          <a:ln>
+            <a:solidFill>
+              <a:schemeClr val="tx1">
+                <a:lumMod val="75000"/>
+              </a:schemeClr>
+            </a:solidFill>
+          </a:ln>
+          <a:effectLst>
+            <a:outerShdw blurRad="50800" dist="38100" dir="2700000" algn="tl" rotWithShape="0">
+              <a:prstClr val="black">
+                <a:alpha val="40000"/>
+              </a:prstClr>
+            </a:outerShdw>
+          </a:effectLst>
+        </p:spPr>
+      </p:pic>
+    </p:spTree>
+    <p:extLst>
+      <p:ext uri="{BB962C8B-B14F-4D97-AF65-F5344CB8AC3E}">
+        <p14:creationId xmlns:p14="http://schemas.microsoft.com/office/powerpoint/2010/main" val="1962115842"/>
+      </p:ext>
+    </p:extLst>
+  </p:cSld>
+  <p:clrMapOvr>
+    <a:masterClrMapping/>
+  </p:clrMapOvr>
+</p:sld>
+</file>
+
+<file path=ppt/slides/slide2.xml><?xml version="1.0" encoding="utf-8"?>
+<p:sld xmlns:a="http://schemas.openxmlformats.org/drawingml/2006/main" xmlns:r="http://schemas.openxmlformats.org/officeDocument/2006/relationships" xmlns:p="http://schemas.openxmlformats.org/presentationml/2006/main">
+  <p:cSld>
+    <p:spTree>
+      <p:nvGrpSpPr>
+        <p:cNvPr id="1" name=""/>
+        <p:cNvGrpSpPr/>
+        <p:nvPr/>
+      </p:nvGrpSpPr>
+      <p:grpSpPr>
+        <a:xfrm>
+          <a:off x="0" y="0"/>
+          <a:ext cx="0" cy="0"/>
+          <a:chOff x="0" y="0"/>
+          <a:chExt cx="0" cy="0"/>
+        </a:xfrm>
+      </p:grpSpPr>
+      <p:sp>
+        <p:nvSpPr>
+          <p:cNvPr id="2" name="Title 1">
+            <a:extLst>
+              <a:ext uri="{FF2B5EF4-FFF2-40B4-BE49-F238E27FC236}">
+                <a16:creationId xmlns:a16="http://schemas.microsoft.com/office/drawing/2014/main" id="{33032254-4A0C-5998-C72F-381AF98A5312}"/>
+              </a:ext>
+            </a:extLst>
+          </p:cNvPr>
+          <p:cNvSpPr>
+            <a:spLocks noGrp="1"/>
+          </p:cNvSpPr>
+          <p:nvPr>
+            <p:ph type="title"/>
+          </p:nvPr>
+        </p:nvSpPr>
+        <p:spPr/>
+        <p:txBody>
+          <a:bodyPr/>
+          <a:lstStyle/>
+          <a:p>
+            <a:r>
+              <a:rPr lang="en-US" dirty="0"/>
+              <a:t>Things to be aware of</a:t>
+            </a:r>
+          </a:p>
+        </p:txBody>
+      </p:sp>
+      <p:sp>
+        <p:nvSpPr>
+          <p:cNvPr id="3" name="Content Placeholder 2">
+            <a:extLst>
+              <a:ext uri="{FF2B5EF4-FFF2-40B4-BE49-F238E27FC236}">
+                <a16:creationId xmlns:a16="http://schemas.microsoft.com/office/drawing/2014/main" id="{50120EED-E368-D3A5-6DC2-EECF90CC1E9A}"/>
+              </a:ext>
+            </a:extLst>
+          </p:cNvPr>
+          <p:cNvSpPr>
+            <a:spLocks noGrp="1"/>
+          </p:cNvSpPr>
+          <p:nvPr>
+            <p:ph idx="1"/>
+          </p:nvPr>
+        </p:nvSpPr>
+        <p:spPr/>
+        <p:txBody>
+          <a:bodyPr>
+            <a:normAutofit/>
+          </a:bodyPr>
+          <a:lstStyle/>
+          <a:p>
+            <a:r>
+              <a:rPr lang="en-US" sz="3200" dirty="0"/>
+              <a:t>Lab 0 is due Friday September 4</a:t>
+            </a:r>
+          </a:p>
+          <a:p>
+            <a:pPr lvl="1"/>
+            <a:r>
+              <a:rPr lang="en-US" sz="2800" dirty="0"/>
+              <a:t>We’ll start on this on Friday. </a:t>
+            </a:r>
+          </a:p>
+          <a:p>
+            <a:endParaRPr lang="en-US" sz="3200" dirty="0"/>
+          </a:p>
+        </p:txBody>
+      </p:sp>
+    </p:spTree>
+    <p:extLst>
+      <p:ext uri="{BB962C8B-B14F-4D97-AF65-F5344CB8AC3E}">
+        <p14:creationId xmlns:p14="http://schemas.microsoft.com/office/powerpoint/2010/main" val="3562903912"/>
+      </p:ext>
+    </p:extLst>
+  </p:cSld>
+  <p:clrMapOvr>
+    <a:masterClrMapping/>
+  </p:clrMapOvr>
+</p:sld>
+</file>
+
+<file path=ppt/slides/slide3.xml><?xml version="1.0" encoding="utf-8"?>
+<p:sld xmlns:a="http://schemas.openxmlformats.org/drawingml/2006/main" xmlns:r="http://schemas.openxmlformats.org/officeDocument/2006/relationships" xmlns:p="http://schemas.openxmlformats.org/presentationml/2006/main">
+  <p:cSld>
+    <p:spTree>
+      <p:nvGrpSpPr>
+        <p:cNvPr id="1" name=""/>
+        <p:cNvGrpSpPr/>
+        <p:nvPr/>
+      </p:nvGrpSpPr>
+      <p:grpSpPr>
+        <a:xfrm>
+          <a:off x="0" y="0"/>
+          <a:ext cx="0" cy="0"/>
+          <a:chOff x="0" y="0"/>
+          <a:chExt cx="0" cy="0"/>
+        </a:xfrm>
+      </p:grpSpPr>
+      <p:sp>
+        <p:nvSpPr>
+          <p:cNvPr id="2" name="Title 1">
+            <a:extLst>
+              <a:ext uri="{FF2B5EF4-FFF2-40B4-BE49-F238E27FC236}">
+                <a16:creationId xmlns:a16="http://schemas.microsoft.com/office/drawing/2014/main" id="{33032254-4A0C-5998-C72F-381AF98A5312}"/>
+              </a:ext>
+            </a:extLst>
+          </p:cNvPr>
+          <p:cNvSpPr>
+            <a:spLocks noGrp="1"/>
+          </p:cNvSpPr>
+          <p:nvPr>
+            <p:ph type="title"/>
+          </p:nvPr>
+        </p:nvSpPr>
+        <p:spPr/>
+        <p:txBody>
+          <a:bodyPr/>
+          <a:lstStyle/>
+          <a:p>
+            <a:r>
+              <a:rPr lang="en-US" dirty="0"/>
+              <a:t>Assigned reading</a:t>
+            </a:r>
+          </a:p>
+        </p:txBody>
+      </p:sp>
+      <p:sp>
+        <p:nvSpPr>
+          <p:cNvPr id="3" name="Content Placeholder 2">
+            <a:extLst>
+              <a:ext uri="{FF2B5EF4-FFF2-40B4-BE49-F238E27FC236}">
+                <a16:creationId xmlns:a16="http://schemas.microsoft.com/office/drawing/2014/main" id="{50120EED-E368-D3A5-6DC2-EECF90CC1E9A}"/>
+              </a:ext>
+            </a:extLst>
+          </p:cNvPr>
+          <p:cNvSpPr>
+            <a:spLocks noGrp="1"/>
+          </p:cNvSpPr>
+          <p:nvPr>
+            <p:ph idx="1"/>
+          </p:nvPr>
+        </p:nvSpPr>
+        <p:spPr>
+          <a:xfrm>
+            <a:off x="1097280" y="1845734"/>
+            <a:ext cx="5506720" cy="4023360"/>
+          </a:xfrm>
+        </p:spPr>
+        <p:txBody>
+          <a:bodyPr>
+            <a:normAutofit/>
+          </a:bodyPr>
+          <a:lstStyle/>
+          <a:p>
+            <a:pPr marL="0" indent="0">
+              <a:buNone/>
+            </a:pPr>
+            <a:r>
+              <a:rPr lang="en-US" sz="3200" dirty="0"/>
+              <a:t>Locate a csv dataset on our course data page. Download and open it.</a:t>
+            </a:r>
+          </a:p>
+          <a:p>
+            <a:pPr marL="0" indent="0">
+              <a:buNone/>
+            </a:pPr>
+            <a:endParaRPr lang="en-US" sz="3200" dirty="0"/>
+          </a:p>
+          <a:p>
+            <a:pPr marL="0" indent="0">
+              <a:buNone/>
+            </a:pPr>
+            <a:r>
+              <a:rPr lang="en-US" sz="3200" dirty="0"/>
+              <a:t>Classify each column as nominal, ordinal, interval, or ratio.</a:t>
+            </a:r>
+          </a:p>
+          <a:p>
+            <a:pPr marL="0" indent="0">
+              <a:buNone/>
+            </a:pPr>
+            <a:endParaRPr lang="en-US" sz="3200" dirty="0"/>
+          </a:p>
+          <a:p>
+            <a:pPr marL="0" indent="0">
+              <a:buNone/>
+            </a:pPr>
+            <a:endParaRPr lang="en-US" sz="3200" dirty="0"/>
+          </a:p>
+        </p:txBody>
+      </p:sp>
+      <p:pic>
+        <p:nvPicPr>
+          <p:cNvPr id="5" name="Picture 4">
+            <a:extLst>
+              <a:ext uri="{FF2B5EF4-FFF2-40B4-BE49-F238E27FC236}">
+                <a16:creationId xmlns:a16="http://schemas.microsoft.com/office/drawing/2014/main" id="{37CDC862-A97C-490D-A536-D256E807B650}"/>
+              </a:ext>
+            </a:extLst>
+          </p:cNvPr>
+          <p:cNvPicPr>
+            <a:picLocks noChangeAspect="1"/>
+          </p:cNvPicPr>
+          <p:nvPr/>
+        </p:nvPicPr>
+        <p:blipFill>
+          <a:blip r:embed="rId3"/>
+          <a:stretch>
+            <a:fillRect/>
+          </a:stretch>
+        </p:blipFill>
+        <p:spPr>
+          <a:xfrm>
+            <a:off x="6550335" y="286603"/>
+            <a:ext cx="5529905" cy="4691797"/>
+          </a:xfrm>
+          <a:prstGeom prst="rect">
+            <a:avLst/>
+          </a:prstGeom>
+          <a:ln w="19050" cap="sq">
+            <a:solidFill>
+              <a:srgbClr val="000000"/>
+            </a:solidFill>
+            <a:prstDash val="solid"/>
+            <a:miter lim="800000"/>
+          </a:ln>
+          <a:effectLst>
+            <a:outerShdw blurRad="50800" dist="38100" dir="2700000" algn="tl" rotWithShape="0">
+              <a:srgbClr val="000000">
+                <a:alpha val="43000"/>
+              </a:srgbClr>
+            </a:outerShdw>
+          </a:effectLst>
+        </p:spPr>
+      </p:pic>
+    </p:spTree>
+    <p:extLst>
+      <p:ext uri="{BB962C8B-B14F-4D97-AF65-F5344CB8AC3E}">
+        <p14:creationId xmlns:p14="http://schemas.microsoft.com/office/powerpoint/2010/main" val="976496886"/>
+      </p:ext>
+    </p:extLst>
+  </p:cSld>
+  <p:clrMapOvr>
+    <a:masterClrMapping/>
+  </p:clrMapOvr>
+</p:sld>
+</file>
+
 <file path=ppt/slides/slide4.xml><?xml version="1.0" encoding="utf-8"?>
 <p:sld xmlns:a="http://schemas.openxmlformats.org/drawingml/2006/main" xmlns:r="http://schemas.openxmlformats.org/officeDocument/2006/relationships" xmlns:p="http://schemas.openxmlformats.org/presentationml/2006/main">
   <p:cSld>
@@ -5867,10 +7928,10 @@
       </p:grpSpPr>
       <p:sp>
         <p:nvSpPr>
-          <p:cNvPr id="5" name="Title 4">
+          <p:cNvPr id="2" name="Title 1">
             <a:extLst>
               <a:ext uri="{FF2B5EF4-FFF2-40B4-BE49-F238E27FC236}">
-                <a16:creationId xmlns:a16="http://schemas.microsoft.com/office/drawing/2014/main" id="{ECCD8796-2D09-4694-86CC-8E6D13491717}"/>
+                <a16:creationId xmlns:a16="http://schemas.microsoft.com/office/drawing/2014/main" id="{33032254-4A0C-5998-C72F-381AF98A5312}"/>
               </a:ext>
             </a:extLst>
           </p:cNvPr>
@@ -5883,14 +7944,12 @@
         </p:nvSpPr>
         <p:spPr/>
         <p:txBody>
-          <a:bodyPr>
-            <a:normAutofit/>
-          </a:bodyPr>
+          <a:bodyPr/>
           <a:lstStyle/>
           <a:p>
             <a:r>
-              <a:rPr lang="en-US" sz="4000" dirty="0"/>
-              <a:t>APIs work in a step-by-step process</a:t>
+              <a:rPr lang="en-US" dirty="0"/>
+              <a:t>R variable types</a:t>
             </a:r>
           </a:p>
         </p:txBody>
@@ -5900,7 +7959,7 @@
           <p:cNvPr id="3" name="Content Placeholder 2">
             <a:extLst>
               <a:ext uri="{FF2B5EF4-FFF2-40B4-BE49-F238E27FC236}">
-                <a16:creationId xmlns:a16="http://schemas.microsoft.com/office/drawing/2014/main" id="{3D2CD8FC-E007-2392-5465-A4C08813C892}"/>
+                <a16:creationId xmlns:a16="http://schemas.microsoft.com/office/drawing/2014/main" id="{50120EED-E368-D3A5-6DC2-EECF90CC1E9A}"/>
               </a:ext>
             </a:extLst>
           </p:cNvPr>
@@ -5913,8 +7972,8 @@
         </p:nvSpPr>
         <p:spPr>
           <a:xfrm>
-            <a:off x="1097280" y="2032000"/>
-            <a:ext cx="10058400" cy="3837094"/>
+            <a:off x="1229360" y="1845734"/>
+            <a:ext cx="5090161" cy="4023360"/>
           </a:xfrm>
         </p:spPr>
         <p:txBody>
@@ -5923,96 +7982,1238 @@
           </a:bodyPr>
           <a:lstStyle/>
           <a:p>
-            <a:pPr lvl="1" fontAlgn="base"/>
-            <a:r>
-              <a:rPr lang="en-US" sz="2800" b="1" dirty="0"/>
-              <a:t>Request:</a:t>
-            </a:r>
-            <a:r>
-              <a:rPr lang="en-US" sz="2800" dirty="0"/>
-              <a:t> A client (user) sends a request through the API's URI (Uniform Resource Identifier).</a:t>
-            </a:r>
-          </a:p>
-          <a:p>
-            <a:pPr lvl="1" fontAlgn="base"/>
-            <a:r>
-              <a:rPr lang="en-US" sz="2800" b="1" dirty="0"/>
-              <a:t>Processing:</a:t>
-            </a:r>
-            <a:r>
-              <a:rPr lang="en-US" sz="2800" dirty="0"/>
-              <a:t> The API forwards the request to the server.</a:t>
-            </a:r>
-          </a:p>
-          <a:p>
-            <a:pPr lvl="1" fontAlgn="base"/>
-            <a:r>
-              <a:rPr lang="en-US" sz="2800" b="1" dirty="0"/>
-              <a:t>Response:</a:t>
-            </a:r>
-            <a:r>
-              <a:rPr lang="en-US" sz="2800" dirty="0"/>
-              <a:t> The server processes the request and sends the response back to the API.</a:t>
-            </a:r>
-          </a:p>
-          <a:p>
-            <a:pPr lvl="1" fontAlgn="base"/>
-            <a:r>
-              <a:rPr lang="en-US" sz="2800" b="1" dirty="0"/>
-              <a:t>Delivery:</a:t>
-            </a:r>
-            <a:r>
-              <a:rPr lang="en-US" sz="2800" dirty="0"/>
-              <a:t> The API returns the server's response to the client.</a:t>
-            </a:r>
-          </a:p>
-        </p:txBody>
-      </p:sp>
-      <p:sp>
-        <p:nvSpPr>
-          <p:cNvPr id="7" name="TextBox 6">
+            <a:pPr marL="0" indent="0">
+              <a:buNone/>
+            </a:pPr>
+            <a:r>
+              <a:rPr lang="en-US" sz="3200" dirty="0"/>
+              <a:t>For these variables, how do you think R would read them?</a:t>
+            </a:r>
+          </a:p>
+        </p:txBody>
+      </p:sp>
+      <p:graphicFrame>
+        <p:nvGraphicFramePr>
+          <p:cNvPr id="4" name="Table 3">
             <a:extLst>
               <a:ext uri="{FF2B5EF4-FFF2-40B4-BE49-F238E27FC236}">
-                <a16:creationId xmlns:a16="http://schemas.microsoft.com/office/drawing/2014/main" id="{FCAA375F-FF6A-45C0-B0F9-F8090DF0E719}"/>
+                <a16:creationId xmlns:a16="http://schemas.microsoft.com/office/drawing/2014/main" id="{4419C1CA-2073-4E1A-AD04-5F045C7181C5}"/>
               </a:ext>
             </a:extLst>
           </p:cNvPr>
-          <p:cNvSpPr txBox="1"/>
-          <p:nvPr/>
-        </p:nvSpPr>
-        <p:spPr>
-          <a:xfrm>
-            <a:off x="1193800" y="5054845"/>
-            <a:ext cx="9865360" cy="1015663"/>
-          </a:xfrm>
-          <a:prstGeom prst="rect">
-            <a:avLst/>
-          </a:prstGeom>
-          <a:solidFill>
-            <a:schemeClr val="accent2"/>
-          </a:solidFill>
-        </p:spPr>
-        <p:txBody>
-          <a:bodyPr wrap="square">
-            <a:spAutoFit/>
-          </a:bodyPr>
-          <a:lstStyle/>
-          <a:p>
-            <a:r>
-              <a:rPr lang="en-US" sz="2000" dirty="0">
-                <a:solidFill>
-                  <a:schemeClr val="bg1"/>
-                </a:solidFill>
-              </a:rPr>
-              <a:t>Sometimes you need to access data from a website, rather than storing it directly on your computer. An API communicates with a server’s backend system, rather than you having to go into that computer yourself.</a:t>
-            </a:r>
-          </a:p>
-        </p:txBody>
-      </p:sp>
+          <p:cNvGraphicFramePr>
+            <a:graphicFrameLocks noGrp="1"/>
+          </p:cNvGraphicFramePr>
+          <p:nvPr>
+            <p:extLst>
+              <p:ext uri="{D42A27DB-BD31-4B8C-83A1-F6EECF244321}">
+                <p14:modId xmlns:p14="http://schemas.microsoft.com/office/powerpoint/2010/main" val="895898021"/>
+              </p:ext>
+            </p:extLst>
+          </p:nvPr>
+        </p:nvGraphicFramePr>
+        <p:xfrm>
+          <a:off x="6705600" y="2384214"/>
+          <a:ext cx="5222241" cy="3756240"/>
+        </p:xfrm>
+        <a:graphic>
+          <a:graphicData uri="http://schemas.openxmlformats.org/drawingml/2006/table">
+            <a:tbl>
+              <a:tblPr/>
+              <a:tblGrid>
+                <a:gridCol w="1595121">
+                  <a:extLst>
+                    <a:ext uri="{9D8B030D-6E8A-4147-A177-3AD203B41FA5}">
+                      <a16:colId xmlns:a16="http://schemas.microsoft.com/office/drawing/2014/main" val="2559440208"/>
+                    </a:ext>
+                  </a:extLst>
+                </a:gridCol>
+                <a:gridCol w="3627120">
+                  <a:extLst>
+                    <a:ext uri="{9D8B030D-6E8A-4147-A177-3AD203B41FA5}">
+                      <a16:colId xmlns:a16="http://schemas.microsoft.com/office/drawing/2014/main" val="1681699256"/>
+                    </a:ext>
+                  </a:extLst>
+                </a:gridCol>
+              </a:tblGrid>
+              <a:tr h="375624">
+                <a:tc>
+                  <a:txBody>
+                    <a:bodyPr/>
+                    <a:lstStyle/>
+                    <a:p>
+                      <a:r>
+                        <a:rPr lang="en-US" sz="1800" b="1">
+                          <a:effectLst/>
+                        </a:rPr>
+                        <a:t>Abbreviation</a:t>
+                      </a:r>
+                    </a:p>
+                  </a:txBody>
+                  <a:tcPr marL="91426" marR="91426" marT="45713" marB="45713" anchor="ctr">
+                    <a:lnL w="9525" cap="flat" cmpd="sng" algn="ctr">
+                      <a:solidFill>
+                        <a:srgbClr val="E6E6E6"/>
+                      </a:solidFill>
+                      <a:prstDash val="solid"/>
+                      <a:round/>
+                      <a:headEnd type="none" w="med" len="med"/>
+                      <a:tailEnd type="none" w="med" len="med"/>
+                    </a:lnL>
+                    <a:lnR w="9525" cap="flat" cmpd="sng" algn="ctr">
+                      <a:solidFill>
+                        <a:srgbClr val="E6E6E6"/>
+                      </a:solidFill>
+                      <a:prstDash val="solid"/>
+                      <a:round/>
+                      <a:headEnd type="none" w="med" len="med"/>
+                      <a:tailEnd type="none" w="med" len="med"/>
+                    </a:lnR>
+                    <a:lnT w="9525" cap="flat" cmpd="sng" algn="ctr">
+                      <a:solidFill>
+                        <a:srgbClr val="E6E6E6"/>
+                      </a:solidFill>
+                      <a:prstDash val="solid"/>
+                      <a:round/>
+                      <a:headEnd type="none" w="med" len="med"/>
+                      <a:tailEnd type="none" w="med" len="med"/>
+                    </a:lnT>
+                    <a:lnB w="9525" cap="flat" cmpd="sng" algn="ctr">
+                      <a:solidFill>
+                        <a:srgbClr val="E6E6E6"/>
+                      </a:solidFill>
+                      <a:prstDash val="solid"/>
+                      <a:round/>
+                      <a:headEnd type="none" w="med" len="med"/>
+                      <a:tailEnd type="none" w="med" len="med"/>
+                    </a:lnB>
+                    <a:solidFill>
+                      <a:srgbClr val="F5F5F5"/>
+                    </a:solidFill>
+                  </a:tcPr>
+                </a:tc>
+                <a:tc>
+                  <a:txBody>
+                    <a:bodyPr/>
+                    <a:lstStyle/>
+                    <a:p>
+                      <a:r>
+                        <a:rPr lang="en-US" sz="1800" b="1" dirty="0">
+                          <a:effectLst/>
+                        </a:rPr>
+                        <a:t>Type</a:t>
+                      </a:r>
+                    </a:p>
+                  </a:txBody>
+                  <a:tcPr marL="91426" marR="91426" marT="45713" marB="45713" anchor="ctr">
+                    <a:lnL w="9525" cap="flat" cmpd="sng" algn="ctr">
+                      <a:solidFill>
+                        <a:srgbClr val="E6E6E6"/>
+                      </a:solidFill>
+                      <a:prstDash val="solid"/>
+                      <a:round/>
+                      <a:headEnd type="none" w="med" len="med"/>
+                      <a:tailEnd type="none" w="med" len="med"/>
+                    </a:lnL>
+                    <a:lnR w="9525" cap="flat" cmpd="sng" algn="ctr">
+                      <a:solidFill>
+                        <a:srgbClr val="E6E6E6"/>
+                      </a:solidFill>
+                      <a:prstDash val="solid"/>
+                      <a:round/>
+                      <a:headEnd type="none" w="med" len="med"/>
+                      <a:tailEnd type="none" w="med" len="med"/>
+                    </a:lnR>
+                    <a:lnT w="9525" cap="flat" cmpd="sng" algn="ctr">
+                      <a:solidFill>
+                        <a:srgbClr val="E6E6E6"/>
+                      </a:solidFill>
+                      <a:prstDash val="solid"/>
+                      <a:round/>
+                      <a:headEnd type="none" w="med" len="med"/>
+                      <a:tailEnd type="none" w="med" len="med"/>
+                    </a:lnT>
+                    <a:lnB w="9525" cap="flat" cmpd="sng" algn="ctr">
+                      <a:solidFill>
+                        <a:srgbClr val="E6E6E6"/>
+                      </a:solidFill>
+                      <a:prstDash val="solid"/>
+                      <a:round/>
+                      <a:headEnd type="none" w="med" len="med"/>
+                      <a:tailEnd type="none" w="med" len="med"/>
+                    </a:lnB>
+                    <a:solidFill>
+                      <a:srgbClr val="F5F5F5"/>
+                    </a:solidFill>
+                  </a:tcPr>
+                </a:tc>
+                <a:extLst>
+                  <a:ext uri="{0D108BD9-81ED-4DB2-BD59-A6C34878D82A}">
+                    <a16:rowId xmlns:a16="http://schemas.microsoft.com/office/drawing/2014/main" val="4232125653"/>
+                  </a:ext>
+                </a:extLst>
+              </a:tr>
+              <a:tr h="375624">
+                <a:tc>
+                  <a:txBody>
+                    <a:bodyPr/>
+                    <a:lstStyle/>
+                    <a:p>
+                      <a:r>
+                        <a:rPr lang="en-US" sz="1800">
+                          <a:effectLst/>
+                        </a:rPr>
+                        <a:t>chr</a:t>
+                      </a:r>
+                    </a:p>
+                  </a:txBody>
+                  <a:tcPr marL="91426" marR="91426" marT="45713" marB="45713" anchor="ctr">
+                    <a:lnL w="9525" cap="flat" cmpd="sng" algn="ctr">
+                      <a:solidFill>
+                        <a:srgbClr val="E6E6E6"/>
+                      </a:solidFill>
+                      <a:prstDash val="solid"/>
+                      <a:round/>
+                      <a:headEnd type="none" w="med" len="med"/>
+                      <a:tailEnd type="none" w="med" len="med"/>
+                    </a:lnL>
+                    <a:lnR w="9525" cap="flat" cmpd="sng" algn="ctr">
+                      <a:solidFill>
+                        <a:srgbClr val="E6E6E6"/>
+                      </a:solidFill>
+                      <a:prstDash val="solid"/>
+                      <a:round/>
+                      <a:headEnd type="none" w="med" len="med"/>
+                      <a:tailEnd type="none" w="med" len="med"/>
+                    </a:lnR>
+                    <a:lnT w="9525" cap="flat" cmpd="sng" algn="ctr">
+                      <a:solidFill>
+                        <a:srgbClr val="E6E6E6"/>
+                      </a:solidFill>
+                      <a:prstDash val="solid"/>
+                      <a:round/>
+                      <a:headEnd type="none" w="med" len="med"/>
+                      <a:tailEnd type="none" w="med" len="med"/>
+                    </a:lnT>
+                    <a:lnB w="9525" cap="flat" cmpd="sng" algn="ctr">
+                      <a:solidFill>
+                        <a:srgbClr val="E6E6E6"/>
+                      </a:solidFill>
+                      <a:prstDash val="solid"/>
+                      <a:round/>
+                      <a:headEnd type="none" w="med" len="med"/>
+                      <a:tailEnd type="none" w="med" len="med"/>
+                    </a:lnB>
+                    <a:solidFill>
+                      <a:srgbClr val="F5F5F5"/>
+                    </a:solidFill>
+                  </a:tcPr>
+                </a:tc>
+                <a:tc>
+                  <a:txBody>
+                    <a:bodyPr/>
+                    <a:lstStyle/>
+                    <a:p>
+                      <a:r>
+                        <a:rPr lang="en-US" sz="1800">
+                          <a:effectLst/>
+                        </a:rPr>
+                        <a:t>character</a:t>
+                      </a:r>
+                    </a:p>
+                  </a:txBody>
+                  <a:tcPr marL="91426" marR="91426" marT="45713" marB="45713" anchor="ctr">
+                    <a:lnL w="9525" cap="flat" cmpd="sng" algn="ctr">
+                      <a:solidFill>
+                        <a:srgbClr val="E6E6E6"/>
+                      </a:solidFill>
+                      <a:prstDash val="solid"/>
+                      <a:round/>
+                      <a:headEnd type="none" w="med" len="med"/>
+                      <a:tailEnd type="none" w="med" len="med"/>
+                    </a:lnL>
+                    <a:lnR w="9525" cap="flat" cmpd="sng" algn="ctr">
+                      <a:solidFill>
+                        <a:srgbClr val="E6E6E6"/>
+                      </a:solidFill>
+                      <a:prstDash val="solid"/>
+                      <a:round/>
+                      <a:headEnd type="none" w="med" len="med"/>
+                      <a:tailEnd type="none" w="med" len="med"/>
+                    </a:lnR>
+                    <a:lnT w="9525" cap="flat" cmpd="sng" algn="ctr">
+                      <a:solidFill>
+                        <a:srgbClr val="E6E6E6"/>
+                      </a:solidFill>
+                      <a:prstDash val="solid"/>
+                      <a:round/>
+                      <a:headEnd type="none" w="med" len="med"/>
+                      <a:tailEnd type="none" w="med" len="med"/>
+                    </a:lnT>
+                    <a:lnB w="9525" cap="flat" cmpd="sng" algn="ctr">
+                      <a:solidFill>
+                        <a:srgbClr val="E6E6E6"/>
+                      </a:solidFill>
+                      <a:prstDash val="solid"/>
+                      <a:round/>
+                      <a:headEnd type="none" w="med" len="med"/>
+                      <a:tailEnd type="none" w="med" len="med"/>
+                    </a:lnB>
+                    <a:solidFill>
+                      <a:srgbClr val="F5F5F5"/>
+                    </a:solidFill>
+                  </a:tcPr>
+                </a:tc>
+                <a:extLst>
+                  <a:ext uri="{0D108BD9-81ED-4DB2-BD59-A6C34878D82A}">
+                    <a16:rowId xmlns:a16="http://schemas.microsoft.com/office/drawing/2014/main" val="459710345"/>
+                  </a:ext>
+                </a:extLst>
+              </a:tr>
+              <a:tr h="375624">
+                <a:tc>
+                  <a:txBody>
+                    <a:bodyPr/>
+                    <a:lstStyle/>
+                    <a:p>
+                      <a:r>
+                        <a:rPr lang="en-US" sz="1800" dirty="0">
+                          <a:effectLst/>
+                        </a:rPr>
+                        <a:t>int</a:t>
+                      </a:r>
+                    </a:p>
+                  </a:txBody>
+                  <a:tcPr marL="91426" marR="91426" marT="45713" marB="45713" anchor="ctr">
+                    <a:lnL w="9525" cap="flat" cmpd="sng" algn="ctr">
+                      <a:solidFill>
+                        <a:srgbClr val="E6E6E6"/>
+                      </a:solidFill>
+                      <a:prstDash val="solid"/>
+                      <a:round/>
+                      <a:headEnd type="none" w="med" len="med"/>
+                      <a:tailEnd type="none" w="med" len="med"/>
+                    </a:lnL>
+                    <a:lnR w="9525" cap="flat" cmpd="sng" algn="ctr">
+                      <a:solidFill>
+                        <a:srgbClr val="E6E6E6"/>
+                      </a:solidFill>
+                      <a:prstDash val="solid"/>
+                      <a:round/>
+                      <a:headEnd type="none" w="med" len="med"/>
+                      <a:tailEnd type="none" w="med" len="med"/>
+                    </a:lnR>
+                    <a:lnT w="9525" cap="flat" cmpd="sng" algn="ctr">
+                      <a:solidFill>
+                        <a:srgbClr val="E6E6E6"/>
+                      </a:solidFill>
+                      <a:prstDash val="solid"/>
+                      <a:round/>
+                      <a:headEnd type="none" w="med" len="med"/>
+                      <a:tailEnd type="none" w="med" len="med"/>
+                    </a:lnT>
+                    <a:lnB w="9525" cap="flat" cmpd="sng" algn="ctr">
+                      <a:solidFill>
+                        <a:srgbClr val="E6E6E6"/>
+                      </a:solidFill>
+                      <a:prstDash val="solid"/>
+                      <a:round/>
+                      <a:headEnd type="none" w="med" len="med"/>
+                      <a:tailEnd type="none" w="med" len="med"/>
+                    </a:lnB>
+                    <a:solidFill>
+                      <a:srgbClr val="F5F5F5"/>
+                    </a:solidFill>
+                  </a:tcPr>
+                </a:tc>
+                <a:tc>
+                  <a:txBody>
+                    <a:bodyPr/>
+                    <a:lstStyle/>
+                    <a:p>
+                      <a:r>
+                        <a:rPr lang="en-US" sz="1800">
+                          <a:effectLst/>
+                        </a:rPr>
+                        <a:t>integer</a:t>
+                      </a:r>
+                    </a:p>
+                  </a:txBody>
+                  <a:tcPr marL="91426" marR="91426" marT="45713" marB="45713" anchor="ctr">
+                    <a:lnL w="9525" cap="flat" cmpd="sng" algn="ctr">
+                      <a:solidFill>
+                        <a:srgbClr val="E6E6E6"/>
+                      </a:solidFill>
+                      <a:prstDash val="solid"/>
+                      <a:round/>
+                      <a:headEnd type="none" w="med" len="med"/>
+                      <a:tailEnd type="none" w="med" len="med"/>
+                    </a:lnL>
+                    <a:lnR w="9525" cap="flat" cmpd="sng" algn="ctr">
+                      <a:solidFill>
+                        <a:srgbClr val="E6E6E6"/>
+                      </a:solidFill>
+                      <a:prstDash val="solid"/>
+                      <a:round/>
+                      <a:headEnd type="none" w="med" len="med"/>
+                      <a:tailEnd type="none" w="med" len="med"/>
+                    </a:lnR>
+                    <a:lnT w="9525" cap="flat" cmpd="sng" algn="ctr">
+                      <a:solidFill>
+                        <a:srgbClr val="E6E6E6"/>
+                      </a:solidFill>
+                      <a:prstDash val="solid"/>
+                      <a:round/>
+                      <a:headEnd type="none" w="med" len="med"/>
+                      <a:tailEnd type="none" w="med" len="med"/>
+                    </a:lnT>
+                    <a:lnB w="9525" cap="flat" cmpd="sng" algn="ctr">
+                      <a:solidFill>
+                        <a:srgbClr val="E6E6E6"/>
+                      </a:solidFill>
+                      <a:prstDash val="solid"/>
+                      <a:round/>
+                      <a:headEnd type="none" w="med" len="med"/>
+                      <a:tailEnd type="none" w="med" len="med"/>
+                    </a:lnB>
+                    <a:solidFill>
+                      <a:srgbClr val="F5F5F5"/>
+                    </a:solidFill>
+                  </a:tcPr>
+                </a:tc>
+                <a:extLst>
+                  <a:ext uri="{0D108BD9-81ED-4DB2-BD59-A6C34878D82A}">
+                    <a16:rowId xmlns:a16="http://schemas.microsoft.com/office/drawing/2014/main" val="1356645475"/>
+                  </a:ext>
+                </a:extLst>
+              </a:tr>
+              <a:tr h="375624">
+                <a:tc>
+                  <a:txBody>
+                    <a:bodyPr/>
+                    <a:lstStyle/>
+                    <a:p>
+                      <a:r>
+                        <a:rPr lang="en-US" sz="1800">
+                          <a:effectLst/>
+                        </a:rPr>
+                        <a:t>dbl</a:t>
+                      </a:r>
+                    </a:p>
+                  </a:txBody>
+                  <a:tcPr marL="91426" marR="91426" marT="45713" marB="45713" anchor="ctr">
+                    <a:lnL w="9525" cap="flat" cmpd="sng" algn="ctr">
+                      <a:solidFill>
+                        <a:srgbClr val="E6E6E6"/>
+                      </a:solidFill>
+                      <a:prstDash val="solid"/>
+                      <a:round/>
+                      <a:headEnd type="none" w="med" len="med"/>
+                      <a:tailEnd type="none" w="med" len="med"/>
+                    </a:lnL>
+                    <a:lnR w="9525" cap="flat" cmpd="sng" algn="ctr">
+                      <a:solidFill>
+                        <a:srgbClr val="E6E6E6"/>
+                      </a:solidFill>
+                      <a:prstDash val="solid"/>
+                      <a:round/>
+                      <a:headEnd type="none" w="med" len="med"/>
+                      <a:tailEnd type="none" w="med" len="med"/>
+                    </a:lnR>
+                    <a:lnT w="9525" cap="flat" cmpd="sng" algn="ctr">
+                      <a:solidFill>
+                        <a:srgbClr val="E6E6E6"/>
+                      </a:solidFill>
+                      <a:prstDash val="solid"/>
+                      <a:round/>
+                      <a:headEnd type="none" w="med" len="med"/>
+                      <a:tailEnd type="none" w="med" len="med"/>
+                    </a:lnT>
+                    <a:lnB w="9525" cap="flat" cmpd="sng" algn="ctr">
+                      <a:solidFill>
+                        <a:srgbClr val="E6E6E6"/>
+                      </a:solidFill>
+                      <a:prstDash val="solid"/>
+                      <a:round/>
+                      <a:headEnd type="none" w="med" len="med"/>
+                      <a:tailEnd type="none" w="med" len="med"/>
+                    </a:lnB>
+                    <a:solidFill>
+                      <a:srgbClr val="F5F5F5"/>
+                    </a:solidFill>
+                  </a:tcPr>
+                </a:tc>
+                <a:tc>
+                  <a:txBody>
+                    <a:bodyPr/>
+                    <a:lstStyle/>
+                    <a:p>
+                      <a:r>
+                        <a:rPr lang="en-US" sz="1800">
+                          <a:effectLst/>
+                        </a:rPr>
+                        <a:t>double (numeric with decimals)</a:t>
+                      </a:r>
+                    </a:p>
+                  </a:txBody>
+                  <a:tcPr marL="91426" marR="91426" marT="45713" marB="45713" anchor="ctr">
+                    <a:lnL w="9525" cap="flat" cmpd="sng" algn="ctr">
+                      <a:solidFill>
+                        <a:srgbClr val="E6E6E6"/>
+                      </a:solidFill>
+                      <a:prstDash val="solid"/>
+                      <a:round/>
+                      <a:headEnd type="none" w="med" len="med"/>
+                      <a:tailEnd type="none" w="med" len="med"/>
+                    </a:lnL>
+                    <a:lnR w="9525" cap="flat" cmpd="sng" algn="ctr">
+                      <a:solidFill>
+                        <a:srgbClr val="E6E6E6"/>
+                      </a:solidFill>
+                      <a:prstDash val="solid"/>
+                      <a:round/>
+                      <a:headEnd type="none" w="med" len="med"/>
+                      <a:tailEnd type="none" w="med" len="med"/>
+                    </a:lnR>
+                    <a:lnT w="9525" cap="flat" cmpd="sng" algn="ctr">
+                      <a:solidFill>
+                        <a:srgbClr val="E6E6E6"/>
+                      </a:solidFill>
+                      <a:prstDash val="solid"/>
+                      <a:round/>
+                      <a:headEnd type="none" w="med" len="med"/>
+                      <a:tailEnd type="none" w="med" len="med"/>
+                    </a:lnT>
+                    <a:lnB w="9525" cap="flat" cmpd="sng" algn="ctr">
+                      <a:solidFill>
+                        <a:srgbClr val="E6E6E6"/>
+                      </a:solidFill>
+                      <a:prstDash val="solid"/>
+                      <a:round/>
+                      <a:headEnd type="none" w="med" len="med"/>
+                      <a:tailEnd type="none" w="med" len="med"/>
+                    </a:lnB>
+                    <a:solidFill>
+                      <a:srgbClr val="F5F5F5"/>
+                    </a:solidFill>
+                  </a:tcPr>
+                </a:tc>
+                <a:extLst>
+                  <a:ext uri="{0D108BD9-81ED-4DB2-BD59-A6C34878D82A}">
+                    <a16:rowId xmlns:a16="http://schemas.microsoft.com/office/drawing/2014/main" val="1154783920"/>
+                  </a:ext>
+                </a:extLst>
+              </a:tr>
+              <a:tr h="375624">
+                <a:tc>
+                  <a:txBody>
+                    <a:bodyPr/>
+                    <a:lstStyle/>
+                    <a:p>
+                      <a:r>
+                        <a:rPr lang="en-US" sz="1800">
+                          <a:effectLst/>
+                        </a:rPr>
+                        <a:t>lgl</a:t>
+                      </a:r>
+                    </a:p>
+                  </a:txBody>
+                  <a:tcPr marL="91426" marR="91426" marT="45713" marB="45713" anchor="ctr">
+                    <a:lnL w="9525" cap="flat" cmpd="sng" algn="ctr">
+                      <a:solidFill>
+                        <a:srgbClr val="E6E6E6"/>
+                      </a:solidFill>
+                      <a:prstDash val="solid"/>
+                      <a:round/>
+                      <a:headEnd type="none" w="med" len="med"/>
+                      <a:tailEnd type="none" w="med" len="med"/>
+                    </a:lnL>
+                    <a:lnR w="9525" cap="flat" cmpd="sng" algn="ctr">
+                      <a:solidFill>
+                        <a:srgbClr val="E6E6E6"/>
+                      </a:solidFill>
+                      <a:prstDash val="solid"/>
+                      <a:round/>
+                      <a:headEnd type="none" w="med" len="med"/>
+                      <a:tailEnd type="none" w="med" len="med"/>
+                    </a:lnR>
+                    <a:lnT w="9525" cap="flat" cmpd="sng" algn="ctr">
+                      <a:solidFill>
+                        <a:srgbClr val="E6E6E6"/>
+                      </a:solidFill>
+                      <a:prstDash val="solid"/>
+                      <a:round/>
+                      <a:headEnd type="none" w="med" len="med"/>
+                      <a:tailEnd type="none" w="med" len="med"/>
+                    </a:lnT>
+                    <a:lnB w="9525" cap="flat" cmpd="sng" algn="ctr">
+                      <a:solidFill>
+                        <a:srgbClr val="E6E6E6"/>
+                      </a:solidFill>
+                      <a:prstDash val="solid"/>
+                      <a:round/>
+                      <a:headEnd type="none" w="med" len="med"/>
+                      <a:tailEnd type="none" w="med" len="med"/>
+                    </a:lnB>
+                    <a:solidFill>
+                      <a:srgbClr val="F5F5F5"/>
+                    </a:solidFill>
+                  </a:tcPr>
+                </a:tc>
+                <a:tc>
+                  <a:txBody>
+                    <a:bodyPr/>
+                    <a:lstStyle/>
+                    <a:p>
+                      <a:r>
+                        <a:rPr lang="en-US" sz="1800">
+                          <a:effectLst/>
+                        </a:rPr>
+                        <a:t>logical (TRUE/FALSE)</a:t>
+                      </a:r>
+                    </a:p>
+                  </a:txBody>
+                  <a:tcPr marL="91426" marR="91426" marT="45713" marB="45713" anchor="ctr">
+                    <a:lnL w="9525" cap="flat" cmpd="sng" algn="ctr">
+                      <a:solidFill>
+                        <a:srgbClr val="E6E6E6"/>
+                      </a:solidFill>
+                      <a:prstDash val="solid"/>
+                      <a:round/>
+                      <a:headEnd type="none" w="med" len="med"/>
+                      <a:tailEnd type="none" w="med" len="med"/>
+                    </a:lnL>
+                    <a:lnR w="9525" cap="flat" cmpd="sng" algn="ctr">
+                      <a:solidFill>
+                        <a:srgbClr val="E6E6E6"/>
+                      </a:solidFill>
+                      <a:prstDash val="solid"/>
+                      <a:round/>
+                      <a:headEnd type="none" w="med" len="med"/>
+                      <a:tailEnd type="none" w="med" len="med"/>
+                    </a:lnR>
+                    <a:lnT w="9525" cap="flat" cmpd="sng" algn="ctr">
+                      <a:solidFill>
+                        <a:srgbClr val="E6E6E6"/>
+                      </a:solidFill>
+                      <a:prstDash val="solid"/>
+                      <a:round/>
+                      <a:headEnd type="none" w="med" len="med"/>
+                      <a:tailEnd type="none" w="med" len="med"/>
+                    </a:lnT>
+                    <a:lnB w="9525" cap="flat" cmpd="sng" algn="ctr">
+                      <a:solidFill>
+                        <a:srgbClr val="E6E6E6"/>
+                      </a:solidFill>
+                      <a:prstDash val="solid"/>
+                      <a:round/>
+                      <a:headEnd type="none" w="med" len="med"/>
+                      <a:tailEnd type="none" w="med" len="med"/>
+                    </a:lnB>
+                    <a:solidFill>
+                      <a:srgbClr val="F5F5F5"/>
+                    </a:solidFill>
+                  </a:tcPr>
+                </a:tc>
+                <a:extLst>
+                  <a:ext uri="{0D108BD9-81ED-4DB2-BD59-A6C34878D82A}">
+                    <a16:rowId xmlns:a16="http://schemas.microsoft.com/office/drawing/2014/main" val="185496402"/>
+                  </a:ext>
+                </a:extLst>
+              </a:tr>
+              <a:tr h="375624">
+                <a:tc>
+                  <a:txBody>
+                    <a:bodyPr/>
+                    <a:lstStyle/>
+                    <a:p>
+                      <a:r>
+                        <a:rPr lang="en-US" sz="1800">
+                          <a:effectLst/>
+                        </a:rPr>
+                        <a:t>fct</a:t>
+                      </a:r>
+                    </a:p>
+                  </a:txBody>
+                  <a:tcPr marL="91426" marR="91426" marT="45713" marB="45713" anchor="ctr">
+                    <a:lnL w="9525" cap="flat" cmpd="sng" algn="ctr">
+                      <a:solidFill>
+                        <a:srgbClr val="E6E6E6"/>
+                      </a:solidFill>
+                      <a:prstDash val="solid"/>
+                      <a:round/>
+                      <a:headEnd type="none" w="med" len="med"/>
+                      <a:tailEnd type="none" w="med" len="med"/>
+                    </a:lnL>
+                    <a:lnR w="9525" cap="flat" cmpd="sng" algn="ctr">
+                      <a:solidFill>
+                        <a:srgbClr val="E6E6E6"/>
+                      </a:solidFill>
+                      <a:prstDash val="solid"/>
+                      <a:round/>
+                      <a:headEnd type="none" w="med" len="med"/>
+                      <a:tailEnd type="none" w="med" len="med"/>
+                    </a:lnR>
+                    <a:lnT w="9525" cap="flat" cmpd="sng" algn="ctr">
+                      <a:solidFill>
+                        <a:srgbClr val="E6E6E6"/>
+                      </a:solidFill>
+                      <a:prstDash val="solid"/>
+                      <a:round/>
+                      <a:headEnd type="none" w="med" len="med"/>
+                      <a:tailEnd type="none" w="med" len="med"/>
+                    </a:lnT>
+                    <a:lnB w="9525" cap="flat" cmpd="sng" algn="ctr">
+                      <a:solidFill>
+                        <a:srgbClr val="E6E6E6"/>
+                      </a:solidFill>
+                      <a:prstDash val="solid"/>
+                      <a:round/>
+                      <a:headEnd type="none" w="med" len="med"/>
+                      <a:tailEnd type="none" w="med" len="med"/>
+                    </a:lnB>
+                    <a:solidFill>
+                      <a:srgbClr val="F5F5F5"/>
+                    </a:solidFill>
+                  </a:tcPr>
+                </a:tc>
+                <a:tc>
+                  <a:txBody>
+                    <a:bodyPr/>
+                    <a:lstStyle/>
+                    <a:p>
+                      <a:r>
+                        <a:rPr lang="en-US" sz="1800">
+                          <a:effectLst/>
+                        </a:rPr>
+                        <a:t>factor</a:t>
+                      </a:r>
+                    </a:p>
+                  </a:txBody>
+                  <a:tcPr marL="91426" marR="91426" marT="45713" marB="45713" anchor="ctr">
+                    <a:lnL w="9525" cap="flat" cmpd="sng" algn="ctr">
+                      <a:solidFill>
+                        <a:srgbClr val="E6E6E6"/>
+                      </a:solidFill>
+                      <a:prstDash val="solid"/>
+                      <a:round/>
+                      <a:headEnd type="none" w="med" len="med"/>
+                      <a:tailEnd type="none" w="med" len="med"/>
+                    </a:lnL>
+                    <a:lnR w="9525" cap="flat" cmpd="sng" algn="ctr">
+                      <a:solidFill>
+                        <a:srgbClr val="E6E6E6"/>
+                      </a:solidFill>
+                      <a:prstDash val="solid"/>
+                      <a:round/>
+                      <a:headEnd type="none" w="med" len="med"/>
+                      <a:tailEnd type="none" w="med" len="med"/>
+                    </a:lnR>
+                    <a:lnT w="9525" cap="flat" cmpd="sng" algn="ctr">
+                      <a:solidFill>
+                        <a:srgbClr val="E6E6E6"/>
+                      </a:solidFill>
+                      <a:prstDash val="solid"/>
+                      <a:round/>
+                      <a:headEnd type="none" w="med" len="med"/>
+                      <a:tailEnd type="none" w="med" len="med"/>
+                    </a:lnT>
+                    <a:lnB w="9525" cap="flat" cmpd="sng" algn="ctr">
+                      <a:solidFill>
+                        <a:srgbClr val="E6E6E6"/>
+                      </a:solidFill>
+                      <a:prstDash val="solid"/>
+                      <a:round/>
+                      <a:headEnd type="none" w="med" len="med"/>
+                      <a:tailEnd type="none" w="med" len="med"/>
+                    </a:lnB>
+                    <a:solidFill>
+                      <a:srgbClr val="F5F5F5"/>
+                    </a:solidFill>
+                  </a:tcPr>
+                </a:tc>
+                <a:extLst>
+                  <a:ext uri="{0D108BD9-81ED-4DB2-BD59-A6C34878D82A}">
+                    <a16:rowId xmlns:a16="http://schemas.microsoft.com/office/drawing/2014/main" val="1976669342"/>
+                  </a:ext>
+                </a:extLst>
+              </a:tr>
+              <a:tr h="375624">
+                <a:tc>
+                  <a:txBody>
+                    <a:bodyPr/>
+                    <a:lstStyle/>
+                    <a:p>
+                      <a:r>
+                        <a:rPr lang="en-US" sz="1800">
+                          <a:effectLst/>
+                        </a:rPr>
+                        <a:t>date</a:t>
+                      </a:r>
+                    </a:p>
+                  </a:txBody>
+                  <a:tcPr marL="91426" marR="91426" marT="45713" marB="45713" anchor="ctr">
+                    <a:lnL w="9525" cap="flat" cmpd="sng" algn="ctr">
+                      <a:solidFill>
+                        <a:srgbClr val="E6E6E6"/>
+                      </a:solidFill>
+                      <a:prstDash val="solid"/>
+                      <a:round/>
+                      <a:headEnd type="none" w="med" len="med"/>
+                      <a:tailEnd type="none" w="med" len="med"/>
+                    </a:lnL>
+                    <a:lnR w="9525" cap="flat" cmpd="sng" algn="ctr">
+                      <a:solidFill>
+                        <a:srgbClr val="E6E6E6"/>
+                      </a:solidFill>
+                      <a:prstDash val="solid"/>
+                      <a:round/>
+                      <a:headEnd type="none" w="med" len="med"/>
+                      <a:tailEnd type="none" w="med" len="med"/>
+                    </a:lnR>
+                    <a:lnT w="9525" cap="flat" cmpd="sng" algn="ctr">
+                      <a:solidFill>
+                        <a:srgbClr val="E6E6E6"/>
+                      </a:solidFill>
+                      <a:prstDash val="solid"/>
+                      <a:round/>
+                      <a:headEnd type="none" w="med" len="med"/>
+                      <a:tailEnd type="none" w="med" len="med"/>
+                    </a:lnT>
+                    <a:lnB w="9525" cap="flat" cmpd="sng" algn="ctr">
+                      <a:solidFill>
+                        <a:srgbClr val="E6E6E6"/>
+                      </a:solidFill>
+                      <a:prstDash val="solid"/>
+                      <a:round/>
+                      <a:headEnd type="none" w="med" len="med"/>
+                      <a:tailEnd type="none" w="med" len="med"/>
+                    </a:lnB>
+                    <a:solidFill>
+                      <a:srgbClr val="F5F5F5"/>
+                    </a:solidFill>
+                  </a:tcPr>
+                </a:tc>
+                <a:tc>
+                  <a:txBody>
+                    <a:bodyPr/>
+                    <a:lstStyle/>
+                    <a:p>
+                      <a:r>
+                        <a:rPr lang="en-US" sz="1800">
+                          <a:effectLst/>
+                        </a:rPr>
+                        <a:t>Date</a:t>
+                      </a:r>
+                    </a:p>
+                  </a:txBody>
+                  <a:tcPr marL="91426" marR="91426" marT="45713" marB="45713" anchor="ctr">
+                    <a:lnL w="9525" cap="flat" cmpd="sng" algn="ctr">
+                      <a:solidFill>
+                        <a:srgbClr val="E6E6E6"/>
+                      </a:solidFill>
+                      <a:prstDash val="solid"/>
+                      <a:round/>
+                      <a:headEnd type="none" w="med" len="med"/>
+                      <a:tailEnd type="none" w="med" len="med"/>
+                    </a:lnL>
+                    <a:lnR w="9525" cap="flat" cmpd="sng" algn="ctr">
+                      <a:solidFill>
+                        <a:srgbClr val="E6E6E6"/>
+                      </a:solidFill>
+                      <a:prstDash val="solid"/>
+                      <a:round/>
+                      <a:headEnd type="none" w="med" len="med"/>
+                      <a:tailEnd type="none" w="med" len="med"/>
+                    </a:lnR>
+                    <a:lnT w="9525" cap="flat" cmpd="sng" algn="ctr">
+                      <a:solidFill>
+                        <a:srgbClr val="E6E6E6"/>
+                      </a:solidFill>
+                      <a:prstDash val="solid"/>
+                      <a:round/>
+                      <a:headEnd type="none" w="med" len="med"/>
+                      <a:tailEnd type="none" w="med" len="med"/>
+                    </a:lnT>
+                    <a:lnB w="9525" cap="flat" cmpd="sng" algn="ctr">
+                      <a:solidFill>
+                        <a:srgbClr val="E6E6E6"/>
+                      </a:solidFill>
+                      <a:prstDash val="solid"/>
+                      <a:round/>
+                      <a:headEnd type="none" w="med" len="med"/>
+                      <a:tailEnd type="none" w="med" len="med"/>
+                    </a:lnB>
+                    <a:solidFill>
+                      <a:srgbClr val="F5F5F5"/>
+                    </a:solidFill>
+                  </a:tcPr>
+                </a:tc>
+                <a:extLst>
+                  <a:ext uri="{0D108BD9-81ED-4DB2-BD59-A6C34878D82A}">
+                    <a16:rowId xmlns:a16="http://schemas.microsoft.com/office/drawing/2014/main" val="920887926"/>
+                  </a:ext>
+                </a:extLst>
+              </a:tr>
+              <a:tr h="375624">
+                <a:tc>
+                  <a:txBody>
+                    <a:bodyPr/>
+                    <a:lstStyle/>
+                    <a:p>
+                      <a:r>
+                        <a:rPr lang="en-US" sz="1800">
+                          <a:effectLst/>
+                        </a:rPr>
+                        <a:t>dttm</a:t>
+                      </a:r>
+                    </a:p>
+                  </a:txBody>
+                  <a:tcPr marL="91426" marR="91426" marT="45713" marB="45713" anchor="ctr">
+                    <a:lnL w="9525" cap="flat" cmpd="sng" algn="ctr">
+                      <a:solidFill>
+                        <a:srgbClr val="E6E6E6"/>
+                      </a:solidFill>
+                      <a:prstDash val="solid"/>
+                      <a:round/>
+                      <a:headEnd type="none" w="med" len="med"/>
+                      <a:tailEnd type="none" w="med" len="med"/>
+                    </a:lnL>
+                    <a:lnR w="9525" cap="flat" cmpd="sng" algn="ctr">
+                      <a:solidFill>
+                        <a:srgbClr val="E6E6E6"/>
+                      </a:solidFill>
+                      <a:prstDash val="solid"/>
+                      <a:round/>
+                      <a:headEnd type="none" w="med" len="med"/>
+                      <a:tailEnd type="none" w="med" len="med"/>
+                    </a:lnR>
+                    <a:lnT w="9525" cap="flat" cmpd="sng" algn="ctr">
+                      <a:solidFill>
+                        <a:srgbClr val="E6E6E6"/>
+                      </a:solidFill>
+                      <a:prstDash val="solid"/>
+                      <a:round/>
+                      <a:headEnd type="none" w="med" len="med"/>
+                      <a:tailEnd type="none" w="med" len="med"/>
+                    </a:lnT>
+                    <a:lnB w="9525" cap="flat" cmpd="sng" algn="ctr">
+                      <a:solidFill>
+                        <a:srgbClr val="E6E6E6"/>
+                      </a:solidFill>
+                      <a:prstDash val="solid"/>
+                      <a:round/>
+                      <a:headEnd type="none" w="med" len="med"/>
+                      <a:tailEnd type="none" w="med" len="med"/>
+                    </a:lnB>
+                    <a:solidFill>
+                      <a:srgbClr val="F5F5F5"/>
+                    </a:solidFill>
+                  </a:tcPr>
+                </a:tc>
+                <a:tc>
+                  <a:txBody>
+                    <a:bodyPr/>
+                    <a:lstStyle/>
+                    <a:p>
+                      <a:r>
+                        <a:rPr lang="en-US" sz="1800">
+                          <a:effectLst/>
+                        </a:rPr>
+                        <a:t>date-time (POSIXct)</a:t>
+                      </a:r>
+                    </a:p>
+                  </a:txBody>
+                  <a:tcPr marL="91426" marR="91426" marT="45713" marB="45713" anchor="ctr">
+                    <a:lnL w="9525" cap="flat" cmpd="sng" algn="ctr">
+                      <a:solidFill>
+                        <a:srgbClr val="E6E6E6"/>
+                      </a:solidFill>
+                      <a:prstDash val="solid"/>
+                      <a:round/>
+                      <a:headEnd type="none" w="med" len="med"/>
+                      <a:tailEnd type="none" w="med" len="med"/>
+                    </a:lnL>
+                    <a:lnR w="9525" cap="flat" cmpd="sng" algn="ctr">
+                      <a:solidFill>
+                        <a:srgbClr val="E6E6E6"/>
+                      </a:solidFill>
+                      <a:prstDash val="solid"/>
+                      <a:round/>
+                      <a:headEnd type="none" w="med" len="med"/>
+                      <a:tailEnd type="none" w="med" len="med"/>
+                    </a:lnR>
+                    <a:lnT w="9525" cap="flat" cmpd="sng" algn="ctr">
+                      <a:solidFill>
+                        <a:srgbClr val="E6E6E6"/>
+                      </a:solidFill>
+                      <a:prstDash val="solid"/>
+                      <a:round/>
+                      <a:headEnd type="none" w="med" len="med"/>
+                      <a:tailEnd type="none" w="med" len="med"/>
+                    </a:lnT>
+                    <a:lnB w="9525" cap="flat" cmpd="sng" algn="ctr">
+                      <a:solidFill>
+                        <a:srgbClr val="E6E6E6"/>
+                      </a:solidFill>
+                      <a:prstDash val="solid"/>
+                      <a:round/>
+                      <a:headEnd type="none" w="med" len="med"/>
+                      <a:tailEnd type="none" w="med" len="med"/>
+                    </a:lnB>
+                    <a:solidFill>
+                      <a:srgbClr val="F5F5F5"/>
+                    </a:solidFill>
+                  </a:tcPr>
+                </a:tc>
+                <a:extLst>
+                  <a:ext uri="{0D108BD9-81ED-4DB2-BD59-A6C34878D82A}">
+                    <a16:rowId xmlns:a16="http://schemas.microsoft.com/office/drawing/2014/main" val="1815744067"/>
+                  </a:ext>
+                </a:extLst>
+              </a:tr>
+              <a:tr h="375624">
+                <a:tc>
+                  <a:txBody>
+                    <a:bodyPr/>
+                    <a:lstStyle/>
+                    <a:p>
+                      <a:r>
+                        <a:rPr lang="en-US" sz="1800">
+                          <a:effectLst/>
+                        </a:rPr>
+                        <a:t>time</a:t>
+                      </a:r>
+                    </a:p>
+                  </a:txBody>
+                  <a:tcPr marL="91426" marR="91426" marT="45713" marB="45713" anchor="ctr">
+                    <a:lnL w="9525" cap="flat" cmpd="sng" algn="ctr">
+                      <a:solidFill>
+                        <a:srgbClr val="E6E6E6"/>
+                      </a:solidFill>
+                      <a:prstDash val="solid"/>
+                      <a:round/>
+                      <a:headEnd type="none" w="med" len="med"/>
+                      <a:tailEnd type="none" w="med" len="med"/>
+                    </a:lnL>
+                    <a:lnR w="9525" cap="flat" cmpd="sng" algn="ctr">
+                      <a:solidFill>
+                        <a:srgbClr val="E6E6E6"/>
+                      </a:solidFill>
+                      <a:prstDash val="solid"/>
+                      <a:round/>
+                      <a:headEnd type="none" w="med" len="med"/>
+                      <a:tailEnd type="none" w="med" len="med"/>
+                    </a:lnR>
+                    <a:lnT w="9525" cap="flat" cmpd="sng" algn="ctr">
+                      <a:solidFill>
+                        <a:srgbClr val="E6E6E6"/>
+                      </a:solidFill>
+                      <a:prstDash val="solid"/>
+                      <a:round/>
+                      <a:headEnd type="none" w="med" len="med"/>
+                      <a:tailEnd type="none" w="med" len="med"/>
+                    </a:lnT>
+                    <a:lnB w="9525" cap="flat" cmpd="sng" algn="ctr">
+                      <a:solidFill>
+                        <a:srgbClr val="E6E6E6"/>
+                      </a:solidFill>
+                      <a:prstDash val="solid"/>
+                      <a:round/>
+                      <a:headEnd type="none" w="med" len="med"/>
+                      <a:tailEnd type="none" w="med" len="med"/>
+                    </a:lnB>
+                    <a:solidFill>
+                      <a:srgbClr val="F5F5F5"/>
+                    </a:solidFill>
+                  </a:tcPr>
+                </a:tc>
+                <a:tc>
+                  <a:txBody>
+                    <a:bodyPr/>
+                    <a:lstStyle/>
+                    <a:p>
+                      <a:r>
+                        <a:rPr lang="en-US" sz="1800">
+                          <a:effectLst/>
+                        </a:rPr>
+                        <a:t>time (hms)</a:t>
+                      </a:r>
+                    </a:p>
+                  </a:txBody>
+                  <a:tcPr marL="91426" marR="91426" marT="45713" marB="45713" anchor="ctr">
+                    <a:lnL w="9525" cap="flat" cmpd="sng" algn="ctr">
+                      <a:solidFill>
+                        <a:srgbClr val="E6E6E6"/>
+                      </a:solidFill>
+                      <a:prstDash val="solid"/>
+                      <a:round/>
+                      <a:headEnd type="none" w="med" len="med"/>
+                      <a:tailEnd type="none" w="med" len="med"/>
+                    </a:lnL>
+                    <a:lnR w="9525" cap="flat" cmpd="sng" algn="ctr">
+                      <a:solidFill>
+                        <a:srgbClr val="E6E6E6"/>
+                      </a:solidFill>
+                      <a:prstDash val="solid"/>
+                      <a:round/>
+                      <a:headEnd type="none" w="med" len="med"/>
+                      <a:tailEnd type="none" w="med" len="med"/>
+                    </a:lnR>
+                    <a:lnT w="9525" cap="flat" cmpd="sng" algn="ctr">
+                      <a:solidFill>
+                        <a:srgbClr val="E6E6E6"/>
+                      </a:solidFill>
+                      <a:prstDash val="solid"/>
+                      <a:round/>
+                      <a:headEnd type="none" w="med" len="med"/>
+                      <a:tailEnd type="none" w="med" len="med"/>
+                    </a:lnT>
+                    <a:lnB w="9525" cap="flat" cmpd="sng" algn="ctr">
+                      <a:solidFill>
+                        <a:srgbClr val="E6E6E6"/>
+                      </a:solidFill>
+                      <a:prstDash val="solid"/>
+                      <a:round/>
+                      <a:headEnd type="none" w="med" len="med"/>
+                      <a:tailEnd type="none" w="med" len="med"/>
+                    </a:lnB>
+                    <a:solidFill>
+                      <a:srgbClr val="F5F5F5"/>
+                    </a:solidFill>
+                  </a:tcPr>
+                </a:tc>
+                <a:extLst>
+                  <a:ext uri="{0D108BD9-81ED-4DB2-BD59-A6C34878D82A}">
+                    <a16:rowId xmlns:a16="http://schemas.microsoft.com/office/drawing/2014/main" val="3203420464"/>
+                  </a:ext>
+                </a:extLst>
+              </a:tr>
+              <a:tr h="375624">
+                <a:tc>
+                  <a:txBody>
+                    <a:bodyPr/>
+                    <a:lstStyle/>
+                    <a:p>
+                      <a:r>
+                        <a:rPr lang="en-US" sz="1800">
+                          <a:effectLst/>
+                        </a:rPr>
+                        <a:t>list</a:t>
+                      </a:r>
+                    </a:p>
+                  </a:txBody>
+                  <a:tcPr marL="91426" marR="91426" marT="45713" marB="45713" anchor="ctr">
+                    <a:lnL w="9525" cap="flat" cmpd="sng" algn="ctr">
+                      <a:solidFill>
+                        <a:srgbClr val="E6E6E6"/>
+                      </a:solidFill>
+                      <a:prstDash val="solid"/>
+                      <a:round/>
+                      <a:headEnd type="none" w="med" len="med"/>
+                      <a:tailEnd type="none" w="med" len="med"/>
+                    </a:lnL>
+                    <a:lnR w="9525" cap="flat" cmpd="sng" algn="ctr">
+                      <a:solidFill>
+                        <a:srgbClr val="E6E6E6"/>
+                      </a:solidFill>
+                      <a:prstDash val="solid"/>
+                      <a:round/>
+                      <a:headEnd type="none" w="med" len="med"/>
+                      <a:tailEnd type="none" w="med" len="med"/>
+                    </a:lnR>
+                    <a:lnT w="9525" cap="flat" cmpd="sng" algn="ctr">
+                      <a:solidFill>
+                        <a:srgbClr val="E6E6E6"/>
+                      </a:solidFill>
+                      <a:prstDash val="solid"/>
+                      <a:round/>
+                      <a:headEnd type="none" w="med" len="med"/>
+                      <a:tailEnd type="none" w="med" len="med"/>
+                    </a:lnT>
+                    <a:lnB w="9525" cap="flat" cmpd="sng" algn="ctr">
+                      <a:solidFill>
+                        <a:srgbClr val="E6E6E6"/>
+                      </a:solidFill>
+                      <a:prstDash val="solid"/>
+                      <a:round/>
+                      <a:headEnd type="none" w="med" len="med"/>
+                      <a:tailEnd type="none" w="med" len="med"/>
+                    </a:lnB>
+                    <a:solidFill>
+                      <a:srgbClr val="F5F5F5"/>
+                    </a:solidFill>
+                  </a:tcPr>
+                </a:tc>
+                <a:tc>
+                  <a:txBody>
+                    <a:bodyPr/>
+                    <a:lstStyle/>
+                    <a:p>
+                      <a:r>
+                        <a:rPr lang="en-US" sz="1800" dirty="0">
+                          <a:effectLst/>
+                        </a:rPr>
+                        <a:t>list column</a:t>
+                      </a:r>
+                    </a:p>
+                  </a:txBody>
+                  <a:tcPr marL="91426" marR="91426" marT="45713" marB="45713" anchor="ctr">
+                    <a:lnL w="9525" cap="flat" cmpd="sng" algn="ctr">
+                      <a:solidFill>
+                        <a:srgbClr val="E6E6E6"/>
+                      </a:solidFill>
+                      <a:prstDash val="solid"/>
+                      <a:round/>
+                      <a:headEnd type="none" w="med" len="med"/>
+                      <a:tailEnd type="none" w="med" len="med"/>
+                    </a:lnL>
+                    <a:lnR w="9525" cap="flat" cmpd="sng" algn="ctr">
+                      <a:solidFill>
+                        <a:srgbClr val="E6E6E6"/>
+                      </a:solidFill>
+                      <a:prstDash val="solid"/>
+                      <a:round/>
+                      <a:headEnd type="none" w="med" len="med"/>
+                      <a:tailEnd type="none" w="med" len="med"/>
+                    </a:lnR>
+                    <a:lnT w="9525" cap="flat" cmpd="sng" algn="ctr">
+                      <a:solidFill>
+                        <a:srgbClr val="E6E6E6"/>
+                      </a:solidFill>
+                      <a:prstDash val="solid"/>
+                      <a:round/>
+                      <a:headEnd type="none" w="med" len="med"/>
+                      <a:tailEnd type="none" w="med" len="med"/>
+                    </a:lnT>
+                    <a:lnB w="9525" cap="flat" cmpd="sng" algn="ctr">
+                      <a:solidFill>
+                        <a:srgbClr val="E6E6E6"/>
+                      </a:solidFill>
+                      <a:prstDash val="solid"/>
+                      <a:round/>
+                      <a:headEnd type="none" w="med" len="med"/>
+                      <a:tailEnd type="none" w="med" len="med"/>
+                    </a:lnB>
+                    <a:solidFill>
+                      <a:srgbClr val="F5F5F5"/>
+                    </a:solidFill>
+                  </a:tcPr>
+                </a:tc>
+                <a:extLst>
+                  <a:ext uri="{0D108BD9-81ED-4DB2-BD59-A6C34878D82A}">
+                    <a16:rowId xmlns:a16="http://schemas.microsoft.com/office/drawing/2014/main" val="2125329324"/>
+                  </a:ext>
+                </a:extLst>
+              </a:tr>
+            </a:tbl>
+          </a:graphicData>
+        </a:graphic>
+      </p:graphicFrame>
     </p:spTree>
     <p:extLst>
       <p:ext uri="{BB962C8B-B14F-4D97-AF65-F5344CB8AC3E}">
-        <p14:creationId xmlns:p14="http://schemas.microsoft.com/office/powerpoint/2010/main" val="4214687492"/>
+        <p14:creationId xmlns:p14="http://schemas.microsoft.com/office/powerpoint/2010/main" val="645395094"/>
       </p:ext>
     </p:extLst>
   </p:cSld>
@@ -6044,7 +9245,7 @@
           <p:cNvPr id="2" name="Title 1">
             <a:extLst>
               <a:ext uri="{FF2B5EF4-FFF2-40B4-BE49-F238E27FC236}">
-                <a16:creationId xmlns:a16="http://schemas.microsoft.com/office/drawing/2014/main" id="{BE4F21E7-0761-5E83-3AFC-62D75AF2BC58}"/>
+                <a16:creationId xmlns:a16="http://schemas.microsoft.com/office/drawing/2014/main" id="{33032254-4A0C-5998-C72F-381AF98A5312}"/>
               </a:ext>
             </a:extLst>
           </p:cNvPr>
@@ -6062,7 +9263,15 @@
           <a:p>
             <a:r>
               <a:rPr lang="en-US" dirty="0"/>
-              <a:t>Libraries we’ll use today</a:t>
+              <a:t>R variable types </a:t>
+            </a:r>
+            <a:r>
+              <a:rPr lang="en-US" dirty="0" err="1"/>
+              <a:t>pt</a:t>
+            </a:r>
+            <a:r>
+              <a:rPr lang="en-US" dirty="0"/>
+              <a:t> 2</a:t>
             </a:r>
           </a:p>
         </p:txBody>
@@ -6072,7 +9281,7 @@
           <p:cNvPr id="3" name="Content Placeholder 2">
             <a:extLst>
               <a:ext uri="{FF2B5EF4-FFF2-40B4-BE49-F238E27FC236}">
-                <a16:creationId xmlns:a16="http://schemas.microsoft.com/office/drawing/2014/main" id="{B0565CB8-4168-884D-BDA2-B4008455DC8C}"/>
+                <a16:creationId xmlns:a16="http://schemas.microsoft.com/office/drawing/2014/main" id="{50120EED-E368-D3A5-6DC2-EECF90CC1E9A}"/>
               </a:ext>
             </a:extLst>
           </p:cNvPr>
@@ -6083,76 +9292,2074 @@
             <p:ph idx="1"/>
           </p:nvPr>
         </p:nvSpPr>
-        <p:spPr/>
-        <p:txBody>
-          <a:bodyPr/>
+        <p:spPr>
+          <a:xfrm>
+            <a:off x="1229360" y="1845734"/>
+            <a:ext cx="5090161" cy="4023360"/>
+          </a:xfrm>
+        </p:spPr>
+        <p:txBody>
+          <a:bodyPr>
+            <a:normAutofit/>
+          </a:bodyPr>
           <a:lstStyle/>
           <a:p>
-            <a:r>
-              <a:rPr lang="en-US" dirty="0" err="1"/>
-              <a:t>daymetr</a:t>
-            </a:r>
-            <a:r>
-              <a:rPr lang="en-US" dirty="0"/>
-              <a:t>: used to download and work with </a:t>
-            </a:r>
-            <a:r>
-              <a:rPr lang="en-US" dirty="0" err="1"/>
-              <a:t>Daymet</a:t>
-            </a:r>
-            <a:r>
-              <a:rPr lang="en-US" dirty="0"/>
-              <a:t> data</a:t>
-            </a:r>
-          </a:p>
-          <a:p>
-            <a:r>
-              <a:rPr lang="en-US" dirty="0"/>
-              <a:t>sf: ‘simple features’ used for reading and working with spatial data</a:t>
-            </a:r>
-          </a:p>
-          <a:p>
-            <a:r>
-              <a:rPr lang="en-US" dirty="0" err="1"/>
-              <a:t>tmap</a:t>
-            </a:r>
-            <a:r>
-              <a:rPr lang="en-US" dirty="0"/>
-              <a:t>: used for mapping of spatial data</a:t>
-            </a:r>
-          </a:p>
-          <a:p>
-            <a:r>
-              <a:rPr lang="en-US" dirty="0" err="1"/>
-              <a:t>tidycensus</a:t>
-            </a:r>
-            <a:r>
-              <a:rPr lang="en-US" dirty="0"/>
-              <a:t>: working with US census data</a:t>
-            </a:r>
-          </a:p>
-          <a:p>
-            <a:pPr lvl="1"/>
-            <a:r>
-              <a:rPr lang="en-US" dirty="0" err="1"/>
-              <a:t>load_variables</a:t>
-            </a:r>
-            <a:endParaRPr lang="en-US" dirty="0"/>
-          </a:p>
-          <a:p>
-            <a:pPr lvl="1"/>
-            <a:r>
-              <a:rPr lang="en-US" dirty="0" err="1"/>
-              <a:t>get_acs</a:t>
-            </a:r>
-            <a:endParaRPr lang="en-US" dirty="0"/>
+            <a:pPr marL="0" indent="0">
+              <a:buNone/>
+            </a:pPr>
+            <a:r>
+              <a:rPr lang="en-US" sz="3200" dirty="0"/>
+              <a:t>For these variables, how do you think R would read them?</a:t>
+            </a:r>
+          </a:p>
+        </p:txBody>
+      </p:sp>
+      <p:graphicFrame>
+        <p:nvGraphicFramePr>
+          <p:cNvPr id="4" name="Table 3">
+            <a:extLst>
+              <a:ext uri="{FF2B5EF4-FFF2-40B4-BE49-F238E27FC236}">
+                <a16:creationId xmlns:a16="http://schemas.microsoft.com/office/drawing/2014/main" id="{4419C1CA-2073-4E1A-AD04-5F045C7181C5}"/>
+              </a:ext>
+            </a:extLst>
+          </p:cNvPr>
+          <p:cNvGraphicFramePr>
+            <a:graphicFrameLocks noGrp="1"/>
+          </p:cNvGraphicFramePr>
+          <p:nvPr/>
+        </p:nvGraphicFramePr>
+        <p:xfrm>
+          <a:off x="6705600" y="2384214"/>
+          <a:ext cx="5222241" cy="3756240"/>
+        </p:xfrm>
+        <a:graphic>
+          <a:graphicData uri="http://schemas.openxmlformats.org/drawingml/2006/table">
+            <a:tbl>
+              <a:tblPr/>
+              <a:tblGrid>
+                <a:gridCol w="1595121">
+                  <a:extLst>
+                    <a:ext uri="{9D8B030D-6E8A-4147-A177-3AD203B41FA5}">
+                      <a16:colId xmlns:a16="http://schemas.microsoft.com/office/drawing/2014/main" val="2559440208"/>
+                    </a:ext>
+                  </a:extLst>
+                </a:gridCol>
+                <a:gridCol w="3627120">
+                  <a:extLst>
+                    <a:ext uri="{9D8B030D-6E8A-4147-A177-3AD203B41FA5}">
+                      <a16:colId xmlns:a16="http://schemas.microsoft.com/office/drawing/2014/main" val="1681699256"/>
+                    </a:ext>
+                  </a:extLst>
+                </a:gridCol>
+              </a:tblGrid>
+              <a:tr h="375624">
+                <a:tc>
+                  <a:txBody>
+                    <a:bodyPr/>
+                    <a:lstStyle/>
+                    <a:p>
+                      <a:r>
+                        <a:rPr lang="en-US" sz="1800" b="1">
+                          <a:effectLst/>
+                        </a:rPr>
+                        <a:t>Abbreviation</a:t>
+                      </a:r>
+                    </a:p>
+                  </a:txBody>
+                  <a:tcPr marL="91426" marR="91426" marT="45713" marB="45713" anchor="ctr">
+                    <a:lnL w="9525" cap="flat" cmpd="sng" algn="ctr">
+                      <a:solidFill>
+                        <a:srgbClr val="E6E6E6"/>
+                      </a:solidFill>
+                      <a:prstDash val="solid"/>
+                      <a:round/>
+                      <a:headEnd type="none" w="med" len="med"/>
+                      <a:tailEnd type="none" w="med" len="med"/>
+                    </a:lnL>
+                    <a:lnR w="9525" cap="flat" cmpd="sng" algn="ctr">
+                      <a:solidFill>
+                        <a:srgbClr val="E6E6E6"/>
+                      </a:solidFill>
+                      <a:prstDash val="solid"/>
+                      <a:round/>
+                      <a:headEnd type="none" w="med" len="med"/>
+                      <a:tailEnd type="none" w="med" len="med"/>
+                    </a:lnR>
+                    <a:lnT w="9525" cap="flat" cmpd="sng" algn="ctr">
+                      <a:solidFill>
+                        <a:srgbClr val="E6E6E6"/>
+                      </a:solidFill>
+                      <a:prstDash val="solid"/>
+                      <a:round/>
+                      <a:headEnd type="none" w="med" len="med"/>
+                      <a:tailEnd type="none" w="med" len="med"/>
+                    </a:lnT>
+                    <a:lnB w="9525" cap="flat" cmpd="sng" algn="ctr">
+                      <a:solidFill>
+                        <a:srgbClr val="E6E6E6"/>
+                      </a:solidFill>
+                      <a:prstDash val="solid"/>
+                      <a:round/>
+                      <a:headEnd type="none" w="med" len="med"/>
+                      <a:tailEnd type="none" w="med" len="med"/>
+                    </a:lnB>
+                    <a:solidFill>
+                      <a:srgbClr val="F5F5F5"/>
+                    </a:solidFill>
+                  </a:tcPr>
+                </a:tc>
+                <a:tc>
+                  <a:txBody>
+                    <a:bodyPr/>
+                    <a:lstStyle/>
+                    <a:p>
+                      <a:r>
+                        <a:rPr lang="en-US" sz="1800" b="1" dirty="0">
+                          <a:effectLst/>
+                        </a:rPr>
+                        <a:t>Type</a:t>
+                      </a:r>
+                    </a:p>
+                  </a:txBody>
+                  <a:tcPr marL="91426" marR="91426" marT="45713" marB="45713" anchor="ctr">
+                    <a:lnL w="9525" cap="flat" cmpd="sng" algn="ctr">
+                      <a:solidFill>
+                        <a:srgbClr val="E6E6E6"/>
+                      </a:solidFill>
+                      <a:prstDash val="solid"/>
+                      <a:round/>
+                      <a:headEnd type="none" w="med" len="med"/>
+                      <a:tailEnd type="none" w="med" len="med"/>
+                    </a:lnL>
+                    <a:lnR w="9525" cap="flat" cmpd="sng" algn="ctr">
+                      <a:solidFill>
+                        <a:srgbClr val="E6E6E6"/>
+                      </a:solidFill>
+                      <a:prstDash val="solid"/>
+                      <a:round/>
+                      <a:headEnd type="none" w="med" len="med"/>
+                      <a:tailEnd type="none" w="med" len="med"/>
+                    </a:lnR>
+                    <a:lnT w="9525" cap="flat" cmpd="sng" algn="ctr">
+                      <a:solidFill>
+                        <a:srgbClr val="E6E6E6"/>
+                      </a:solidFill>
+                      <a:prstDash val="solid"/>
+                      <a:round/>
+                      <a:headEnd type="none" w="med" len="med"/>
+                      <a:tailEnd type="none" w="med" len="med"/>
+                    </a:lnT>
+                    <a:lnB w="9525" cap="flat" cmpd="sng" algn="ctr">
+                      <a:solidFill>
+                        <a:srgbClr val="E6E6E6"/>
+                      </a:solidFill>
+                      <a:prstDash val="solid"/>
+                      <a:round/>
+                      <a:headEnd type="none" w="med" len="med"/>
+                      <a:tailEnd type="none" w="med" len="med"/>
+                    </a:lnB>
+                    <a:solidFill>
+                      <a:srgbClr val="F5F5F5"/>
+                    </a:solidFill>
+                  </a:tcPr>
+                </a:tc>
+                <a:extLst>
+                  <a:ext uri="{0D108BD9-81ED-4DB2-BD59-A6C34878D82A}">
+                    <a16:rowId xmlns:a16="http://schemas.microsoft.com/office/drawing/2014/main" val="4232125653"/>
+                  </a:ext>
+                </a:extLst>
+              </a:tr>
+              <a:tr h="375624">
+                <a:tc>
+                  <a:txBody>
+                    <a:bodyPr/>
+                    <a:lstStyle/>
+                    <a:p>
+                      <a:r>
+                        <a:rPr lang="en-US" sz="1800">
+                          <a:effectLst/>
+                        </a:rPr>
+                        <a:t>chr</a:t>
+                      </a:r>
+                    </a:p>
+                  </a:txBody>
+                  <a:tcPr marL="91426" marR="91426" marT="45713" marB="45713" anchor="ctr">
+                    <a:lnL w="9525" cap="flat" cmpd="sng" algn="ctr">
+                      <a:solidFill>
+                        <a:srgbClr val="E6E6E6"/>
+                      </a:solidFill>
+                      <a:prstDash val="solid"/>
+                      <a:round/>
+                      <a:headEnd type="none" w="med" len="med"/>
+                      <a:tailEnd type="none" w="med" len="med"/>
+                    </a:lnL>
+                    <a:lnR w="9525" cap="flat" cmpd="sng" algn="ctr">
+                      <a:solidFill>
+                        <a:srgbClr val="E6E6E6"/>
+                      </a:solidFill>
+                      <a:prstDash val="solid"/>
+                      <a:round/>
+                      <a:headEnd type="none" w="med" len="med"/>
+                      <a:tailEnd type="none" w="med" len="med"/>
+                    </a:lnR>
+                    <a:lnT w="9525" cap="flat" cmpd="sng" algn="ctr">
+                      <a:solidFill>
+                        <a:srgbClr val="E6E6E6"/>
+                      </a:solidFill>
+                      <a:prstDash val="solid"/>
+                      <a:round/>
+                      <a:headEnd type="none" w="med" len="med"/>
+                      <a:tailEnd type="none" w="med" len="med"/>
+                    </a:lnT>
+                    <a:lnB w="9525" cap="flat" cmpd="sng" algn="ctr">
+                      <a:solidFill>
+                        <a:srgbClr val="E6E6E6"/>
+                      </a:solidFill>
+                      <a:prstDash val="solid"/>
+                      <a:round/>
+                      <a:headEnd type="none" w="med" len="med"/>
+                      <a:tailEnd type="none" w="med" len="med"/>
+                    </a:lnB>
+                    <a:solidFill>
+                      <a:srgbClr val="F5F5F5"/>
+                    </a:solidFill>
+                  </a:tcPr>
+                </a:tc>
+                <a:tc>
+                  <a:txBody>
+                    <a:bodyPr/>
+                    <a:lstStyle/>
+                    <a:p>
+                      <a:r>
+                        <a:rPr lang="en-US" sz="1800">
+                          <a:effectLst/>
+                        </a:rPr>
+                        <a:t>character</a:t>
+                      </a:r>
+                    </a:p>
+                  </a:txBody>
+                  <a:tcPr marL="91426" marR="91426" marT="45713" marB="45713" anchor="ctr">
+                    <a:lnL w="9525" cap="flat" cmpd="sng" algn="ctr">
+                      <a:solidFill>
+                        <a:srgbClr val="E6E6E6"/>
+                      </a:solidFill>
+                      <a:prstDash val="solid"/>
+                      <a:round/>
+                      <a:headEnd type="none" w="med" len="med"/>
+                      <a:tailEnd type="none" w="med" len="med"/>
+                    </a:lnL>
+                    <a:lnR w="9525" cap="flat" cmpd="sng" algn="ctr">
+                      <a:solidFill>
+                        <a:srgbClr val="E6E6E6"/>
+                      </a:solidFill>
+                      <a:prstDash val="solid"/>
+                      <a:round/>
+                      <a:headEnd type="none" w="med" len="med"/>
+                      <a:tailEnd type="none" w="med" len="med"/>
+                    </a:lnR>
+                    <a:lnT w="9525" cap="flat" cmpd="sng" algn="ctr">
+                      <a:solidFill>
+                        <a:srgbClr val="E6E6E6"/>
+                      </a:solidFill>
+                      <a:prstDash val="solid"/>
+                      <a:round/>
+                      <a:headEnd type="none" w="med" len="med"/>
+                      <a:tailEnd type="none" w="med" len="med"/>
+                    </a:lnT>
+                    <a:lnB w="9525" cap="flat" cmpd="sng" algn="ctr">
+                      <a:solidFill>
+                        <a:srgbClr val="E6E6E6"/>
+                      </a:solidFill>
+                      <a:prstDash val="solid"/>
+                      <a:round/>
+                      <a:headEnd type="none" w="med" len="med"/>
+                      <a:tailEnd type="none" w="med" len="med"/>
+                    </a:lnB>
+                    <a:solidFill>
+                      <a:srgbClr val="F5F5F5"/>
+                    </a:solidFill>
+                  </a:tcPr>
+                </a:tc>
+                <a:extLst>
+                  <a:ext uri="{0D108BD9-81ED-4DB2-BD59-A6C34878D82A}">
+                    <a16:rowId xmlns:a16="http://schemas.microsoft.com/office/drawing/2014/main" val="459710345"/>
+                  </a:ext>
+                </a:extLst>
+              </a:tr>
+              <a:tr h="375624">
+                <a:tc>
+                  <a:txBody>
+                    <a:bodyPr/>
+                    <a:lstStyle/>
+                    <a:p>
+                      <a:r>
+                        <a:rPr lang="en-US" sz="1800" dirty="0">
+                          <a:effectLst/>
+                        </a:rPr>
+                        <a:t>int</a:t>
+                      </a:r>
+                    </a:p>
+                  </a:txBody>
+                  <a:tcPr marL="91426" marR="91426" marT="45713" marB="45713" anchor="ctr">
+                    <a:lnL w="9525" cap="flat" cmpd="sng" algn="ctr">
+                      <a:solidFill>
+                        <a:srgbClr val="E6E6E6"/>
+                      </a:solidFill>
+                      <a:prstDash val="solid"/>
+                      <a:round/>
+                      <a:headEnd type="none" w="med" len="med"/>
+                      <a:tailEnd type="none" w="med" len="med"/>
+                    </a:lnL>
+                    <a:lnR w="9525" cap="flat" cmpd="sng" algn="ctr">
+                      <a:solidFill>
+                        <a:srgbClr val="E6E6E6"/>
+                      </a:solidFill>
+                      <a:prstDash val="solid"/>
+                      <a:round/>
+                      <a:headEnd type="none" w="med" len="med"/>
+                      <a:tailEnd type="none" w="med" len="med"/>
+                    </a:lnR>
+                    <a:lnT w="9525" cap="flat" cmpd="sng" algn="ctr">
+                      <a:solidFill>
+                        <a:srgbClr val="E6E6E6"/>
+                      </a:solidFill>
+                      <a:prstDash val="solid"/>
+                      <a:round/>
+                      <a:headEnd type="none" w="med" len="med"/>
+                      <a:tailEnd type="none" w="med" len="med"/>
+                    </a:lnT>
+                    <a:lnB w="9525" cap="flat" cmpd="sng" algn="ctr">
+                      <a:solidFill>
+                        <a:srgbClr val="E6E6E6"/>
+                      </a:solidFill>
+                      <a:prstDash val="solid"/>
+                      <a:round/>
+                      <a:headEnd type="none" w="med" len="med"/>
+                      <a:tailEnd type="none" w="med" len="med"/>
+                    </a:lnB>
+                    <a:solidFill>
+                      <a:srgbClr val="F5F5F5"/>
+                    </a:solidFill>
+                  </a:tcPr>
+                </a:tc>
+                <a:tc>
+                  <a:txBody>
+                    <a:bodyPr/>
+                    <a:lstStyle/>
+                    <a:p>
+                      <a:r>
+                        <a:rPr lang="en-US" sz="1800">
+                          <a:effectLst/>
+                        </a:rPr>
+                        <a:t>integer</a:t>
+                      </a:r>
+                    </a:p>
+                  </a:txBody>
+                  <a:tcPr marL="91426" marR="91426" marT="45713" marB="45713" anchor="ctr">
+                    <a:lnL w="9525" cap="flat" cmpd="sng" algn="ctr">
+                      <a:solidFill>
+                        <a:srgbClr val="E6E6E6"/>
+                      </a:solidFill>
+                      <a:prstDash val="solid"/>
+                      <a:round/>
+                      <a:headEnd type="none" w="med" len="med"/>
+                      <a:tailEnd type="none" w="med" len="med"/>
+                    </a:lnL>
+                    <a:lnR w="9525" cap="flat" cmpd="sng" algn="ctr">
+                      <a:solidFill>
+                        <a:srgbClr val="E6E6E6"/>
+                      </a:solidFill>
+                      <a:prstDash val="solid"/>
+                      <a:round/>
+                      <a:headEnd type="none" w="med" len="med"/>
+                      <a:tailEnd type="none" w="med" len="med"/>
+                    </a:lnR>
+                    <a:lnT w="9525" cap="flat" cmpd="sng" algn="ctr">
+                      <a:solidFill>
+                        <a:srgbClr val="E6E6E6"/>
+                      </a:solidFill>
+                      <a:prstDash val="solid"/>
+                      <a:round/>
+                      <a:headEnd type="none" w="med" len="med"/>
+                      <a:tailEnd type="none" w="med" len="med"/>
+                    </a:lnT>
+                    <a:lnB w="9525" cap="flat" cmpd="sng" algn="ctr">
+                      <a:solidFill>
+                        <a:srgbClr val="E6E6E6"/>
+                      </a:solidFill>
+                      <a:prstDash val="solid"/>
+                      <a:round/>
+                      <a:headEnd type="none" w="med" len="med"/>
+                      <a:tailEnd type="none" w="med" len="med"/>
+                    </a:lnB>
+                    <a:solidFill>
+                      <a:srgbClr val="F5F5F5"/>
+                    </a:solidFill>
+                  </a:tcPr>
+                </a:tc>
+                <a:extLst>
+                  <a:ext uri="{0D108BD9-81ED-4DB2-BD59-A6C34878D82A}">
+                    <a16:rowId xmlns:a16="http://schemas.microsoft.com/office/drawing/2014/main" val="1356645475"/>
+                  </a:ext>
+                </a:extLst>
+              </a:tr>
+              <a:tr h="375624">
+                <a:tc>
+                  <a:txBody>
+                    <a:bodyPr/>
+                    <a:lstStyle/>
+                    <a:p>
+                      <a:r>
+                        <a:rPr lang="en-US" sz="1800">
+                          <a:effectLst/>
+                        </a:rPr>
+                        <a:t>dbl</a:t>
+                      </a:r>
+                    </a:p>
+                  </a:txBody>
+                  <a:tcPr marL="91426" marR="91426" marT="45713" marB="45713" anchor="ctr">
+                    <a:lnL w="9525" cap="flat" cmpd="sng" algn="ctr">
+                      <a:solidFill>
+                        <a:srgbClr val="E6E6E6"/>
+                      </a:solidFill>
+                      <a:prstDash val="solid"/>
+                      <a:round/>
+                      <a:headEnd type="none" w="med" len="med"/>
+                      <a:tailEnd type="none" w="med" len="med"/>
+                    </a:lnL>
+                    <a:lnR w="9525" cap="flat" cmpd="sng" algn="ctr">
+                      <a:solidFill>
+                        <a:srgbClr val="E6E6E6"/>
+                      </a:solidFill>
+                      <a:prstDash val="solid"/>
+                      <a:round/>
+                      <a:headEnd type="none" w="med" len="med"/>
+                      <a:tailEnd type="none" w="med" len="med"/>
+                    </a:lnR>
+                    <a:lnT w="9525" cap="flat" cmpd="sng" algn="ctr">
+                      <a:solidFill>
+                        <a:srgbClr val="E6E6E6"/>
+                      </a:solidFill>
+                      <a:prstDash val="solid"/>
+                      <a:round/>
+                      <a:headEnd type="none" w="med" len="med"/>
+                      <a:tailEnd type="none" w="med" len="med"/>
+                    </a:lnT>
+                    <a:lnB w="9525" cap="flat" cmpd="sng" algn="ctr">
+                      <a:solidFill>
+                        <a:srgbClr val="E6E6E6"/>
+                      </a:solidFill>
+                      <a:prstDash val="solid"/>
+                      <a:round/>
+                      <a:headEnd type="none" w="med" len="med"/>
+                      <a:tailEnd type="none" w="med" len="med"/>
+                    </a:lnB>
+                    <a:solidFill>
+                      <a:srgbClr val="F5F5F5"/>
+                    </a:solidFill>
+                  </a:tcPr>
+                </a:tc>
+                <a:tc>
+                  <a:txBody>
+                    <a:bodyPr/>
+                    <a:lstStyle/>
+                    <a:p>
+                      <a:r>
+                        <a:rPr lang="en-US" sz="1800">
+                          <a:effectLst/>
+                        </a:rPr>
+                        <a:t>double (numeric with decimals)</a:t>
+                      </a:r>
+                    </a:p>
+                  </a:txBody>
+                  <a:tcPr marL="91426" marR="91426" marT="45713" marB="45713" anchor="ctr">
+                    <a:lnL w="9525" cap="flat" cmpd="sng" algn="ctr">
+                      <a:solidFill>
+                        <a:srgbClr val="E6E6E6"/>
+                      </a:solidFill>
+                      <a:prstDash val="solid"/>
+                      <a:round/>
+                      <a:headEnd type="none" w="med" len="med"/>
+                      <a:tailEnd type="none" w="med" len="med"/>
+                    </a:lnL>
+                    <a:lnR w="9525" cap="flat" cmpd="sng" algn="ctr">
+                      <a:solidFill>
+                        <a:srgbClr val="E6E6E6"/>
+                      </a:solidFill>
+                      <a:prstDash val="solid"/>
+                      <a:round/>
+                      <a:headEnd type="none" w="med" len="med"/>
+                      <a:tailEnd type="none" w="med" len="med"/>
+                    </a:lnR>
+                    <a:lnT w="9525" cap="flat" cmpd="sng" algn="ctr">
+                      <a:solidFill>
+                        <a:srgbClr val="E6E6E6"/>
+                      </a:solidFill>
+                      <a:prstDash val="solid"/>
+                      <a:round/>
+                      <a:headEnd type="none" w="med" len="med"/>
+                      <a:tailEnd type="none" w="med" len="med"/>
+                    </a:lnT>
+                    <a:lnB w="9525" cap="flat" cmpd="sng" algn="ctr">
+                      <a:solidFill>
+                        <a:srgbClr val="E6E6E6"/>
+                      </a:solidFill>
+                      <a:prstDash val="solid"/>
+                      <a:round/>
+                      <a:headEnd type="none" w="med" len="med"/>
+                      <a:tailEnd type="none" w="med" len="med"/>
+                    </a:lnB>
+                    <a:solidFill>
+                      <a:srgbClr val="F5F5F5"/>
+                    </a:solidFill>
+                  </a:tcPr>
+                </a:tc>
+                <a:extLst>
+                  <a:ext uri="{0D108BD9-81ED-4DB2-BD59-A6C34878D82A}">
+                    <a16:rowId xmlns:a16="http://schemas.microsoft.com/office/drawing/2014/main" val="1154783920"/>
+                  </a:ext>
+                </a:extLst>
+              </a:tr>
+              <a:tr h="375624">
+                <a:tc>
+                  <a:txBody>
+                    <a:bodyPr/>
+                    <a:lstStyle/>
+                    <a:p>
+                      <a:r>
+                        <a:rPr lang="en-US" sz="1800">
+                          <a:effectLst/>
+                        </a:rPr>
+                        <a:t>lgl</a:t>
+                      </a:r>
+                    </a:p>
+                  </a:txBody>
+                  <a:tcPr marL="91426" marR="91426" marT="45713" marB="45713" anchor="ctr">
+                    <a:lnL w="9525" cap="flat" cmpd="sng" algn="ctr">
+                      <a:solidFill>
+                        <a:srgbClr val="E6E6E6"/>
+                      </a:solidFill>
+                      <a:prstDash val="solid"/>
+                      <a:round/>
+                      <a:headEnd type="none" w="med" len="med"/>
+                      <a:tailEnd type="none" w="med" len="med"/>
+                    </a:lnL>
+                    <a:lnR w="9525" cap="flat" cmpd="sng" algn="ctr">
+                      <a:solidFill>
+                        <a:srgbClr val="E6E6E6"/>
+                      </a:solidFill>
+                      <a:prstDash val="solid"/>
+                      <a:round/>
+                      <a:headEnd type="none" w="med" len="med"/>
+                      <a:tailEnd type="none" w="med" len="med"/>
+                    </a:lnR>
+                    <a:lnT w="9525" cap="flat" cmpd="sng" algn="ctr">
+                      <a:solidFill>
+                        <a:srgbClr val="E6E6E6"/>
+                      </a:solidFill>
+                      <a:prstDash val="solid"/>
+                      <a:round/>
+                      <a:headEnd type="none" w="med" len="med"/>
+                      <a:tailEnd type="none" w="med" len="med"/>
+                    </a:lnT>
+                    <a:lnB w="9525" cap="flat" cmpd="sng" algn="ctr">
+                      <a:solidFill>
+                        <a:srgbClr val="E6E6E6"/>
+                      </a:solidFill>
+                      <a:prstDash val="solid"/>
+                      <a:round/>
+                      <a:headEnd type="none" w="med" len="med"/>
+                      <a:tailEnd type="none" w="med" len="med"/>
+                    </a:lnB>
+                    <a:solidFill>
+                      <a:srgbClr val="F5F5F5"/>
+                    </a:solidFill>
+                  </a:tcPr>
+                </a:tc>
+                <a:tc>
+                  <a:txBody>
+                    <a:bodyPr/>
+                    <a:lstStyle/>
+                    <a:p>
+                      <a:r>
+                        <a:rPr lang="en-US" sz="1800">
+                          <a:effectLst/>
+                        </a:rPr>
+                        <a:t>logical (TRUE/FALSE)</a:t>
+                      </a:r>
+                    </a:p>
+                  </a:txBody>
+                  <a:tcPr marL="91426" marR="91426" marT="45713" marB="45713" anchor="ctr">
+                    <a:lnL w="9525" cap="flat" cmpd="sng" algn="ctr">
+                      <a:solidFill>
+                        <a:srgbClr val="E6E6E6"/>
+                      </a:solidFill>
+                      <a:prstDash val="solid"/>
+                      <a:round/>
+                      <a:headEnd type="none" w="med" len="med"/>
+                      <a:tailEnd type="none" w="med" len="med"/>
+                    </a:lnL>
+                    <a:lnR w="9525" cap="flat" cmpd="sng" algn="ctr">
+                      <a:solidFill>
+                        <a:srgbClr val="E6E6E6"/>
+                      </a:solidFill>
+                      <a:prstDash val="solid"/>
+                      <a:round/>
+                      <a:headEnd type="none" w="med" len="med"/>
+                      <a:tailEnd type="none" w="med" len="med"/>
+                    </a:lnR>
+                    <a:lnT w="9525" cap="flat" cmpd="sng" algn="ctr">
+                      <a:solidFill>
+                        <a:srgbClr val="E6E6E6"/>
+                      </a:solidFill>
+                      <a:prstDash val="solid"/>
+                      <a:round/>
+                      <a:headEnd type="none" w="med" len="med"/>
+                      <a:tailEnd type="none" w="med" len="med"/>
+                    </a:lnT>
+                    <a:lnB w="9525" cap="flat" cmpd="sng" algn="ctr">
+                      <a:solidFill>
+                        <a:srgbClr val="E6E6E6"/>
+                      </a:solidFill>
+                      <a:prstDash val="solid"/>
+                      <a:round/>
+                      <a:headEnd type="none" w="med" len="med"/>
+                      <a:tailEnd type="none" w="med" len="med"/>
+                    </a:lnB>
+                    <a:solidFill>
+                      <a:srgbClr val="F5F5F5"/>
+                    </a:solidFill>
+                  </a:tcPr>
+                </a:tc>
+                <a:extLst>
+                  <a:ext uri="{0D108BD9-81ED-4DB2-BD59-A6C34878D82A}">
+                    <a16:rowId xmlns:a16="http://schemas.microsoft.com/office/drawing/2014/main" val="185496402"/>
+                  </a:ext>
+                </a:extLst>
+              </a:tr>
+              <a:tr h="375624">
+                <a:tc>
+                  <a:txBody>
+                    <a:bodyPr/>
+                    <a:lstStyle/>
+                    <a:p>
+                      <a:r>
+                        <a:rPr lang="en-US" sz="1800">
+                          <a:effectLst/>
+                        </a:rPr>
+                        <a:t>fct</a:t>
+                      </a:r>
+                    </a:p>
+                  </a:txBody>
+                  <a:tcPr marL="91426" marR="91426" marT="45713" marB="45713" anchor="ctr">
+                    <a:lnL w="9525" cap="flat" cmpd="sng" algn="ctr">
+                      <a:solidFill>
+                        <a:srgbClr val="E6E6E6"/>
+                      </a:solidFill>
+                      <a:prstDash val="solid"/>
+                      <a:round/>
+                      <a:headEnd type="none" w="med" len="med"/>
+                      <a:tailEnd type="none" w="med" len="med"/>
+                    </a:lnL>
+                    <a:lnR w="9525" cap="flat" cmpd="sng" algn="ctr">
+                      <a:solidFill>
+                        <a:srgbClr val="E6E6E6"/>
+                      </a:solidFill>
+                      <a:prstDash val="solid"/>
+                      <a:round/>
+                      <a:headEnd type="none" w="med" len="med"/>
+                      <a:tailEnd type="none" w="med" len="med"/>
+                    </a:lnR>
+                    <a:lnT w="9525" cap="flat" cmpd="sng" algn="ctr">
+                      <a:solidFill>
+                        <a:srgbClr val="E6E6E6"/>
+                      </a:solidFill>
+                      <a:prstDash val="solid"/>
+                      <a:round/>
+                      <a:headEnd type="none" w="med" len="med"/>
+                      <a:tailEnd type="none" w="med" len="med"/>
+                    </a:lnT>
+                    <a:lnB w="9525" cap="flat" cmpd="sng" algn="ctr">
+                      <a:solidFill>
+                        <a:srgbClr val="E6E6E6"/>
+                      </a:solidFill>
+                      <a:prstDash val="solid"/>
+                      <a:round/>
+                      <a:headEnd type="none" w="med" len="med"/>
+                      <a:tailEnd type="none" w="med" len="med"/>
+                    </a:lnB>
+                    <a:solidFill>
+                      <a:srgbClr val="F5F5F5"/>
+                    </a:solidFill>
+                  </a:tcPr>
+                </a:tc>
+                <a:tc>
+                  <a:txBody>
+                    <a:bodyPr/>
+                    <a:lstStyle/>
+                    <a:p>
+                      <a:r>
+                        <a:rPr lang="en-US" sz="1800">
+                          <a:effectLst/>
+                        </a:rPr>
+                        <a:t>factor</a:t>
+                      </a:r>
+                    </a:p>
+                  </a:txBody>
+                  <a:tcPr marL="91426" marR="91426" marT="45713" marB="45713" anchor="ctr">
+                    <a:lnL w="9525" cap="flat" cmpd="sng" algn="ctr">
+                      <a:solidFill>
+                        <a:srgbClr val="E6E6E6"/>
+                      </a:solidFill>
+                      <a:prstDash val="solid"/>
+                      <a:round/>
+                      <a:headEnd type="none" w="med" len="med"/>
+                      <a:tailEnd type="none" w="med" len="med"/>
+                    </a:lnL>
+                    <a:lnR w="9525" cap="flat" cmpd="sng" algn="ctr">
+                      <a:solidFill>
+                        <a:srgbClr val="E6E6E6"/>
+                      </a:solidFill>
+                      <a:prstDash val="solid"/>
+                      <a:round/>
+                      <a:headEnd type="none" w="med" len="med"/>
+                      <a:tailEnd type="none" w="med" len="med"/>
+                    </a:lnR>
+                    <a:lnT w="9525" cap="flat" cmpd="sng" algn="ctr">
+                      <a:solidFill>
+                        <a:srgbClr val="E6E6E6"/>
+                      </a:solidFill>
+                      <a:prstDash val="solid"/>
+                      <a:round/>
+                      <a:headEnd type="none" w="med" len="med"/>
+                      <a:tailEnd type="none" w="med" len="med"/>
+                    </a:lnT>
+                    <a:lnB w="9525" cap="flat" cmpd="sng" algn="ctr">
+                      <a:solidFill>
+                        <a:srgbClr val="E6E6E6"/>
+                      </a:solidFill>
+                      <a:prstDash val="solid"/>
+                      <a:round/>
+                      <a:headEnd type="none" w="med" len="med"/>
+                      <a:tailEnd type="none" w="med" len="med"/>
+                    </a:lnB>
+                    <a:solidFill>
+                      <a:srgbClr val="F5F5F5"/>
+                    </a:solidFill>
+                  </a:tcPr>
+                </a:tc>
+                <a:extLst>
+                  <a:ext uri="{0D108BD9-81ED-4DB2-BD59-A6C34878D82A}">
+                    <a16:rowId xmlns:a16="http://schemas.microsoft.com/office/drawing/2014/main" val="1976669342"/>
+                  </a:ext>
+                </a:extLst>
+              </a:tr>
+              <a:tr h="375624">
+                <a:tc>
+                  <a:txBody>
+                    <a:bodyPr/>
+                    <a:lstStyle/>
+                    <a:p>
+                      <a:r>
+                        <a:rPr lang="en-US" sz="1800">
+                          <a:effectLst/>
+                        </a:rPr>
+                        <a:t>date</a:t>
+                      </a:r>
+                    </a:p>
+                  </a:txBody>
+                  <a:tcPr marL="91426" marR="91426" marT="45713" marB="45713" anchor="ctr">
+                    <a:lnL w="9525" cap="flat" cmpd="sng" algn="ctr">
+                      <a:solidFill>
+                        <a:srgbClr val="E6E6E6"/>
+                      </a:solidFill>
+                      <a:prstDash val="solid"/>
+                      <a:round/>
+                      <a:headEnd type="none" w="med" len="med"/>
+                      <a:tailEnd type="none" w="med" len="med"/>
+                    </a:lnL>
+                    <a:lnR w="9525" cap="flat" cmpd="sng" algn="ctr">
+                      <a:solidFill>
+                        <a:srgbClr val="E6E6E6"/>
+                      </a:solidFill>
+                      <a:prstDash val="solid"/>
+                      <a:round/>
+                      <a:headEnd type="none" w="med" len="med"/>
+                      <a:tailEnd type="none" w="med" len="med"/>
+                    </a:lnR>
+                    <a:lnT w="9525" cap="flat" cmpd="sng" algn="ctr">
+                      <a:solidFill>
+                        <a:srgbClr val="E6E6E6"/>
+                      </a:solidFill>
+                      <a:prstDash val="solid"/>
+                      <a:round/>
+                      <a:headEnd type="none" w="med" len="med"/>
+                      <a:tailEnd type="none" w="med" len="med"/>
+                    </a:lnT>
+                    <a:lnB w="9525" cap="flat" cmpd="sng" algn="ctr">
+                      <a:solidFill>
+                        <a:srgbClr val="E6E6E6"/>
+                      </a:solidFill>
+                      <a:prstDash val="solid"/>
+                      <a:round/>
+                      <a:headEnd type="none" w="med" len="med"/>
+                      <a:tailEnd type="none" w="med" len="med"/>
+                    </a:lnB>
+                    <a:solidFill>
+                      <a:srgbClr val="F5F5F5"/>
+                    </a:solidFill>
+                  </a:tcPr>
+                </a:tc>
+                <a:tc>
+                  <a:txBody>
+                    <a:bodyPr/>
+                    <a:lstStyle/>
+                    <a:p>
+                      <a:r>
+                        <a:rPr lang="en-US" sz="1800">
+                          <a:effectLst/>
+                        </a:rPr>
+                        <a:t>Date</a:t>
+                      </a:r>
+                    </a:p>
+                  </a:txBody>
+                  <a:tcPr marL="91426" marR="91426" marT="45713" marB="45713" anchor="ctr">
+                    <a:lnL w="9525" cap="flat" cmpd="sng" algn="ctr">
+                      <a:solidFill>
+                        <a:srgbClr val="E6E6E6"/>
+                      </a:solidFill>
+                      <a:prstDash val="solid"/>
+                      <a:round/>
+                      <a:headEnd type="none" w="med" len="med"/>
+                      <a:tailEnd type="none" w="med" len="med"/>
+                    </a:lnL>
+                    <a:lnR w="9525" cap="flat" cmpd="sng" algn="ctr">
+                      <a:solidFill>
+                        <a:srgbClr val="E6E6E6"/>
+                      </a:solidFill>
+                      <a:prstDash val="solid"/>
+                      <a:round/>
+                      <a:headEnd type="none" w="med" len="med"/>
+                      <a:tailEnd type="none" w="med" len="med"/>
+                    </a:lnR>
+                    <a:lnT w="9525" cap="flat" cmpd="sng" algn="ctr">
+                      <a:solidFill>
+                        <a:srgbClr val="E6E6E6"/>
+                      </a:solidFill>
+                      <a:prstDash val="solid"/>
+                      <a:round/>
+                      <a:headEnd type="none" w="med" len="med"/>
+                      <a:tailEnd type="none" w="med" len="med"/>
+                    </a:lnT>
+                    <a:lnB w="9525" cap="flat" cmpd="sng" algn="ctr">
+                      <a:solidFill>
+                        <a:srgbClr val="E6E6E6"/>
+                      </a:solidFill>
+                      <a:prstDash val="solid"/>
+                      <a:round/>
+                      <a:headEnd type="none" w="med" len="med"/>
+                      <a:tailEnd type="none" w="med" len="med"/>
+                    </a:lnB>
+                    <a:solidFill>
+                      <a:srgbClr val="F5F5F5"/>
+                    </a:solidFill>
+                  </a:tcPr>
+                </a:tc>
+                <a:extLst>
+                  <a:ext uri="{0D108BD9-81ED-4DB2-BD59-A6C34878D82A}">
+                    <a16:rowId xmlns:a16="http://schemas.microsoft.com/office/drawing/2014/main" val="920887926"/>
+                  </a:ext>
+                </a:extLst>
+              </a:tr>
+              <a:tr h="375624">
+                <a:tc>
+                  <a:txBody>
+                    <a:bodyPr/>
+                    <a:lstStyle/>
+                    <a:p>
+                      <a:r>
+                        <a:rPr lang="en-US" sz="1800">
+                          <a:effectLst/>
+                        </a:rPr>
+                        <a:t>dttm</a:t>
+                      </a:r>
+                    </a:p>
+                  </a:txBody>
+                  <a:tcPr marL="91426" marR="91426" marT="45713" marB="45713" anchor="ctr">
+                    <a:lnL w="9525" cap="flat" cmpd="sng" algn="ctr">
+                      <a:solidFill>
+                        <a:srgbClr val="E6E6E6"/>
+                      </a:solidFill>
+                      <a:prstDash val="solid"/>
+                      <a:round/>
+                      <a:headEnd type="none" w="med" len="med"/>
+                      <a:tailEnd type="none" w="med" len="med"/>
+                    </a:lnL>
+                    <a:lnR w="9525" cap="flat" cmpd="sng" algn="ctr">
+                      <a:solidFill>
+                        <a:srgbClr val="E6E6E6"/>
+                      </a:solidFill>
+                      <a:prstDash val="solid"/>
+                      <a:round/>
+                      <a:headEnd type="none" w="med" len="med"/>
+                      <a:tailEnd type="none" w="med" len="med"/>
+                    </a:lnR>
+                    <a:lnT w="9525" cap="flat" cmpd="sng" algn="ctr">
+                      <a:solidFill>
+                        <a:srgbClr val="E6E6E6"/>
+                      </a:solidFill>
+                      <a:prstDash val="solid"/>
+                      <a:round/>
+                      <a:headEnd type="none" w="med" len="med"/>
+                      <a:tailEnd type="none" w="med" len="med"/>
+                    </a:lnT>
+                    <a:lnB w="9525" cap="flat" cmpd="sng" algn="ctr">
+                      <a:solidFill>
+                        <a:srgbClr val="E6E6E6"/>
+                      </a:solidFill>
+                      <a:prstDash val="solid"/>
+                      <a:round/>
+                      <a:headEnd type="none" w="med" len="med"/>
+                      <a:tailEnd type="none" w="med" len="med"/>
+                    </a:lnB>
+                    <a:solidFill>
+                      <a:srgbClr val="F5F5F5"/>
+                    </a:solidFill>
+                  </a:tcPr>
+                </a:tc>
+                <a:tc>
+                  <a:txBody>
+                    <a:bodyPr/>
+                    <a:lstStyle/>
+                    <a:p>
+                      <a:r>
+                        <a:rPr lang="en-US" sz="1800">
+                          <a:effectLst/>
+                        </a:rPr>
+                        <a:t>date-time (POSIXct)</a:t>
+                      </a:r>
+                    </a:p>
+                  </a:txBody>
+                  <a:tcPr marL="91426" marR="91426" marT="45713" marB="45713" anchor="ctr">
+                    <a:lnL w="9525" cap="flat" cmpd="sng" algn="ctr">
+                      <a:solidFill>
+                        <a:srgbClr val="E6E6E6"/>
+                      </a:solidFill>
+                      <a:prstDash val="solid"/>
+                      <a:round/>
+                      <a:headEnd type="none" w="med" len="med"/>
+                      <a:tailEnd type="none" w="med" len="med"/>
+                    </a:lnL>
+                    <a:lnR w="9525" cap="flat" cmpd="sng" algn="ctr">
+                      <a:solidFill>
+                        <a:srgbClr val="E6E6E6"/>
+                      </a:solidFill>
+                      <a:prstDash val="solid"/>
+                      <a:round/>
+                      <a:headEnd type="none" w="med" len="med"/>
+                      <a:tailEnd type="none" w="med" len="med"/>
+                    </a:lnR>
+                    <a:lnT w="9525" cap="flat" cmpd="sng" algn="ctr">
+                      <a:solidFill>
+                        <a:srgbClr val="E6E6E6"/>
+                      </a:solidFill>
+                      <a:prstDash val="solid"/>
+                      <a:round/>
+                      <a:headEnd type="none" w="med" len="med"/>
+                      <a:tailEnd type="none" w="med" len="med"/>
+                    </a:lnT>
+                    <a:lnB w="9525" cap="flat" cmpd="sng" algn="ctr">
+                      <a:solidFill>
+                        <a:srgbClr val="E6E6E6"/>
+                      </a:solidFill>
+                      <a:prstDash val="solid"/>
+                      <a:round/>
+                      <a:headEnd type="none" w="med" len="med"/>
+                      <a:tailEnd type="none" w="med" len="med"/>
+                    </a:lnB>
+                    <a:solidFill>
+                      <a:srgbClr val="F5F5F5"/>
+                    </a:solidFill>
+                  </a:tcPr>
+                </a:tc>
+                <a:extLst>
+                  <a:ext uri="{0D108BD9-81ED-4DB2-BD59-A6C34878D82A}">
+                    <a16:rowId xmlns:a16="http://schemas.microsoft.com/office/drawing/2014/main" val="1815744067"/>
+                  </a:ext>
+                </a:extLst>
+              </a:tr>
+              <a:tr h="375624">
+                <a:tc>
+                  <a:txBody>
+                    <a:bodyPr/>
+                    <a:lstStyle/>
+                    <a:p>
+                      <a:r>
+                        <a:rPr lang="en-US" sz="1800">
+                          <a:effectLst/>
+                        </a:rPr>
+                        <a:t>time</a:t>
+                      </a:r>
+                    </a:p>
+                  </a:txBody>
+                  <a:tcPr marL="91426" marR="91426" marT="45713" marB="45713" anchor="ctr">
+                    <a:lnL w="9525" cap="flat" cmpd="sng" algn="ctr">
+                      <a:solidFill>
+                        <a:srgbClr val="E6E6E6"/>
+                      </a:solidFill>
+                      <a:prstDash val="solid"/>
+                      <a:round/>
+                      <a:headEnd type="none" w="med" len="med"/>
+                      <a:tailEnd type="none" w="med" len="med"/>
+                    </a:lnL>
+                    <a:lnR w="9525" cap="flat" cmpd="sng" algn="ctr">
+                      <a:solidFill>
+                        <a:srgbClr val="E6E6E6"/>
+                      </a:solidFill>
+                      <a:prstDash val="solid"/>
+                      <a:round/>
+                      <a:headEnd type="none" w="med" len="med"/>
+                      <a:tailEnd type="none" w="med" len="med"/>
+                    </a:lnR>
+                    <a:lnT w="9525" cap="flat" cmpd="sng" algn="ctr">
+                      <a:solidFill>
+                        <a:srgbClr val="E6E6E6"/>
+                      </a:solidFill>
+                      <a:prstDash val="solid"/>
+                      <a:round/>
+                      <a:headEnd type="none" w="med" len="med"/>
+                      <a:tailEnd type="none" w="med" len="med"/>
+                    </a:lnT>
+                    <a:lnB w="9525" cap="flat" cmpd="sng" algn="ctr">
+                      <a:solidFill>
+                        <a:srgbClr val="E6E6E6"/>
+                      </a:solidFill>
+                      <a:prstDash val="solid"/>
+                      <a:round/>
+                      <a:headEnd type="none" w="med" len="med"/>
+                      <a:tailEnd type="none" w="med" len="med"/>
+                    </a:lnB>
+                    <a:solidFill>
+                      <a:srgbClr val="F5F5F5"/>
+                    </a:solidFill>
+                  </a:tcPr>
+                </a:tc>
+                <a:tc>
+                  <a:txBody>
+                    <a:bodyPr/>
+                    <a:lstStyle/>
+                    <a:p>
+                      <a:r>
+                        <a:rPr lang="en-US" sz="1800">
+                          <a:effectLst/>
+                        </a:rPr>
+                        <a:t>time (hms)</a:t>
+                      </a:r>
+                    </a:p>
+                  </a:txBody>
+                  <a:tcPr marL="91426" marR="91426" marT="45713" marB="45713" anchor="ctr">
+                    <a:lnL w="9525" cap="flat" cmpd="sng" algn="ctr">
+                      <a:solidFill>
+                        <a:srgbClr val="E6E6E6"/>
+                      </a:solidFill>
+                      <a:prstDash val="solid"/>
+                      <a:round/>
+                      <a:headEnd type="none" w="med" len="med"/>
+                      <a:tailEnd type="none" w="med" len="med"/>
+                    </a:lnL>
+                    <a:lnR w="9525" cap="flat" cmpd="sng" algn="ctr">
+                      <a:solidFill>
+                        <a:srgbClr val="E6E6E6"/>
+                      </a:solidFill>
+                      <a:prstDash val="solid"/>
+                      <a:round/>
+                      <a:headEnd type="none" w="med" len="med"/>
+                      <a:tailEnd type="none" w="med" len="med"/>
+                    </a:lnR>
+                    <a:lnT w="9525" cap="flat" cmpd="sng" algn="ctr">
+                      <a:solidFill>
+                        <a:srgbClr val="E6E6E6"/>
+                      </a:solidFill>
+                      <a:prstDash val="solid"/>
+                      <a:round/>
+                      <a:headEnd type="none" w="med" len="med"/>
+                      <a:tailEnd type="none" w="med" len="med"/>
+                    </a:lnT>
+                    <a:lnB w="9525" cap="flat" cmpd="sng" algn="ctr">
+                      <a:solidFill>
+                        <a:srgbClr val="E6E6E6"/>
+                      </a:solidFill>
+                      <a:prstDash val="solid"/>
+                      <a:round/>
+                      <a:headEnd type="none" w="med" len="med"/>
+                      <a:tailEnd type="none" w="med" len="med"/>
+                    </a:lnB>
+                    <a:solidFill>
+                      <a:srgbClr val="F5F5F5"/>
+                    </a:solidFill>
+                  </a:tcPr>
+                </a:tc>
+                <a:extLst>
+                  <a:ext uri="{0D108BD9-81ED-4DB2-BD59-A6C34878D82A}">
+                    <a16:rowId xmlns:a16="http://schemas.microsoft.com/office/drawing/2014/main" val="3203420464"/>
+                  </a:ext>
+                </a:extLst>
+              </a:tr>
+              <a:tr h="375624">
+                <a:tc>
+                  <a:txBody>
+                    <a:bodyPr/>
+                    <a:lstStyle/>
+                    <a:p>
+                      <a:r>
+                        <a:rPr lang="en-US" sz="1800">
+                          <a:effectLst/>
+                        </a:rPr>
+                        <a:t>list</a:t>
+                      </a:r>
+                    </a:p>
+                  </a:txBody>
+                  <a:tcPr marL="91426" marR="91426" marT="45713" marB="45713" anchor="ctr">
+                    <a:lnL w="9525" cap="flat" cmpd="sng" algn="ctr">
+                      <a:solidFill>
+                        <a:srgbClr val="E6E6E6"/>
+                      </a:solidFill>
+                      <a:prstDash val="solid"/>
+                      <a:round/>
+                      <a:headEnd type="none" w="med" len="med"/>
+                      <a:tailEnd type="none" w="med" len="med"/>
+                    </a:lnL>
+                    <a:lnR w="9525" cap="flat" cmpd="sng" algn="ctr">
+                      <a:solidFill>
+                        <a:srgbClr val="E6E6E6"/>
+                      </a:solidFill>
+                      <a:prstDash val="solid"/>
+                      <a:round/>
+                      <a:headEnd type="none" w="med" len="med"/>
+                      <a:tailEnd type="none" w="med" len="med"/>
+                    </a:lnR>
+                    <a:lnT w="9525" cap="flat" cmpd="sng" algn="ctr">
+                      <a:solidFill>
+                        <a:srgbClr val="E6E6E6"/>
+                      </a:solidFill>
+                      <a:prstDash val="solid"/>
+                      <a:round/>
+                      <a:headEnd type="none" w="med" len="med"/>
+                      <a:tailEnd type="none" w="med" len="med"/>
+                    </a:lnT>
+                    <a:lnB w="9525" cap="flat" cmpd="sng" algn="ctr">
+                      <a:solidFill>
+                        <a:srgbClr val="E6E6E6"/>
+                      </a:solidFill>
+                      <a:prstDash val="solid"/>
+                      <a:round/>
+                      <a:headEnd type="none" w="med" len="med"/>
+                      <a:tailEnd type="none" w="med" len="med"/>
+                    </a:lnB>
+                    <a:solidFill>
+                      <a:srgbClr val="F5F5F5"/>
+                    </a:solidFill>
+                  </a:tcPr>
+                </a:tc>
+                <a:tc>
+                  <a:txBody>
+                    <a:bodyPr/>
+                    <a:lstStyle/>
+                    <a:p>
+                      <a:r>
+                        <a:rPr lang="en-US" sz="1800" dirty="0">
+                          <a:effectLst/>
+                        </a:rPr>
+                        <a:t>list column</a:t>
+                      </a:r>
+                    </a:p>
+                  </a:txBody>
+                  <a:tcPr marL="91426" marR="91426" marT="45713" marB="45713" anchor="ctr">
+                    <a:lnL w="9525" cap="flat" cmpd="sng" algn="ctr">
+                      <a:solidFill>
+                        <a:srgbClr val="E6E6E6"/>
+                      </a:solidFill>
+                      <a:prstDash val="solid"/>
+                      <a:round/>
+                      <a:headEnd type="none" w="med" len="med"/>
+                      <a:tailEnd type="none" w="med" len="med"/>
+                    </a:lnL>
+                    <a:lnR w="9525" cap="flat" cmpd="sng" algn="ctr">
+                      <a:solidFill>
+                        <a:srgbClr val="E6E6E6"/>
+                      </a:solidFill>
+                      <a:prstDash val="solid"/>
+                      <a:round/>
+                      <a:headEnd type="none" w="med" len="med"/>
+                      <a:tailEnd type="none" w="med" len="med"/>
+                    </a:lnR>
+                    <a:lnT w="9525" cap="flat" cmpd="sng" algn="ctr">
+                      <a:solidFill>
+                        <a:srgbClr val="E6E6E6"/>
+                      </a:solidFill>
+                      <a:prstDash val="solid"/>
+                      <a:round/>
+                      <a:headEnd type="none" w="med" len="med"/>
+                      <a:tailEnd type="none" w="med" len="med"/>
+                    </a:lnT>
+                    <a:lnB w="9525" cap="flat" cmpd="sng" algn="ctr">
+                      <a:solidFill>
+                        <a:srgbClr val="E6E6E6"/>
+                      </a:solidFill>
+                      <a:prstDash val="solid"/>
+                      <a:round/>
+                      <a:headEnd type="none" w="med" len="med"/>
+                      <a:tailEnd type="none" w="med" len="med"/>
+                    </a:lnB>
+                    <a:solidFill>
+                      <a:srgbClr val="F5F5F5"/>
+                    </a:solidFill>
+                  </a:tcPr>
+                </a:tc>
+                <a:extLst>
+                  <a:ext uri="{0D108BD9-81ED-4DB2-BD59-A6C34878D82A}">
+                    <a16:rowId xmlns:a16="http://schemas.microsoft.com/office/drawing/2014/main" val="2125329324"/>
+                  </a:ext>
+                </a:extLst>
+              </a:tr>
+            </a:tbl>
+          </a:graphicData>
+        </a:graphic>
+      </p:graphicFrame>
+      <p:sp>
+        <p:nvSpPr>
+          <p:cNvPr id="5" name="TextBox 4">
+            <a:extLst>
+              <a:ext uri="{FF2B5EF4-FFF2-40B4-BE49-F238E27FC236}">
+                <a16:creationId xmlns:a16="http://schemas.microsoft.com/office/drawing/2014/main" id="{5B33B3D4-09FA-41C1-9F58-7D457AFACAA3}"/>
+              </a:ext>
+            </a:extLst>
+          </p:cNvPr>
+          <p:cNvSpPr txBox="1"/>
+          <p:nvPr/>
+        </p:nvSpPr>
+        <p:spPr>
+          <a:xfrm>
+            <a:off x="1097280" y="3832130"/>
+            <a:ext cx="4612640" cy="2308324"/>
+          </a:xfrm>
+          <a:prstGeom prst="rect">
+            <a:avLst/>
+          </a:prstGeom>
+          <a:solidFill>
+            <a:schemeClr val="accent2"/>
+          </a:solidFill>
+        </p:spPr>
+        <p:txBody>
+          <a:bodyPr wrap="square" rtlCol="0">
+            <a:spAutoFit/>
+          </a:bodyPr>
+          <a:lstStyle/>
+          <a:p>
+            <a:r>
+              <a:rPr lang="en-US" sz="2400" b="1" dirty="0">
+                <a:solidFill>
+                  <a:schemeClr val="bg1"/>
+                </a:solidFill>
+              </a:rPr>
+              <a:t>Try it out!</a:t>
+            </a:r>
+          </a:p>
+          <a:p>
+            <a:pPr marL="342900" indent="-342900">
+              <a:buFont typeface="Arial" panose="020B0604020202020204" pitchFamily="34" charset="0"/>
+              <a:buChar char="•"/>
+            </a:pPr>
+            <a:r>
+              <a:rPr lang="en-US" sz="2000" dirty="0">
+                <a:solidFill>
+                  <a:schemeClr val="bg1"/>
+                </a:solidFill>
+              </a:rPr>
+              <a:t>Use `read.csv` to load this data into R. </a:t>
+            </a:r>
+          </a:p>
+          <a:p>
+            <a:pPr marL="342900" indent="-342900">
+              <a:buFont typeface="Arial" panose="020B0604020202020204" pitchFamily="34" charset="0"/>
+              <a:buChar char="•"/>
+            </a:pPr>
+            <a:r>
+              <a:rPr lang="en-US" sz="2000" dirty="0">
+                <a:solidFill>
+                  <a:schemeClr val="bg1"/>
+                </a:solidFill>
+              </a:rPr>
+              <a:t>Use `str` or `glimpse` to inspect them</a:t>
+            </a:r>
+          </a:p>
+          <a:p>
+            <a:pPr marL="342900" indent="-342900">
+              <a:buFont typeface="Arial" panose="020B0604020202020204" pitchFamily="34" charset="0"/>
+              <a:buChar char="•"/>
+            </a:pPr>
+            <a:r>
+              <a:rPr lang="en-US" sz="2000" dirty="0">
+                <a:solidFill>
+                  <a:schemeClr val="bg1"/>
+                </a:solidFill>
+              </a:rPr>
+              <a:t>Do the abbreviations match your predictions?</a:t>
+            </a:r>
           </a:p>
         </p:txBody>
       </p:sp>
     </p:spTree>
     <p:extLst>
       <p:ext uri="{BB962C8B-B14F-4D97-AF65-F5344CB8AC3E}">
-        <p14:creationId xmlns:p14="http://schemas.microsoft.com/office/powerpoint/2010/main" val="1609945966"/>
+        <p14:creationId xmlns:p14="http://schemas.microsoft.com/office/powerpoint/2010/main" val="674186864"/>
+      </p:ext>
+    </p:extLst>
+  </p:cSld>
+  <p:clrMapOvr>
+    <a:masterClrMapping/>
+  </p:clrMapOvr>
+</p:sld>
+</file>
+
+<file path=ppt/slides/slide6.xml><?xml version="1.0" encoding="utf-8"?>
+<p:sld xmlns:a="http://schemas.openxmlformats.org/drawingml/2006/main" xmlns:r="http://schemas.openxmlformats.org/officeDocument/2006/relationships" xmlns:p="http://schemas.openxmlformats.org/presentationml/2006/main">
+  <p:cSld>
+    <p:spTree>
+      <p:nvGrpSpPr>
+        <p:cNvPr id="1" name=""/>
+        <p:cNvGrpSpPr/>
+        <p:nvPr/>
+      </p:nvGrpSpPr>
+      <p:grpSpPr>
+        <a:xfrm>
+          <a:off x="0" y="0"/>
+          <a:ext cx="0" cy="0"/>
+          <a:chOff x="0" y="0"/>
+          <a:chExt cx="0" cy="0"/>
+        </a:xfrm>
+      </p:grpSpPr>
+      <p:sp>
+        <p:nvSpPr>
+          <p:cNvPr id="2" name="Title 1">
+            <a:extLst>
+              <a:ext uri="{FF2B5EF4-FFF2-40B4-BE49-F238E27FC236}">
+                <a16:creationId xmlns:a16="http://schemas.microsoft.com/office/drawing/2014/main" id="{45CABAF7-6D45-4663-AD5F-41C4461AD126}"/>
+              </a:ext>
+            </a:extLst>
+          </p:cNvPr>
+          <p:cNvSpPr>
+            <a:spLocks noGrp="1"/>
+          </p:cNvSpPr>
+          <p:nvPr>
+            <p:ph type="title"/>
+          </p:nvPr>
+        </p:nvSpPr>
+        <p:spPr/>
+        <p:txBody>
+          <a:bodyPr/>
+          <a:lstStyle/>
+          <a:p>
+            <a:r>
+              <a:rPr lang="en-US" dirty="0"/>
+              <a:t>Besides csv, </a:t>
+            </a:r>
+            <a:br>
+              <a:rPr lang="en-US" dirty="0"/>
+            </a:br>
+            <a:r>
+              <a:rPr lang="en-US" dirty="0"/>
+              <a:t>how many file types can you name?</a:t>
+            </a:r>
+          </a:p>
+        </p:txBody>
+      </p:sp>
+      <p:sp>
+        <p:nvSpPr>
+          <p:cNvPr id="3" name="Content Placeholder 2">
+            <a:extLst>
+              <a:ext uri="{FF2B5EF4-FFF2-40B4-BE49-F238E27FC236}">
+                <a16:creationId xmlns:a16="http://schemas.microsoft.com/office/drawing/2014/main" id="{097CFF49-6B41-4AE0-A375-7006BBA9A130}"/>
+              </a:ext>
+            </a:extLst>
+          </p:cNvPr>
+          <p:cNvSpPr>
+            <a:spLocks noGrp="1"/>
+          </p:cNvSpPr>
+          <p:nvPr>
+            <p:ph idx="1"/>
+          </p:nvPr>
+        </p:nvSpPr>
+        <p:spPr>
+          <a:xfrm>
+            <a:off x="1097280" y="1971040"/>
+            <a:ext cx="10058400" cy="2194560"/>
+          </a:xfrm>
+        </p:spPr>
+        <p:txBody>
+          <a:bodyPr>
+            <a:normAutofit/>
+          </a:bodyPr>
+          <a:lstStyle/>
+          <a:p>
+            <a:r>
+              <a:rPr lang="en-US" sz="3200" dirty="0"/>
+              <a:t>Full name of the file type</a:t>
+            </a:r>
+          </a:p>
+          <a:p>
+            <a:r>
+              <a:rPr lang="en-US" sz="3200" dirty="0"/>
+              <a:t>Its extension (e.g., “.csv”)</a:t>
+            </a:r>
+          </a:p>
+          <a:p>
+            <a:r>
+              <a:rPr lang="en-US" sz="3200" dirty="0"/>
+              <a:t>What it’s used for</a:t>
+            </a:r>
+          </a:p>
+          <a:p>
+            <a:endParaRPr lang="en-US" sz="3200" dirty="0"/>
+          </a:p>
+        </p:txBody>
+      </p:sp>
+      <p:sp>
+        <p:nvSpPr>
+          <p:cNvPr id="4" name="Slide Number Placeholder 3">
+            <a:extLst>
+              <a:ext uri="{FF2B5EF4-FFF2-40B4-BE49-F238E27FC236}">
+                <a16:creationId xmlns:a16="http://schemas.microsoft.com/office/drawing/2014/main" id="{87A95856-95F6-4516-A21E-BF7FF5FE8293}"/>
+              </a:ext>
+            </a:extLst>
+          </p:cNvPr>
+          <p:cNvSpPr>
+            <a:spLocks noGrp="1"/>
+          </p:cNvSpPr>
+          <p:nvPr>
+            <p:ph type="sldNum" sz="quarter" idx="12"/>
+          </p:nvPr>
+        </p:nvSpPr>
+        <p:spPr/>
+        <p:txBody>
+          <a:bodyPr/>
+          <a:lstStyle/>
+          <a:p>
+            <a:pPr>
+              <a:buSzPct val="25000"/>
+            </a:pPr>
+            <a:fld id="{00000000-1234-1234-1234-123412341234}" type="slidenum">
+              <a:rPr lang="en-US" sz="1200" smtClean="0">
+                <a:latin typeface="Calibri"/>
+                <a:ea typeface="Calibri"/>
+                <a:cs typeface="Calibri"/>
+                <a:sym typeface="Calibri"/>
+              </a:rPr>
+              <a:pPr>
+                <a:buSzPct val="25000"/>
+              </a:pPr>
+              <a:t>6</a:t>
+            </a:fld>
+            <a:endParaRPr lang="en-US" sz="1200" dirty="0">
+              <a:latin typeface="Calibri"/>
+              <a:ea typeface="Calibri"/>
+              <a:cs typeface="Calibri"/>
+              <a:sym typeface="Calibri"/>
+            </a:endParaRPr>
+          </a:p>
+        </p:txBody>
+      </p:sp>
+    </p:spTree>
+    <p:extLst>
+      <p:ext uri="{BB962C8B-B14F-4D97-AF65-F5344CB8AC3E}">
+        <p14:creationId xmlns:p14="http://schemas.microsoft.com/office/powerpoint/2010/main" val="2617330717"/>
+      </p:ext>
+    </p:extLst>
+  </p:cSld>
+  <p:clrMapOvr>
+    <a:masterClrMapping/>
+  </p:clrMapOvr>
+</p:sld>
+</file>
+
+<file path=ppt/slides/slide7.xml><?xml version="1.0" encoding="utf-8"?>
+<p:sld xmlns:a="http://schemas.openxmlformats.org/drawingml/2006/main" xmlns:r="http://schemas.openxmlformats.org/officeDocument/2006/relationships" xmlns:p="http://schemas.openxmlformats.org/presentationml/2006/main">
+  <p:cSld>
+    <p:spTree>
+      <p:nvGrpSpPr>
+        <p:cNvPr id="1" name=""/>
+        <p:cNvGrpSpPr/>
+        <p:nvPr/>
+      </p:nvGrpSpPr>
+      <p:grpSpPr>
+        <a:xfrm>
+          <a:off x="0" y="0"/>
+          <a:ext cx="0" cy="0"/>
+          <a:chOff x="0" y="0"/>
+          <a:chExt cx="0" cy="0"/>
+        </a:xfrm>
+      </p:grpSpPr>
+      <p:sp>
+        <p:nvSpPr>
+          <p:cNvPr id="2" name="Title 1">
+            <a:extLst>
+              <a:ext uri="{FF2B5EF4-FFF2-40B4-BE49-F238E27FC236}">
+                <a16:creationId xmlns:a16="http://schemas.microsoft.com/office/drawing/2014/main" id="{45CABAF7-6D45-4663-AD5F-41C4461AD126}"/>
+              </a:ext>
+            </a:extLst>
+          </p:cNvPr>
+          <p:cNvSpPr>
+            <a:spLocks noGrp="1"/>
+          </p:cNvSpPr>
+          <p:nvPr>
+            <p:ph type="title"/>
+          </p:nvPr>
+        </p:nvSpPr>
+        <p:spPr/>
+        <p:txBody>
+          <a:bodyPr/>
+          <a:lstStyle/>
+          <a:p>
+            <a:r>
+              <a:rPr lang="en-US" dirty="0"/>
+              <a:t>How many file types can you name?</a:t>
+            </a:r>
+          </a:p>
+        </p:txBody>
+      </p:sp>
+      <p:sp>
+        <p:nvSpPr>
+          <p:cNvPr id="3" name="Content Placeholder 2">
+            <a:extLst>
+              <a:ext uri="{FF2B5EF4-FFF2-40B4-BE49-F238E27FC236}">
+                <a16:creationId xmlns:a16="http://schemas.microsoft.com/office/drawing/2014/main" id="{097CFF49-6B41-4AE0-A375-7006BBA9A130}"/>
+              </a:ext>
+            </a:extLst>
+          </p:cNvPr>
+          <p:cNvSpPr>
+            <a:spLocks noGrp="1"/>
+          </p:cNvSpPr>
+          <p:nvPr>
+            <p:ph idx="1"/>
+          </p:nvPr>
+        </p:nvSpPr>
+        <p:spPr/>
+        <p:txBody>
+          <a:bodyPr/>
+          <a:lstStyle/>
+          <a:p>
+            <a:r>
+              <a:rPr lang="en-US" dirty="0"/>
+              <a:t>Full name of the file type</a:t>
+            </a:r>
+          </a:p>
+          <a:p>
+            <a:r>
+              <a:rPr lang="en-US" dirty="0"/>
+              <a:t>Its extension (e.g., “.csv”)</a:t>
+            </a:r>
+          </a:p>
+          <a:p>
+            <a:r>
+              <a:rPr lang="en-US" dirty="0"/>
+              <a:t>What it’s used for</a:t>
+            </a:r>
+          </a:p>
+          <a:p>
+            <a:endParaRPr lang="en-US" dirty="0"/>
+          </a:p>
+        </p:txBody>
+      </p:sp>
+      <p:sp>
+        <p:nvSpPr>
+          <p:cNvPr id="4" name="Slide Number Placeholder 3">
+            <a:extLst>
+              <a:ext uri="{FF2B5EF4-FFF2-40B4-BE49-F238E27FC236}">
+                <a16:creationId xmlns:a16="http://schemas.microsoft.com/office/drawing/2014/main" id="{87A95856-95F6-4516-A21E-BF7FF5FE8293}"/>
+              </a:ext>
+            </a:extLst>
+          </p:cNvPr>
+          <p:cNvSpPr>
+            <a:spLocks noGrp="1"/>
+          </p:cNvSpPr>
+          <p:nvPr>
+            <p:ph type="sldNum" sz="quarter" idx="12"/>
+          </p:nvPr>
+        </p:nvSpPr>
+        <p:spPr/>
+        <p:txBody>
+          <a:bodyPr/>
+          <a:lstStyle/>
+          <a:p>
+            <a:pPr>
+              <a:buSzPct val="25000"/>
+            </a:pPr>
+            <a:fld id="{00000000-1234-1234-1234-123412341234}" type="slidenum">
+              <a:rPr lang="en-US" sz="1200" smtClean="0">
+                <a:latin typeface="Calibri"/>
+                <a:ea typeface="Calibri"/>
+                <a:cs typeface="Calibri"/>
+                <a:sym typeface="Calibri"/>
+              </a:rPr>
+              <a:pPr>
+                <a:buSzPct val="25000"/>
+              </a:pPr>
+              <a:t>7</a:t>
+            </a:fld>
+            <a:endParaRPr lang="en-US" sz="1200" dirty="0">
+              <a:latin typeface="Calibri"/>
+              <a:ea typeface="Calibri"/>
+              <a:cs typeface="Calibri"/>
+              <a:sym typeface="Calibri"/>
+            </a:endParaRPr>
+          </a:p>
+        </p:txBody>
+      </p:sp>
+    </p:spTree>
+    <p:extLst>
+      <p:ext uri="{BB962C8B-B14F-4D97-AF65-F5344CB8AC3E}">
+        <p14:creationId xmlns:p14="http://schemas.microsoft.com/office/powerpoint/2010/main" val="3801913343"/>
+      </p:ext>
+    </p:extLst>
+  </p:cSld>
+  <p:clrMapOvr>
+    <a:masterClrMapping/>
+  </p:clrMapOvr>
+</p:sld>
+</file>
+
+<file path=ppt/slides/slide8.xml><?xml version="1.0" encoding="utf-8"?>
+<p:sld xmlns:a="http://schemas.openxmlformats.org/drawingml/2006/main" xmlns:r="http://schemas.openxmlformats.org/officeDocument/2006/relationships" xmlns:p="http://schemas.openxmlformats.org/presentationml/2006/main">
+  <p:cSld>
+    <p:spTree>
+      <p:nvGrpSpPr>
+        <p:cNvPr id="1" name=""/>
+        <p:cNvGrpSpPr/>
+        <p:nvPr/>
+      </p:nvGrpSpPr>
+      <p:grpSpPr>
+        <a:xfrm>
+          <a:off x="0" y="0"/>
+          <a:ext cx="0" cy="0"/>
+          <a:chOff x="0" y="0"/>
+          <a:chExt cx="0" cy="0"/>
+        </a:xfrm>
+      </p:grpSpPr>
+      <p:sp>
+        <p:nvSpPr>
+          <p:cNvPr id="4" name="Slide Number Placeholder 3">
+            <a:extLst>
+              <a:ext uri="{FF2B5EF4-FFF2-40B4-BE49-F238E27FC236}">
+                <a16:creationId xmlns:a16="http://schemas.microsoft.com/office/drawing/2014/main" id="{87A95856-95F6-4516-A21E-BF7FF5FE8293}"/>
+              </a:ext>
+            </a:extLst>
+          </p:cNvPr>
+          <p:cNvSpPr>
+            <a:spLocks noGrp="1"/>
+          </p:cNvSpPr>
+          <p:nvPr>
+            <p:ph type="sldNum" sz="quarter" idx="12"/>
+          </p:nvPr>
+        </p:nvSpPr>
+        <p:spPr/>
+        <p:txBody>
+          <a:bodyPr/>
+          <a:lstStyle/>
+          <a:p>
+            <a:pPr>
+              <a:buSzPct val="25000"/>
+            </a:pPr>
+            <a:fld id="{00000000-1234-1234-1234-123412341234}" type="slidenum">
+              <a:rPr lang="en-US" sz="1200" smtClean="0">
+                <a:latin typeface="Calibri"/>
+                <a:ea typeface="Calibri"/>
+                <a:cs typeface="Calibri"/>
+                <a:sym typeface="Calibri"/>
+              </a:rPr>
+              <a:pPr>
+                <a:buSzPct val="25000"/>
+              </a:pPr>
+              <a:t>8</a:t>
+            </a:fld>
+            <a:endParaRPr lang="en-US" sz="1200" dirty="0">
+              <a:latin typeface="Calibri"/>
+              <a:ea typeface="Calibri"/>
+              <a:cs typeface="Calibri"/>
+              <a:sym typeface="Calibri"/>
+            </a:endParaRPr>
+          </a:p>
+        </p:txBody>
+      </p:sp>
+      <p:pic>
+        <p:nvPicPr>
+          <p:cNvPr id="1026" name="Picture 2" descr="Data Structures in R | Data structures, Machine learning, Coding">
+            <a:extLst>
+              <a:ext uri="{FF2B5EF4-FFF2-40B4-BE49-F238E27FC236}">
+                <a16:creationId xmlns:a16="http://schemas.microsoft.com/office/drawing/2014/main" id="{7E2B856E-9436-45CE-AC1C-C0CA5B30B466}"/>
+              </a:ext>
+            </a:extLst>
+          </p:cNvPr>
+          <p:cNvPicPr>
+            <a:picLocks noChangeAspect="1" noChangeArrowheads="1"/>
+          </p:cNvPicPr>
+          <p:nvPr/>
+        </p:nvPicPr>
+        <p:blipFill rotWithShape="1">
+          <a:blip r:embed="rId2">
+            <a:extLst>
+              <a:ext uri="{28A0092B-C50C-407E-A947-70E740481C1C}">
+                <a14:useLocalDpi xmlns:a14="http://schemas.microsoft.com/office/drawing/2010/main" val="0"/>
+              </a:ext>
+            </a:extLst>
+          </a:blip>
+          <a:srcRect t="10483" b="7699"/>
+          <a:stretch/>
+        </p:blipFill>
+        <p:spPr bwMode="auto">
+          <a:xfrm>
+            <a:off x="1824644" y="93518"/>
+            <a:ext cx="8267700" cy="6764482"/>
+          </a:xfrm>
+          <a:prstGeom prst="rect">
+            <a:avLst/>
+          </a:prstGeom>
+          <a:noFill/>
+          <a:extLst>
+            <a:ext uri="{909E8E84-426E-40DD-AFC4-6F175D3DCCD1}">
+              <a14:hiddenFill xmlns:a14="http://schemas.microsoft.com/office/drawing/2010/main">
+                <a:solidFill>
+                  <a:srgbClr val="FFFFFF"/>
+                </a:solidFill>
+              </a14:hiddenFill>
+            </a:ext>
+          </a:extLst>
+        </p:spPr>
+      </p:pic>
+      <p:sp>
+        <p:nvSpPr>
+          <p:cNvPr id="8" name="Title 7">
+            <a:extLst>
+              <a:ext uri="{FF2B5EF4-FFF2-40B4-BE49-F238E27FC236}">
+                <a16:creationId xmlns:a16="http://schemas.microsoft.com/office/drawing/2014/main" id="{E46B4B68-42FB-4F79-B34C-DA35FF16AE17}"/>
+              </a:ext>
+            </a:extLst>
+          </p:cNvPr>
+          <p:cNvSpPr>
+            <a:spLocks noGrp="1"/>
+          </p:cNvSpPr>
+          <p:nvPr>
+            <p:ph type="title"/>
+          </p:nvPr>
+        </p:nvSpPr>
+        <p:spPr/>
+        <p:txBody>
+          <a:bodyPr>
+            <a:normAutofit/>
+          </a:bodyPr>
+          <a:lstStyle/>
+          <a:p>
+            <a:r>
+              <a:rPr lang="en-US" sz="1200" dirty="0">
+                <a:solidFill>
+                  <a:schemeClr val="bg1"/>
+                </a:solidFill>
+                <a:latin typeface="Segoe UI" panose="020B0502040204020203" pitchFamily="34" charset="0"/>
+                <a:cs typeface="Segoe UI" panose="020B0502040204020203" pitchFamily="34" charset="0"/>
+              </a:rPr>
+              <a:t>R Data structures</a:t>
+            </a:r>
+          </a:p>
+        </p:txBody>
+      </p:sp>
+    </p:spTree>
+    <p:extLst>
+      <p:ext uri="{BB962C8B-B14F-4D97-AF65-F5344CB8AC3E}">
+        <p14:creationId xmlns:p14="http://schemas.microsoft.com/office/powerpoint/2010/main" val="3201149335"/>
+      </p:ext>
+    </p:extLst>
+  </p:cSld>
+  <p:clrMapOvr>
+    <a:masterClrMapping/>
+  </p:clrMapOvr>
+</p:sld>
+</file>
+
+<file path=ppt/slides/slide9.xml><?xml version="1.0" encoding="utf-8"?>
+<p:sld xmlns:a="http://schemas.openxmlformats.org/drawingml/2006/main" xmlns:r="http://schemas.openxmlformats.org/officeDocument/2006/relationships" xmlns:p="http://schemas.openxmlformats.org/presentationml/2006/main">
+  <p:cSld>
+    <p:spTree>
+      <p:nvGrpSpPr>
+        <p:cNvPr id="1" name=""/>
+        <p:cNvGrpSpPr/>
+        <p:nvPr/>
+      </p:nvGrpSpPr>
+      <p:grpSpPr>
+        <a:xfrm>
+          <a:off x="0" y="0"/>
+          <a:ext cx="0" cy="0"/>
+          <a:chOff x="0" y="0"/>
+          <a:chExt cx="0" cy="0"/>
+        </a:xfrm>
+      </p:grpSpPr>
+      <p:sp>
+        <p:nvSpPr>
+          <p:cNvPr id="8" name="Title 7">
+            <a:extLst>
+              <a:ext uri="{FF2B5EF4-FFF2-40B4-BE49-F238E27FC236}">
+                <a16:creationId xmlns:a16="http://schemas.microsoft.com/office/drawing/2014/main" id="{E46B4B68-42FB-4F79-B34C-DA35FF16AE17}"/>
+              </a:ext>
+            </a:extLst>
+          </p:cNvPr>
+          <p:cNvSpPr>
+            <a:spLocks noGrp="1"/>
+          </p:cNvSpPr>
+          <p:nvPr>
+            <p:ph type="title"/>
+          </p:nvPr>
+        </p:nvSpPr>
+        <p:spPr/>
+        <p:txBody>
+          <a:bodyPr>
+            <a:normAutofit/>
+          </a:bodyPr>
+          <a:lstStyle/>
+          <a:p>
+            <a:r>
+              <a:rPr lang="en-US" sz="1200" dirty="0">
+                <a:solidFill>
+                  <a:schemeClr val="bg1"/>
+                </a:solidFill>
+                <a:latin typeface="Segoe UI" panose="020B0502040204020203" pitchFamily="34" charset="0"/>
+                <a:cs typeface="Segoe UI" panose="020B0502040204020203" pitchFamily="34" charset="0"/>
+              </a:rPr>
+              <a:t>R Data structures</a:t>
+            </a:r>
+          </a:p>
+        </p:txBody>
+      </p:sp>
+      <p:sp>
+        <p:nvSpPr>
+          <p:cNvPr id="2" name="Content Placeholder 1">
+            <a:extLst>
+              <a:ext uri="{FF2B5EF4-FFF2-40B4-BE49-F238E27FC236}">
+                <a16:creationId xmlns:a16="http://schemas.microsoft.com/office/drawing/2014/main" id="{E7F1E0BA-614F-4E69-A316-FEE7CECD4674}"/>
+              </a:ext>
+            </a:extLst>
+          </p:cNvPr>
+          <p:cNvSpPr>
+            <a:spLocks noGrp="1"/>
+          </p:cNvSpPr>
+          <p:nvPr>
+            <p:ph idx="1"/>
+          </p:nvPr>
+        </p:nvSpPr>
+        <p:spPr/>
+        <p:txBody>
+          <a:bodyPr/>
+          <a:lstStyle/>
+          <a:p>
+            <a:pPr marL="0" indent="0">
+              <a:buNone/>
+            </a:pPr>
+            <a:r>
+              <a:rPr lang="en-US" dirty="0"/>
+              <a:t>Open the dataset you download in Excel/Google Sheets</a:t>
+            </a:r>
+          </a:p>
+          <a:p>
+            <a:r>
+              <a:rPr lang="en-US" dirty="0"/>
+              <a:t>How could you extract a </a:t>
+            </a:r>
+            <a:r>
+              <a:rPr lang="en-US" b="1" i="1" dirty="0"/>
+              <a:t>vector</a:t>
+            </a:r>
+            <a:r>
+              <a:rPr lang="en-US" dirty="0"/>
+              <a:t> from this data?</a:t>
+            </a:r>
+          </a:p>
+          <a:p>
+            <a:r>
+              <a:rPr lang="en-US" dirty="0"/>
+              <a:t>How could you extract a </a:t>
+            </a:r>
+            <a:r>
+              <a:rPr lang="en-US" b="1" i="1" dirty="0"/>
+              <a:t>matrix</a:t>
+            </a:r>
+            <a:r>
+              <a:rPr lang="en-US" dirty="0"/>
+              <a:t> from this data?</a:t>
+            </a:r>
+          </a:p>
+          <a:p>
+            <a:r>
+              <a:rPr lang="en-US" dirty="0"/>
+              <a:t>How might this data become an </a:t>
+            </a:r>
+            <a:r>
+              <a:rPr lang="en-US" b="1" i="1" dirty="0"/>
+              <a:t>array</a:t>
+            </a:r>
+            <a:r>
+              <a:rPr lang="en-US" dirty="0"/>
+              <a:t>?</a:t>
+            </a:r>
+          </a:p>
+        </p:txBody>
+      </p:sp>
+      <p:sp>
+        <p:nvSpPr>
+          <p:cNvPr id="4" name="Slide Number Placeholder 3">
+            <a:extLst>
+              <a:ext uri="{FF2B5EF4-FFF2-40B4-BE49-F238E27FC236}">
+                <a16:creationId xmlns:a16="http://schemas.microsoft.com/office/drawing/2014/main" id="{87A95856-95F6-4516-A21E-BF7FF5FE8293}"/>
+              </a:ext>
+            </a:extLst>
+          </p:cNvPr>
+          <p:cNvSpPr>
+            <a:spLocks noGrp="1"/>
+          </p:cNvSpPr>
+          <p:nvPr>
+            <p:ph type="sldNum" sz="quarter" idx="12"/>
+          </p:nvPr>
+        </p:nvSpPr>
+        <p:spPr/>
+        <p:txBody>
+          <a:bodyPr/>
+          <a:lstStyle/>
+          <a:p>
+            <a:pPr>
+              <a:buSzPct val="25000"/>
+            </a:pPr>
+            <a:fld id="{00000000-1234-1234-1234-123412341234}" type="slidenum">
+              <a:rPr lang="en-US" sz="1200" smtClean="0">
+                <a:latin typeface="Calibri"/>
+                <a:ea typeface="Calibri"/>
+                <a:cs typeface="Calibri"/>
+                <a:sym typeface="Calibri"/>
+              </a:rPr>
+              <a:pPr>
+                <a:buSzPct val="25000"/>
+              </a:pPr>
+              <a:t>9</a:t>
+            </a:fld>
+            <a:endParaRPr lang="en-US" sz="1200" dirty="0">
+              <a:latin typeface="Calibri"/>
+              <a:ea typeface="Calibri"/>
+              <a:cs typeface="Calibri"/>
+              <a:sym typeface="Calibri"/>
+            </a:endParaRPr>
+          </a:p>
+        </p:txBody>
+      </p:sp>
+      <p:sp>
+        <p:nvSpPr>
+          <p:cNvPr id="5" name="Title 4">
+            <a:extLst>
+              <a:ext uri="{FF2B5EF4-FFF2-40B4-BE49-F238E27FC236}">
+                <a16:creationId xmlns:a16="http://schemas.microsoft.com/office/drawing/2014/main" id="{32810620-8FA8-4FDE-8C7B-31FBAC6A01F2}"/>
+              </a:ext>
+            </a:extLst>
+          </p:cNvPr>
+          <p:cNvSpPr txBox="1">
+            <a:spLocks/>
+          </p:cNvSpPr>
+          <p:nvPr/>
+        </p:nvSpPr>
+        <p:spPr>
+          <a:xfrm>
+            <a:off x="1097280" y="286603"/>
+            <a:ext cx="10058400" cy="1196757"/>
+          </a:xfrm>
+          <a:prstGeom prst="rect">
+            <a:avLst/>
+          </a:prstGeom>
+        </p:spPr>
+        <p:txBody>
+          <a:bodyPr vert="horz" lIns="91440" tIns="45720" rIns="91440" bIns="45720" rtlCol="0" anchor="b">
+            <a:normAutofit/>
+          </a:bodyPr>
+          <a:lstStyle>
+            <a:lvl1pPr marL="0" algn="l" defTabSz="914400" rtl="0" eaLnBrk="1" latinLnBrk="0" hangingPunct="1">
+              <a:lnSpc>
+                <a:spcPct val="85000"/>
+              </a:lnSpc>
+              <a:spcBef>
+                <a:spcPct val="0"/>
+              </a:spcBef>
+              <a:buNone/>
+              <a:defRPr sz="4800" kern="1200" spc="-50" baseline="0">
+                <a:solidFill>
+                  <a:schemeClr val="tx1">
+                    <a:lumMod val="75000"/>
+                  </a:schemeClr>
+                </a:solidFill>
+                <a:latin typeface="Sitka Display Semibold" pitchFamily="2" charset="0"/>
+                <a:ea typeface="+mj-ea"/>
+                <a:cs typeface="+mj-cs"/>
+              </a:defRPr>
+            </a:lvl1pPr>
+          </a:lstStyle>
+          <a:p>
+            <a:r>
+              <a:rPr lang="en-US" sz="4000" dirty="0"/>
+              <a:t>Data transformations</a:t>
+            </a:r>
+          </a:p>
+        </p:txBody>
+      </p:sp>
+      <p:pic>
+        <p:nvPicPr>
+          <p:cNvPr id="7" name="Picture 2" descr="Data Structures in R | Data structures, Machine learning, Coding">
+            <a:extLst>
+              <a:ext uri="{FF2B5EF4-FFF2-40B4-BE49-F238E27FC236}">
+                <a16:creationId xmlns:a16="http://schemas.microsoft.com/office/drawing/2014/main" id="{50E0224D-7FA2-48B7-AF90-F5AED03F5E61}"/>
+              </a:ext>
+            </a:extLst>
+          </p:cNvPr>
+          <p:cNvPicPr>
+            <a:picLocks noChangeAspect="1" noChangeArrowheads="1"/>
+          </p:cNvPicPr>
+          <p:nvPr/>
+        </p:nvPicPr>
+        <p:blipFill rotWithShape="1">
+          <a:blip r:embed="rId2">
+            <a:extLst>
+              <a:ext uri="{28A0092B-C50C-407E-A947-70E740481C1C}">
+                <a14:useLocalDpi xmlns:a14="http://schemas.microsoft.com/office/drawing/2010/main" val="0"/>
+              </a:ext>
+            </a:extLst>
+          </a:blip>
+          <a:srcRect t="10483" b="7699"/>
+          <a:stretch/>
+        </p:blipFill>
+        <p:spPr bwMode="auto">
+          <a:xfrm>
+            <a:off x="7800108" y="2768849"/>
+            <a:ext cx="4200699" cy="3436936"/>
+          </a:xfrm>
+          <a:prstGeom prst="rect">
+            <a:avLst/>
+          </a:prstGeom>
+          <a:noFill/>
+          <a:extLst>
+            <a:ext uri="{909E8E84-426E-40DD-AFC4-6F175D3DCCD1}">
+              <a14:hiddenFill xmlns:a14="http://schemas.microsoft.com/office/drawing/2010/main">
+                <a:solidFill>
+                  <a:srgbClr val="FFFFFF"/>
+                </a:solidFill>
+              </a14:hiddenFill>
+            </a:ext>
+          </a:extLst>
+        </p:spPr>
+      </p:pic>
+    </p:spTree>
+    <p:extLst>
+      <p:ext uri="{BB962C8B-B14F-4D97-AF65-F5344CB8AC3E}">
+        <p14:creationId xmlns:p14="http://schemas.microsoft.com/office/powerpoint/2010/main" val="570650170"/>
       </p:ext>
     </p:extLst>
   </p:cSld>
